--- a/Projet/CA_mTLS_Demo.pptx
+++ b/Projet/CA_mTLS_Demo.pptx
@@ -74,20 +74,21 @@
             <a:noAutofit/>
           </a:bodyPr>
           <a:p>
-            <a:r>
-              <a:rPr b="0" lang="en-US" sz="1800" spc="-1" strike="noStrike">
-                <a:solidFill>
-                  <a:schemeClr val="dk1"/>
-                </a:solidFill>
-                <a:latin typeface="Calibri"/>
+            <a:pPr algn="ctr"/>
+            <a:r>
+              <a:rPr b="0" lang="en-US" sz="4400" spc="-1" strike="noStrike">
+                <a:solidFill>
+                  <a:srgbClr val="000000"/>
+                </a:solidFill>
+                <a:latin typeface="Arial"/>
               </a:rPr>
               <a:t>Click to move the slide</a:t>
             </a:r>
-            <a:endParaRPr b="0" lang="en-US" sz="1800" spc="-1" strike="noStrike">
-              <a:solidFill>
-                <a:schemeClr val="dk1"/>
-              </a:solidFill>
-              <a:latin typeface="Calibri"/>
+            <a:endParaRPr b="0" lang="en-US" sz="4400" spc="-1" strike="noStrike">
+              <a:solidFill>
+                <a:srgbClr val="000000"/>
+              </a:solidFill>
+              <a:latin typeface="Arial"/>
             </a:endParaRPr>
           </a:p>
         </p:txBody>
@@ -352,7 +353,7 @@
             <a:pPr indent="0" algn="r">
               <a:buNone/>
             </a:pPr>
-            <a:fld id="{10675E7C-5BBD-4C77-BF8B-423A8B401DA3}" type="slidenum">
+            <a:fld id="{7DF38A22-B999-42AE-8103-8296DAD21D61}" type="slidenum">
               <a:rPr b="0" lang="en-US" sz="1400" spc="-1" strike="noStrike">
                 <a:solidFill>
                   <a:srgbClr val="000000"/>
@@ -395,7 +396,7 @@
       </p:grpSpPr>
       <p:sp>
         <p:nvSpPr>
-          <p:cNvPr id="347" name="PlaceHolder 1"/>
+          <p:cNvPr id="357" name="PlaceHolder 1"/>
           <p:cNvSpPr>
             <a:spLocks noGrp="1"/>
           </p:cNvSpPr>
@@ -406,19 +407,19 @@
         <p:spPr>
           <a:xfrm>
             <a:off x="685800" y="1143000"/>
-            <a:ext cx="5486040" cy="3085920"/>
-          </a:xfrm>
-          <a:prstGeom prst="rect">
-            <a:avLst/>
-          </a:prstGeom>
-          <a:ln w="0">
-            <a:noFill/>
-          </a:ln>
-        </p:spPr>
-      </p:sp>
-      <p:sp>
-        <p:nvSpPr>
-          <p:cNvPr id="348" name="PlaceHolder 2"/>
+            <a:ext cx="5485320" cy="3085200"/>
+          </a:xfrm>
+          <a:prstGeom prst="rect">
+            <a:avLst/>
+          </a:prstGeom>
+          <a:ln w="0">
+            <a:noFill/>
+          </a:ln>
+        </p:spPr>
+      </p:sp>
+      <p:sp>
+        <p:nvSpPr>
+          <p:cNvPr id="358" name="PlaceHolder 2"/>
           <p:cNvSpPr>
             <a:spLocks noGrp="1"/>
           </p:cNvSpPr>
@@ -429,7 +430,7 @@
         <p:spPr>
           <a:xfrm>
             <a:off x="685800" y="4400640"/>
-            <a:ext cx="5486040" cy="3600000"/>
+            <a:ext cx="5485320" cy="3599280"/>
           </a:xfrm>
           <a:prstGeom prst="rect">
             <a:avLst/>
@@ -449,6 +450,9 @@
                 <a:spcPct val="100000"/>
               </a:lnSpc>
               <a:buNone/>
+              <a:tabLst>
+                <a:tab algn="l" pos="0"/>
+              </a:tabLst>
             </a:pPr>
             <a:r>
               <a:rPr b="0" lang="en-US" sz="2000" spc="-1" strike="noStrike">
@@ -457,52 +461,7 @@
                 </a:solidFill>
                 <a:latin typeface="Arial"/>
               </a:rPr>
-              <a:t>Welcome. This project builds a complete two-tier Public Key </a:t>
-            </a:r>
-            <a:r>
-              <a:rPr b="0" lang="en-US" sz="2000" spc="-1" strike="noStrike">
-                <a:solidFill>
-                  <a:srgbClr val="000000"/>
-                </a:solidFill>
-                <a:latin typeface="Arial"/>
-              </a:rPr>
-              <a:t>Infrastructure on Linux from scratch with OpenSSL, then uses it </a:t>
-            </a:r>
-            <a:r>
-              <a:rPr b="0" lang="en-US" sz="2000" spc="-1" strike="noStrike">
-                <a:solidFill>
-                  <a:srgbClr val="000000"/>
-                </a:solidFill>
-                <a:latin typeface="Arial"/>
-              </a:rPr>
-              <a:t>to deploy mutual TLS on Nginx and automate certificate </a:t>
-            </a:r>
-            <a:r>
-              <a:rPr b="0" lang="en-US" sz="2000" spc="-1" strike="noStrike">
-                <a:solidFill>
-                  <a:srgbClr val="000000"/>
-                </a:solidFill>
-                <a:latin typeface="Arial"/>
-              </a:rPr>
-              <a:t>renewal. Over the next ~15 minutes we'll walk through the </a:t>
-            </a:r>
-            <a:r>
-              <a:rPr b="0" lang="en-US" sz="2000" spc="-1" strike="noStrike">
-                <a:solidFill>
-                  <a:srgbClr val="000000"/>
-                </a:solidFill>
-                <a:latin typeface="Arial"/>
-              </a:rPr>
-              <a:t>theory, show the working deployment live, and finish with what </a:t>
-            </a:r>
-            <a:r>
-              <a:rPr b="0" lang="en-US" sz="2000" spc="-1" strike="noStrike">
-                <a:solidFill>
-                  <a:srgbClr val="000000"/>
-                </a:solidFill>
-                <a:latin typeface="Arial"/>
-              </a:rPr>
-              <a:t>real-world CA failures taught us.</a:t>
+              <a:t>Welcome. This project builds a complete two-tier Public Key Infrastructure on Linux from scratch with OpenSSL, then uses it to deploy mutual TLS on Nginx and automate certificate renewal. Over the next ~15 minutes we'll walk through the theory, show the working deployment live, and finish with what real-world CA failures taught us.</a:t>
             </a:r>
             <a:endParaRPr b="0" lang="en-US" sz="2000" spc="-1" strike="noStrike">
               <a:solidFill>
@@ -515,7 +474,7 @@
       </p:sp>
       <p:sp>
         <p:nvSpPr>
-          <p:cNvPr id="349" name="PlaceHolder 3"/>
+          <p:cNvPr id="359" name="PlaceHolder 3"/>
           <p:cNvSpPr>
             <a:spLocks noGrp="1"/>
           </p:cNvSpPr>
@@ -526,7 +485,7 @@
         <p:spPr>
           <a:xfrm>
             <a:off x="3884760" y="8685360"/>
-            <a:ext cx="2971440" cy="458280"/>
+            <a:ext cx="2970720" cy="457560"/>
           </a:xfrm>
           <a:prstGeom prst="rect">
             <a:avLst/>
@@ -546,6 +505,9 @@
                 <a:spcPct val="100000"/>
               </a:lnSpc>
               <a:buNone/>
+              <a:tabLst>
+                <a:tab algn="l" pos="0"/>
+              </a:tabLst>
               <a:defRPr b="0" lang="en-US" sz="1200" spc="-1" strike="noStrike">
                 <a:solidFill>
                   <a:schemeClr val="dk1"/>
@@ -561,8 +523,11 @@
                 <a:spcPct val="100000"/>
               </a:lnSpc>
               <a:buNone/>
-            </a:pPr>
-            <a:fld id="{46002B38-EF13-44FB-99F6-CC5E9CB8484F}" type="slidenum">
+              <a:tabLst>
+                <a:tab algn="l" pos="0"/>
+              </a:tabLst>
+            </a:pPr>
+            <a:fld id="{364C2DE2-5DD0-4FDA-801B-1F9D6872C13C}" type="slidenum">
               <a:rPr b="0" lang="en-US" sz="1200" spc="-1" strike="noStrike">
                 <a:solidFill>
                   <a:schemeClr val="dk1"/>
@@ -605,7 +570,7 @@
       </p:grpSpPr>
       <p:sp>
         <p:nvSpPr>
-          <p:cNvPr id="374" name="PlaceHolder 1"/>
+          <p:cNvPr id="384" name="PlaceHolder 1"/>
           <p:cNvSpPr>
             <a:spLocks noGrp="1"/>
           </p:cNvSpPr>
@@ -616,19 +581,19 @@
         <p:spPr>
           <a:xfrm>
             <a:off x="685800" y="1143000"/>
-            <a:ext cx="5486040" cy="3085920"/>
-          </a:xfrm>
-          <a:prstGeom prst="rect">
-            <a:avLst/>
-          </a:prstGeom>
-          <a:ln w="0">
-            <a:noFill/>
-          </a:ln>
-        </p:spPr>
-      </p:sp>
-      <p:sp>
-        <p:nvSpPr>
-          <p:cNvPr id="375" name="PlaceHolder 2"/>
+            <a:ext cx="5485320" cy="3085200"/>
+          </a:xfrm>
+          <a:prstGeom prst="rect">
+            <a:avLst/>
+          </a:prstGeom>
+          <a:ln w="0">
+            <a:noFill/>
+          </a:ln>
+        </p:spPr>
+      </p:sp>
+      <p:sp>
+        <p:nvSpPr>
+          <p:cNvPr id="385" name="PlaceHolder 2"/>
           <p:cNvSpPr>
             <a:spLocks noGrp="1"/>
           </p:cNvSpPr>
@@ -639,7 +604,7 @@
         <p:spPr>
           <a:xfrm>
             <a:off x="685800" y="4400640"/>
-            <a:ext cx="5486040" cy="3600000"/>
+            <a:ext cx="5485320" cy="3599280"/>
           </a:xfrm>
           <a:prstGeom prst="rect">
             <a:avLst/>
@@ -659,6 +624,9 @@
                 <a:spcPct val="100000"/>
               </a:lnSpc>
               <a:buNone/>
+              <a:tabLst>
+                <a:tab algn="l" pos="0"/>
+              </a:tabLst>
             </a:pPr>
             <a:r>
               <a:rPr b="0" lang="en-US" sz="2000" spc="-1" strike="noStrike">
@@ -680,7 +648,7 @@
       </p:sp>
       <p:sp>
         <p:nvSpPr>
-          <p:cNvPr id="376" name="PlaceHolder 3"/>
+          <p:cNvPr id="386" name="PlaceHolder 3"/>
           <p:cNvSpPr>
             <a:spLocks noGrp="1"/>
           </p:cNvSpPr>
@@ -691,7 +659,7 @@
         <p:spPr>
           <a:xfrm>
             <a:off x="3884760" y="8685360"/>
-            <a:ext cx="2971440" cy="458280"/>
+            <a:ext cx="2970720" cy="457560"/>
           </a:xfrm>
           <a:prstGeom prst="rect">
             <a:avLst/>
@@ -711,6 +679,9 @@
                 <a:spcPct val="100000"/>
               </a:lnSpc>
               <a:buNone/>
+              <a:tabLst>
+                <a:tab algn="l" pos="0"/>
+              </a:tabLst>
               <a:defRPr b="0" lang="en-US" sz="1200" spc="-1" strike="noStrike">
                 <a:solidFill>
                   <a:schemeClr val="dk1"/>
@@ -726,8 +697,11 @@
                 <a:spcPct val="100000"/>
               </a:lnSpc>
               <a:buNone/>
-            </a:pPr>
-            <a:fld id="{0FE11762-4381-4098-9707-2CD54F90A778}" type="slidenum">
+              <a:tabLst>
+                <a:tab algn="l" pos="0"/>
+              </a:tabLst>
+            </a:pPr>
+            <a:fld id="{9A7F05C0-46CB-4EE4-AB4B-AA33265FA01B}" type="slidenum">
               <a:rPr b="0" lang="en-US" sz="1200" spc="-1" strike="noStrike">
                 <a:solidFill>
                   <a:schemeClr val="dk1"/>
@@ -770,7 +744,7 @@
       </p:grpSpPr>
       <p:sp>
         <p:nvSpPr>
-          <p:cNvPr id="377" name="PlaceHolder 1"/>
+          <p:cNvPr id="387" name="PlaceHolder 1"/>
           <p:cNvSpPr>
             <a:spLocks noGrp="1"/>
           </p:cNvSpPr>
@@ -781,19 +755,19 @@
         <p:spPr>
           <a:xfrm>
             <a:off x="685800" y="1143000"/>
-            <a:ext cx="5486040" cy="3085920"/>
-          </a:xfrm>
-          <a:prstGeom prst="rect">
-            <a:avLst/>
-          </a:prstGeom>
-          <a:ln w="0">
-            <a:noFill/>
-          </a:ln>
-        </p:spPr>
-      </p:sp>
-      <p:sp>
-        <p:nvSpPr>
-          <p:cNvPr id="378" name="PlaceHolder 2"/>
+            <a:ext cx="5485320" cy="3085200"/>
+          </a:xfrm>
+          <a:prstGeom prst="rect">
+            <a:avLst/>
+          </a:prstGeom>
+          <a:ln w="0">
+            <a:noFill/>
+          </a:ln>
+        </p:spPr>
+      </p:sp>
+      <p:sp>
+        <p:nvSpPr>
+          <p:cNvPr id="388" name="PlaceHolder 2"/>
           <p:cNvSpPr>
             <a:spLocks noGrp="1"/>
           </p:cNvSpPr>
@@ -804,7 +778,7 @@
         <p:spPr>
           <a:xfrm>
             <a:off x="685800" y="4400640"/>
-            <a:ext cx="5486040" cy="3600000"/>
+            <a:ext cx="5485320" cy="3599280"/>
           </a:xfrm>
           <a:prstGeom prst="rect">
             <a:avLst/>
@@ -824,6 +798,9 @@
                 <a:spcPct val="100000"/>
               </a:lnSpc>
               <a:buNone/>
+              <a:tabLst>
+                <a:tab algn="l" pos="0"/>
+              </a:tabLst>
             </a:pPr>
             <a:r>
               <a:rPr b="0" lang="en-US" sz="2000" spc="-1" strike="noStrike">
@@ -845,7 +822,7 @@
       </p:sp>
       <p:sp>
         <p:nvSpPr>
-          <p:cNvPr id="379" name="PlaceHolder 3"/>
+          <p:cNvPr id="389" name="PlaceHolder 3"/>
           <p:cNvSpPr>
             <a:spLocks noGrp="1"/>
           </p:cNvSpPr>
@@ -856,7 +833,7 @@
         <p:spPr>
           <a:xfrm>
             <a:off x="3884760" y="8685360"/>
-            <a:ext cx="2971440" cy="458280"/>
+            <a:ext cx="2970720" cy="457560"/>
           </a:xfrm>
           <a:prstGeom prst="rect">
             <a:avLst/>
@@ -876,6 +853,9 @@
                 <a:spcPct val="100000"/>
               </a:lnSpc>
               <a:buNone/>
+              <a:tabLst>
+                <a:tab algn="l" pos="0"/>
+              </a:tabLst>
               <a:defRPr b="0" lang="en-US" sz="1200" spc="-1" strike="noStrike">
                 <a:solidFill>
                   <a:schemeClr val="dk1"/>
@@ -891,8 +871,11 @@
                 <a:spcPct val="100000"/>
               </a:lnSpc>
               <a:buNone/>
-            </a:pPr>
-            <a:fld id="{FD72A7B0-EBAE-410C-808E-466564C94801}" type="slidenum">
+              <a:tabLst>
+                <a:tab algn="l" pos="0"/>
+              </a:tabLst>
+            </a:pPr>
+            <a:fld id="{68FC19BC-0810-4C04-89FB-1BC4BD1B6604}" type="slidenum">
               <a:rPr b="0" lang="en-US" sz="1200" spc="-1" strike="noStrike">
                 <a:solidFill>
                   <a:schemeClr val="dk1"/>
@@ -935,7 +918,7 @@
       </p:grpSpPr>
       <p:sp>
         <p:nvSpPr>
-          <p:cNvPr id="380" name="PlaceHolder 1"/>
+          <p:cNvPr id="390" name="PlaceHolder 1"/>
           <p:cNvSpPr>
             <a:spLocks noGrp="1"/>
           </p:cNvSpPr>
@@ -946,19 +929,19 @@
         <p:spPr>
           <a:xfrm>
             <a:off x="685800" y="1143000"/>
-            <a:ext cx="5486040" cy="3085920"/>
-          </a:xfrm>
-          <a:prstGeom prst="rect">
-            <a:avLst/>
-          </a:prstGeom>
-          <a:ln w="0">
-            <a:noFill/>
-          </a:ln>
-        </p:spPr>
-      </p:sp>
-      <p:sp>
-        <p:nvSpPr>
-          <p:cNvPr id="381" name="PlaceHolder 2"/>
+            <a:ext cx="5485320" cy="3085200"/>
+          </a:xfrm>
+          <a:prstGeom prst="rect">
+            <a:avLst/>
+          </a:prstGeom>
+          <a:ln w="0">
+            <a:noFill/>
+          </a:ln>
+        </p:spPr>
+      </p:sp>
+      <p:sp>
+        <p:nvSpPr>
+          <p:cNvPr id="391" name="PlaceHolder 2"/>
           <p:cNvSpPr>
             <a:spLocks noGrp="1"/>
           </p:cNvSpPr>
@@ -969,7 +952,7 @@
         <p:spPr>
           <a:xfrm>
             <a:off x="685800" y="4400640"/>
-            <a:ext cx="5486040" cy="3600000"/>
+            <a:ext cx="5485320" cy="3599280"/>
           </a:xfrm>
           <a:prstGeom prst="rect">
             <a:avLst/>
@@ -989,6 +972,9 @@
                 <a:spcPct val="100000"/>
               </a:lnSpc>
               <a:buNone/>
+              <a:tabLst>
+                <a:tab algn="l" pos="0"/>
+              </a:tabLst>
             </a:pPr>
             <a:r>
               <a:rPr b="0" lang="en-US" sz="2000" spc="-1" strike="noStrike">
@@ -997,79 +983,7 @@
                 </a:solidFill>
                 <a:latin typeface="Arial"/>
               </a:rPr>
-              <a:t>This is the heart of the demo — switch to the terminal now. </a:t>
-            </a:r>
-            <a:r>
-              <a:rPr b="0" lang="en-US" sz="2000" spc="-1" strike="noStrike">
-                <a:solidFill>
-                  <a:srgbClr val="000000"/>
-                </a:solidFill>
-                <a:latin typeface="Arial"/>
-              </a:rPr>
-              <a:t>Run three curl commands. No client cert: rejected, 400, 'no </a:t>
-            </a:r>
-            <a:r>
-              <a:rPr b="0" lang="en-US" sz="2000" spc="-1" strike="noStrike">
-                <a:solidFill>
-                  <a:srgbClr val="000000"/>
-                </a:solidFill>
-                <a:latin typeface="Arial"/>
-              </a:rPr>
-              <a:t>certificate was sent.' Valid prof cert: 200 OK, and notice the X-</a:t>
-            </a:r>
-            <a:r>
-              <a:rPr b="0" lang="en-US" sz="2000" spc="-1" strike="noStrike">
-                <a:solidFill>
-                  <a:srgbClr val="000000"/>
-                </a:solidFill>
-                <a:latin typeface="Arial"/>
-              </a:rPr>
-              <a:t>Client-Verify SUCCESS header — Nginx tells us exactly who </a:t>
-            </a:r>
-            <a:r>
-              <a:rPr b="0" lang="en-US" sz="2000" spc="-1" strike="noStrike">
-                <a:solidFill>
-                  <a:srgbClr val="000000"/>
-                </a:solidFill>
-                <a:latin typeface="Arial"/>
-              </a:rPr>
-              <a:t>authenticated. Revoked student cert: rejected again, but with </a:t>
-            </a:r>
-            <a:r>
-              <a:rPr b="0" lang="en-US" sz="2000" spc="-1" strike="noStrike">
-                <a:solidFill>
-                  <a:srgbClr val="000000"/>
-                </a:solidFill>
-                <a:latin typeface="Arial"/>
-              </a:rPr>
-              <a:t>a different message, 'SSL certificate error,' proving the CRL is </a:t>
-            </a:r>
-            <a:r>
-              <a:rPr b="0" lang="en-US" sz="2000" spc="-1" strike="noStrike">
-                <a:solidFill>
-                  <a:srgbClr val="000000"/>
-                </a:solidFill>
-                <a:latin typeface="Arial"/>
-              </a:rPr>
-              <a:t>doing its job. Then open it in the browser to show the padlock </a:t>
-            </a:r>
-            <a:r>
-              <a:rPr b="0" lang="en-US" sz="2000" spc="-1" strike="noStrike">
-                <a:solidFill>
-                  <a:srgbClr val="000000"/>
-                </a:solidFill>
-                <a:latin typeface="Arial"/>
-              </a:rPr>
-              <a:t>and the chain. Three requests, three outcomes — that's </a:t>
-            </a:r>
-            <a:r>
-              <a:rPr b="0" lang="en-US" sz="2000" spc="-1" strike="noStrike">
-                <a:solidFill>
-                  <a:srgbClr val="000000"/>
-                </a:solidFill>
-                <a:latin typeface="Arial"/>
-              </a:rPr>
-              <a:t>mutual TLS plus revocation working end to end.</a:t>
+              <a:t>This is the heart of the demo — switch to the terminal now. Run three curl commands. No client cert: rejected, 400, 'no certificate was sent.' Valid prof cert: 200 OK, and notice the X-Client-Verify SUCCESS header — Nginx tells us exactly who authenticated. Revoked student cert: rejected again, but with a different message, 'SSL certificate error,' proving the CRL is doing its job. Then open it in the browser to show the padlock and the chain. Three requests, three outcomes — that's mutual TLS plus revocation working end to end.</a:t>
             </a:r>
             <a:endParaRPr b="0" lang="en-US" sz="2000" spc="-1" strike="noStrike">
               <a:solidFill>
@@ -1082,7 +996,7 @@
       </p:sp>
       <p:sp>
         <p:nvSpPr>
-          <p:cNvPr id="382" name="PlaceHolder 3"/>
+          <p:cNvPr id="392" name="PlaceHolder 3"/>
           <p:cNvSpPr>
             <a:spLocks noGrp="1"/>
           </p:cNvSpPr>
@@ -1093,7 +1007,7 @@
         <p:spPr>
           <a:xfrm>
             <a:off x="3884760" y="8685360"/>
-            <a:ext cx="2971440" cy="458280"/>
+            <a:ext cx="2970720" cy="457560"/>
           </a:xfrm>
           <a:prstGeom prst="rect">
             <a:avLst/>
@@ -1113,6 +1027,9 @@
                 <a:spcPct val="100000"/>
               </a:lnSpc>
               <a:buNone/>
+              <a:tabLst>
+                <a:tab algn="l" pos="0"/>
+              </a:tabLst>
               <a:defRPr b="0" lang="en-US" sz="1200" spc="-1" strike="noStrike">
                 <a:solidFill>
                   <a:schemeClr val="dk1"/>
@@ -1128,8 +1045,11 @@
                 <a:spcPct val="100000"/>
               </a:lnSpc>
               <a:buNone/>
-            </a:pPr>
-            <a:fld id="{6F0F4FB8-D691-4EBD-9A4A-1DE459FC0572}" type="slidenum">
+              <a:tabLst>
+                <a:tab algn="l" pos="0"/>
+              </a:tabLst>
+            </a:pPr>
+            <a:fld id="{0514880E-EA3C-4F0C-9551-B2C93DB4BD9E}" type="slidenum">
               <a:rPr b="0" lang="en-US" sz="1200" spc="-1" strike="noStrike">
                 <a:solidFill>
                   <a:schemeClr val="dk1"/>
@@ -1172,7 +1092,7 @@
       </p:grpSpPr>
       <p:sp>
         <p:nvSpPr>
-          <p:cNvPr id="383" name="PlaceHolder 1"/>
+          <p:cNvPr id="393" name="PlaceHolder 1"/>
           <p:cNvSpPr>
             <a:spLocks noGrp="1"/>
           </p:cNvSpPr>
@@ -1183,19 +1103,19 @@
         <p:spPr>
           <a:xfrm>
             <a:off x="685800" y="1143000"/>
-            <a:ext cx="5486040" cy="3085920"/>
-          </a:xfrm>
-          <a:prstGeom prst="rect">
-            <a:avLst/>
-          </a:prstGeom>
-          <a:ln w="0">
-            <a:noFill/>
-          </a:ln>
-        </p:spPr>
-      </p:sp>
-      <p:sp>
-        <p:nvSpPr>
-          <p:cNvPr id="384" name="PlaceHolder 2"/>
+            <a:ext cx="5485320" cy="3085200"/>
+          </a:xfrm>
+          <a:prstGeom prst="rect">
+            <a:avLst/>
+          </a:prstGeom>
+          <a:ln w="0">
+            <a:noFill/>
+          </a:ln>
+        </p:spPr>
+      </p:sp>
+      <p:sp>
+        <p:nvSpPr>
+          <p:cNvPr id="394" name="PlaceHolder 2"/>
           <p:cNvSpPr>
             <a:spLocks noGrp="1"/>
           </p:cNvSpPr>
@@ -1206,7 +1126,7 @@
         <p:spPr>
           <a:xfrm>
             <a:off x="685800" y="4400640"/>
-            <a:ext cx="5486040" cy="3600000"/>
+            <a:ext cx="5485320" cy="3599280"/>
           </a:xfrm>
           <a:prstGeom prst="rect">
             <a:avLst/>
@@ -1226,6 +1146,9 @@
                 <a:spcPct val="100000"/>
               </a:lnSpc>
               <a:buNone/>
+              <a:tabLst>
+                <a:tab algn="l" pos="0"/>
+              </a:tabLst>
             </a:pPr>
             <a:r>
               <a:rPr b="0" lang="en-US" sz="2000" spc="-1" strike="noStrike">
@@ -1247,7 +1170,7 @@
       </p:sp>
       <p:sp>
         <p:nvSpPr>
-          <p:cNvPr id="385" name="PlaceHolder 3"/>
+          <p:cNvPr id="395" name="PlaceHolder 3"/>
           <p:cNvSpPr>
             <a:spLocks noGrp="1"/>
           </p:cNvSpPr>
@@ -1258,7 +1181,7 @@
         <p:spPr>
           <a:xfrm>
             <a:off x="3884760" y="8685360"/>
-            <a:ext cx="2971440" cy="458280"/>
+            <a:ext cx="2970720" cy="457560"/>
           </a:xfrm>
           <a:prstGeom prst="rect">
             <a:avLst/>
@@ -1278,6 +1201,9 @@
                 <a:spcPct val="100000"/>
               </a:lnSpc>
               <a:buNone/>
+              <a:tabLst>
+                <a:tab algn="l" pos="0"/>
+              </a:tabLst>
               <a:defRPr b="0" lang="en-US" sz="1200" spc="-1" strike="noStrike">
                 <a:solidFill>
                   <a:schemeClr val="dk1"/>
@@ -1293,8 +1219,11 @@
                 <a:spcPct val="100000"/>
               </a:lnSpc>
               <a:buNone/>
-            </a:pPr>
-            <a:fld id="{B8E890A3-9966-4DD6-B753-45F77AEC5AF6}" type="slidenum">
+              <a:tabLst>
+                <a:tab algn="l" pos="0"/>
+              </a:tabLst>
+            </a:pPr>
+            <a:fld id="{FFA59889-0D8C-47AB-A1FC-B4D911E94490}" type="slidenum">
               <a:rPr b="0" lang="en-US" sz="1200" spc="-1" strike="noStrike">
                 <a:solidFill>
                   <a:schemeClr val="dk1"/>
@@ -1337,7 +1266,7 @@
       </p:grpSpPr>
       <p:sp>
         <p:nvSpPr>
-          <p:cNvPr id="386" name="PlaceHolder 1"/>
+          <p:cNvPr id="396" name="PlaceHolder 1"/>
           <p:cNvSpPr>
             <a:spLocks noGrp="1"/>
           </p:cNvSpPr>
@@ -1348,19 +1277,19 @@
         <p:spPr>
           <a:xfrm>
             <a:off x="685800" y="1143000"/>
-            <a:ext cx="5486040" cy="3085920"/>
-          </a:xfrm>
-          <a:prstGeom prst="rect">
-            <a:avLst/>
-          </a:prstGeom>
-          <a:ln w="0">
-            <a:noFill/>
-          </a:ln>
-        </p:spPr>
-      </p:sp>
-      <p:sp>
-        <p:nvSpPr>
-          <p:cNvPr id="387" name="PlaceHolder 2"/>
+            <a:ext cx="5485320" cy="3085200"/>
+          </a:xfrm>
+          <a:prstGeom prst="rect">
+            <a:avLst/>
+          </a:prstGeom>
+          <a:ln w="0">
+            <a:noFill/>
+          </a:ln>
+        </p:spPr>
+      </p:sp>
+      <p:sp>
+        <p:nvSpPr>
+          <p:cNvPr id="397" name="PlaceHolder 2"/>
           <p:cNvSpPr>
             <a:spLocks noGrp="1"/>
           </p:cNvSpPr>
@@ -1371,7 +1300,7 @@
         <p:spPr>
           <a:xfrm>
             <a:off x="685800" y="4400640"/>
-            <a:ext cx="5486040" cy="3600000"/>
+            <a:ext cx="5485320" cy="3599280"/>
           </a:xfrm>
           <a:prstGeom prst="rect">
             <a:avLst/>
@@ -1399,214 +1328,7 @@
                 </a:solidFill>
                 <a:latin typeface="Arial"/>
               </a:rPr>
-              <a:t>PKI's weak points aren't </a:t>
-            </a:r>
-            <a:r>
-              <a:rPr b="0" lang="en-US" sz="2000" spc="-1" strike="noStrike">
-                <a:solidFill>
-                  <a:srgbClr val="000000"/>
-                </a:solidFill>
-                <a:latin typeface="Arial"/>
-              </a:rPr>
-              <a:t>the cryptography — </a:t>
-            </a:r>
-            <a:r>
-              <a:rPr b="0" lang="en-US" sz="2000" spc="-1" strike="noStrike">
-                <a:solidFill>
-                  <a:srgbClr val="000000"/>
-                </a:solidFill>
-                <a:latin typeface="Arial"/>
-              </a:rPr>
-              <a:t>they're the edges: </a:t>
-            </a:r>
-            <a:r>
-              <a:rPr b="0" lang="en-US" sz="2000" spc="-1" strike="noStrike">
-                <a:solidFill>
-                  <a:srgbClr val="000000"/>
-                </a:solidFill>
-                <a:latin typeface="Arial"/>
-              </a:rPr>
-              <a:t>operations, governance, </a:t>
-            </a:r>
-            <a:r>
-              <a:rPr b="0" lang="en-US" sz="2000" spc="-1" strike="noStrike">
-                <a:solidFill>
-                  <a:srgbClr val="000000"/>
-                </a:solidFill>
-                <a:latin typeface="Arial"/>
-              </a:rPr>
-              <a:t>revocation. Four </a:t>
-            </a:r>
-            <a:r>
-              <a:rPr b="0" lang="en-US" sz="2000" spc="-1" strike="noStrike">
-                <a:solidFill>
-                  <a:srgbClr val="000000"/>
-                </a:solidFill>
-                <a:latin typeface="Arial"/>
-              </a:rPr>
-              <a:t>documented cases. </a:t>
-            </a:r>
-            <a:r>
-              <a:rPr b="0" lang="en-US" sz="2000" spc="-1" strike="noStrike">
-                <a:solidFill>
-                  <a:srgbClr val="000000"/>
-                </a:solidFill>
-                <a:latin typeface="Arial"/>
-              </a:rPr>
-              <a:t>DigiNotar: a breached </a:t>
-            </a:r>
-            <a:r>
-              <a:rPr b="0" lang="en-US" sz="2000" spc="-1" strike="noStrike">
-                <a:solidFill>
-                  <a:srgbClr val="000000"/>
-                </a:solidFill>
-                <a:latin typeface="Arial"/>
-              </a:rPr>
-              <a:t>CA issued fake Google </a:t>
-            </a:r>
-            <a:r>
-              <a:rPr b="0" lang="en-US" sz="2000" spc="-1" strike="noStrike">
-                <a:solidFill>
-                  <a:srgbClr val="000000"/>
-                </a:solidFill>
-                <a:latin typeface="Arial"/>
-              </a:rPr>
-              <a:t>certs to spy on Iranian </a:t>
-            </a:r>
-            <a:r>
-              <a:rPr b="0" lang="en-US" sz="2000" spc="-1" strike="noStrike">
-                <a:solidFill>
-                  <a:srgbClr val="000000"/>
-                </a:solidFill>
-                <a:latin typeface="Arial"/>
-              </a:rPr>
-              <a:t>users — which is </a:t>
-            </a:r>
-            <a:r>
-              <a:rPr b="0" lang="en-US" sz="2000" spc="-1" strike="noStrike">
-                <a:solidFill>
-                  <a:srgbClr val="000000"/>
-                </a:solidFill>
-                <a:latin typeface="Arial"/>
-              </a:rPr>
-              <a:t>exactly why we keep the </a:t>
-            </a:r>
-            <a:r>
-              <a:rPr b="0" lang="en-US" sz="2000" spc="-1" strike="noStrike">
-                <a:solidFill>
-                  <a:srgbClr val="000000"/>
-                </a:solidFill>
-                <a:latin typeface="Arial"/>
-              </a:rPr>
-              <a:t>Root offline. Symantec: </a:t>
-            </a:r>
-            <a:r>
-              <a:rPr b="0" lang="en-US" sz="2000" spc="-1" strike="noStrike">
-                <a:solidFill>
-                  <a:srgbClr val="000000"/>
-                </a:solidFill>
-                <a:latin typeface="Arial"/>
-              </a:rPr>
-              <a:t>tens of thousands of </a:t>
-            </a:r>
-            <a:r>
-              <a:rPr b="0" lang="en-US" sz="2000" spc="-1" strike="noStrike">
-                <a:solidFill>
-                  <a:srgbClr val="000000"/>
-                </a:solidFill>
-                <a:latin typeface="Arial"/>
-              </a:rPr>
-              <a:t>misissued certs, a </a:t>
-            </a:r>
-            <a:r>
-              <a:rPr b="0" lang="en-US" sz="2000" spc="-1" strike="noStrike">
-                <a:solidFill>
-                  <a:srgbClr val="000000"/>
-                </a:solidFill>
-                <a:latin typeface="Arial"/>
-              </a:rPr>
-              <a:t>governance failure. </a:t>
-            </a:r>
-            <a:r>
-              <a:rPr b="0" lang="en-US" sz="2000" spc="-1" strike="noStrike">
-                <a:solidFill>
-                  <a:srgbClr val="000000"/>
-                </a:solidFill>
-                <a:latin typeface="Arial"/>
-              </a:rPr>
-              <a:t>Heartbleed: mass key </a:t>
-            </a:r>
-            <a:r>
-              <a:rPr b="0" lang="en-US" sz="2000" spc="-1" strike="noStrike">
-                <a:solidFill>
-                  <a:srgbClr val="000000"/>
-                </a:solidFill>
-                <a:latin typeface="Arial"/>
-              </a:rPr>
-              <a:t>leakage exposed that </a:t>
-            </a:r>
-            <a:r>
-              <a:rPr b="0" lang="en-US" sz="2000" spc="-1" strike="noStrike">
-                <a:solidFill>
-                  <a:srgbClr val="000000"/>
-                </a:solidFill>
-                <a:latin typeface="Arial"/>
-              </a:rPr>
-              <a:t>revocation barely works, </a:t>
-            </a:r>
-            <a:r>
-              <a:rPr b="0" lang="en-US" sz="2000" spc="-1" strike="noStrike">
-                <a:solidFill>
-                  <a:srgbClr val="000000"/>
-                </a:solidFill>
-                <a:latin typeface="Arial"/>
-              </a:rPr>
-              <a:t>pushing the industry to </a:t>
-            </a:r>
-            <a:r>
-              <a:rPr b="0" lang="en-US" sz="2000" spc="-1" strike="noStrike">
-                <a:solidFill>
-                  <a:srgbClr val="000000"/>
-                </a:solidFill>
-                <a:latin typeface="Arial"/>
-              </a:rPr>
-              <a:t>short-lived certs. And </a:t>
-            </a:r>
-            <a:r>
-              <a:rPr b="0" lang="en-US" sz="2000" spc="-1" strike="noStrike">
-                <a:solidFill>
-                  <a:srgbClr val="000000"/>
-                </a:solidFill>
-                <a:latin typeface="Arial"/>
-              </a:rPr>
-              <a:t>Equifax: a single </a:t>
-            </a:r>
-            <a:r>
-              <a:rPr b="0" lang="en-US" sz="2000" spc="-1" strike="noStrike">
-                <a:solidFill>
-                  <a:srgbClr val="000000"/>
-                </a:solidFill>
-                <a:latin typeface="Arial"/>
-              </a:rPr>
-              <a:t>forgotten renewal. Each </a:t>
-            </a:r>
-            <a:r>
-              <a:rPr b="0" lang="en-US" sz="2000" spc="-1" strike="noStrike">
-                <a:solidFill>
-                  <a:srgbClr val="000000"/>
-                </a:solidFill>
-                <a:latin typeface="Arial"/>
-              </a:rPr>
-              <a:t>one maps directly to a </a:t>
-            </a:r>
-            <a:r>
-              <a:rPr b="0" lang="en-US" sz="2000" spc="-1" strike="noStrike">
-                <a:solidFill>
-                  <a:srgbClr val="000000"/>
-                </a:solidFill>
-                <a:latin typeface="Arial"/>
-              </a:rPr>
-              <a:t>choice in our build.</a:t>
+              <a:t>PKI's weak points aren't the cryptography — they're the edges, and our report documents six. DigiNotar: a breached CA issued fake Google certs to spy on Iranian users — why we keep the Root offline. Symantec: tens of thousands of misissued certs through resellers, a governance failure. Heartbleed: mass key leakage exposed that revocation barely works, pushing the industry to short-lived certs. CNNIC: a trusted CA delegated a sub-CA with no name constraint, caught only by Certificate Transparency. ComodoHacker: a single stolen reseller credential — no cryptography broken, pure human factor. Equifax: one forgotten renewal, 147 million records. Each maps straight to a design choice in our build.</a:t>
             </a:r>
             <a:endParaRPr b="0" lang="en-US" sz="2000" spc="-1" strike="noStrike">
               <a:solidFill>
@@ -1619,7 +1341,7 @@
       </p:sp>
       <p:sp>
         <p:nvSpPr>
-          <p:cNvPr id="388" name="PlaceHolder 3"/>
+          <p:cNvPr id="398" name="PlaceHolder 3"/>
           <p:cNvSpPr>
             <a:spLocks noGrp="1"/>
           </p:cNvSpPr>
@@ -1630,7 +1352,7 @@
         <p:spPr>
           <a:xfrm>
             <a:off x="3884760" y="8685360"/>
-            <a:ext cx="2971440" cy="458280"/>
+            <a:ext cx="2970720" cy="457560"/>
           </a:xfrm>
           <a:prstGeom prst="rect">
             <a:avLst/>
@@ -1650,6 +1372,9 @@
                 <a:spcPct val="100000"/>
               </a:lnSpc>
               <a:buNone/>
+              <a:tabLst>
+                <a:tab algn="l" pos="0"/>
+              </a:tabLst>
               <a:defRPr b="0" lang="en-US" sz="1200" spc="-1" strike="noStrike">
                 <a:solidFill>
                   <a:schemeClr val="dk1"/>
@@ -1665,8 +1390,11 @@
                 <a:spcPct val="100000"/>
               </a:lnSpc>
               <a:buNone/>
-            </a:pPr>
-            <a:fld id="{AE7E1002-C948-488A-BC74-1A794C278003}" type="slidenum">
+              <a:tabLst>
+                <a:tab algn="l" pos="0"/>
+              </a:tabLst>
+            </a:pPr>
+            <a:fld id="{ECF9CEC2-488E-440A-8D3F-7F9AF37DA24B}" type="slidenum">
               <a:rPr b="0" lang="en-US" sz="1200" spc="-1" strike="noStrike">
                 <a:solidFill>
                   <a:schemeClr val="dk1"/>
@@ -1709,7 +1437,7 @@
       </p:grpSpPr>
       <p:sp>
         <p:nvSpPr>
-          <p:cNvPr id="389" name="PlaceHolder 1"/>
+          <p:cNvPr id="399" name="PlaceHolder 1"/>
           <p:cNvSpPr>
             <a:spLocks noGrp="1"/>
           </p:cNvSpPr>
@@ -1720,19 +1448,19 @@
         <p:spPr>
           <a:xfrm>
             <a:off x="685800" y="1143000"/>
-            <a:ext cx="5486040" cy="3085920"/>
-          </a:xfrm>
-          <a:prstGeom prst="rect">
-            <a:avLst/>
-          </a:prstGeom>
-          <a:ln w="0">
-            <a:noFill/>
-          </a:ln>
-        </p:spPr>
-      </p:sp>
-      <p:sp>
-        <p:nvSpPr>
-          <p:cNvPr id="390" name="PlaceHolder 2"/>
+            <a:ext cx="5485320" cy="3085200"/>
+          </a:xfrm>
+          <a:prstGeom prst="rect">
+            <a:avLst/>
+          </a:prstGeom>
+          <a:ln w="0">
+            <a:noFill/>
+          </a:ln>
+        </p:spPr>
+      </p:sp>
+      <p:sp>
+        <p:nvSpPr>
+          <p:cNvPr id="400" name="PlaceHolder 2"/>
           <p:cNvSpPr>
             <a:spLocks noGrp="1"/>
           </p:cNvSpPr>
@@ -1743,7 +1471,7 @@
         <p:spPr>
           <a:xfrm>
             <a:off x="685800" y="4400640"/>
-            <a:ext cx="5486040" cy="3600000"/>
+            <a:ext cx="5485320" cy="3599280"/>
           </a:xfrm>
           <a:prstGeom prst="rect">
             <a:avLst/>
@@ -1763,6 +1491,9 @@
                 <a:spcPct val="100000"/>
               </a:lnSpc>
               <a:buNone/>
+              <a:tabLst>
+                <a:tab algn="l" pos="0"/>
+              </a:tabLst>
             </a:pPr>
             <a:r>
               <a:rPr b="0" lang="en-US" sz="2000" spc="-1" strike="noStrike">
@@ -1784,7 +1515,7 @@
       </p:sp>
       <p:sp>
         <p:nvSpPr>
-          <p:cNvPr id="391" name="PlaceHolder 3"/>
+          <p:cNvPr id="401" name="PlaceHolder 3"/>
           <p:cNvSpPr>
             <a:spLocks noGrp="1"/>
           </p:cNvSpPr>
@@ -1795,7 +1526,7 @@
         <p:spPr>
           <a:xfrm>
             <a:off x="3884760" y="8685360"/>
-            <a:ext cx="2971440" cy="458280"/>
+            <a:ext cx="2970720" cy="457560"/>
           </a:xfrm>
           <a:prstGeom prst="rect">
             <a:avLst/>
@@ -1815,6 +1546,9 @@
                 <a:spcPct val="100000"/>
               </a:lnSpc>
               <a:buNone/>
+              <a:tabLst>
+                <a:tab algn="l" pos="0"/>
+              </a:tabLst>
               <a:defRPr b="0" lang="en-US" sz="1200" spc="-1" strike="noStrike">
                 <a:solidFill>
                   <a:schemeClr val="dk1"/>
@@ -1830,8 +1564,11 @@
                 <a:spcPct val="100000"/>
               </a:lnSpc>
               <a:buNone/>
-            </a:pPr>
-            <a:fld id="{9DBC3743-AFF1-4D5F-B366-0D9A3EEFFA17}" type="slidenum">
+              <a:tabLst>
+                <a:tab algn="l" pos="0"/>
+              </a:tabLst>
+            </a:pPr>
+            <a:fld id="{84FAF5D4-B1C9-4F19-B04A-D12C44C539DF}" type="slidenum">
               <a:rPr b="0" lang="en-US" sz="1200" spc="-1" strike="noStrike">
                 <a:solidFill>
                   <a:schemeClr val="dk1"/>
@@ -1874,7 +1611,7 @@
       </p:grpSpPr>
       <p:sp>
         <p:nvSpPr>
-          <p:cNvPr id="350" name="PlaceHolder 1"/>
+          <p:cNvPr id="360" name="PlaceHolder 1"/>
           <p:cNvSpPr>
             <a:spLocks noGrp="1"/>
           </p:cNvSpPr>
@@ -1885,19 +1622,19 @@
         <p:spPr>
           <a:xfrm>
             <a:off x="685800" y="1143000"/>
-            <a:ext cx="5486040" cy="3085920"/>
-          </a:xfrm>
-          <a:prstGeom prst="rect">
-            <a:avLst/>
-          </a:prstGeom>
-          <a:ln w="0">
-            <a:noFill/>
-          </a:ln>
-        </p:spPr>
-      </p:sp>
-      <p:sp>
-        <p:nvSpPr>
-          <p:cNvPr id="351" name="PlaceHolder 2"/>
+            <a:ext cx="5485320" cy="3085200"/>
+          </a:xfrm>
+          <a:prstGeom prst="rect">
+            <a:avLst/>
+          </a:prstGeom>
+          <a:ln w="0">
+            <a:noFill/>
+          </a:ln>
+        </p:spPr>
+      </p:sp>
+      <p:sp>
+        <p:nvSpPr>
+          <p:cNvPr id="361" name="PlaceHolder 2"/>
           <p:cNvSpPr>
             <a:spLocks noGrp="1"/>
           </p:cNvSpPr>
@@ -1908,7 +1645,7 @@
         <p:spPr>
           <a:xfrm>
             <a:off x="685800" y="4400640"/>
-            <a:ext cx="5486040" cy="3600000"/>
+            <a:ext cx="5485320" cy="3599280"/>
           </a:xfrm>
           <a:prstGeom prst="rect">
             <a:avLst/>
@@ -1928,6 +1665,9 @@
                 <a:spcPct val="100000"/>
               </a:lnSpc>
               <a:buNone/>
+              <a:tabLst>
+                <a:tab algn="l" pos="0"/>
+              </a:tabLst>
             </a:pPr>
             <a:r>
               <a:rPr b="0" lang="en-US" sz="2000" spc="-1" strike="noStrike">
@@ -1949,7 +1689,7 @@
       </p:sp>
       <p:sp>
         <p:nvSpPr>
-          <p:cNvPr id="352" name="PlaceHolder 3"/>
+          <p:cNvPr id="362" name="PlaceHolder 3"/>
           <p:cNvSpPr>
             <a:spLocks noGrp="1"/>
           </p:cNvSpPr>
@@ -1960,7 +1700,7 @@
         <p:spPr>
           <a:xfrm>
             <a:off x="3884760" y="8685360"/>
-            <a:ext cx="2971440" cy="458280"/>
+            <a:ext cx="2970720" cy="457560"/>
           </a:xfrm>
           <a:prstGeom prst="rect">
             <a:avLst/>
@@ -1980,6 +1720,9 @@
                 <a:spcPct val="100000"/>
               </a:lnSpc>
               <a:buNone/>
+              <a:tabLst>
+                <a:tab algn="l" pos="0"/>
+              </a:tabLst>
               <a:defRPr b="0" lang="en-US" sz="1200" spc="-1" strike="noStrike">
                 <a:solidFill>
                   <a:schemeClr val="dk1"/>
@@ -1995,8 +1738,11 @@
                 <a:spcPct val="100000"/>
               </a:lnSpc>
               <a:buNone/>
-            </a:pPr>
-            <a:fld id="{AE6CC84C-DD00-49D3-81E0-3E3501DC0E06}" type="slidenum">
+              <a:tabLst>
+                <a:tab algn="l" pos="0"/>
+              </a:tabLst>
+            </a:pPr>
+            <a:fld id="{474A2125-1D88-4ABD-A231-2D18D8379938}" type="slidenum">
               <a:rPr b="0" lang="en-US" sz="1200" spc="-1" strike="noStrike">
                 <a:solidFill>
                   <a:schemeClr val="dk1"/>
@@ -2039,7 +1785,7 @@
       </p:grpSpPr>
       <p:sp>
         <p:nvSpPr>
-          <p:cNvPr id="353" name="PlaceHolder 1"/>
+          <p:cNvPr id="363" name="PlaceHolder 1"/>
           <p:cNvSpPr>
             <a:spLocks noGrp="1"/>
           </p:cNvSpPr>
@@ -2050,19 +1796,19 @@
         <p:spPr>
           <a:xfrm>
             <a:off x="685800" y="1143000"/>
-            <a:ext cx="5486040" cy="3085920"/>
-          </a:xfrm>
-          <a:prstGeom prst="rect">
-            <a:avLst/>
-          </a:prstGeom>
-          <a:ln w="0">
-            <a:noFill/>
-          </a:ln>
-        </p:spPr>
-      </p:sp>
-      <p:sp>
-        <p:nvSpPr>
-          <p:cNvPr id="354" name="PlaceHolder 2"/>
+            <a:ext cx="5485320" cy="3085200"/>
+          </a:xfrm>
+          <a:prstGeom prst="rect">
+            <a:avLst/>
+          </a:prstGeom>
+          <a:ln w="0">
+            <a:noFill/>
+          </a:ln>
+        </p:spPr>
+      </p:sp>
+      <p:sp>
+        <p:nvSpPr>
+          <p:cNvPr id="364" name="PlaceHolder 2"/>
           <p:cNvSpPr>
             <a:spLocks noGrp="1"/>
           </p:cNvSpPr>
@@ -2073,7 +1819,7 @@
         <p:spPr>
           <a:xfrm>
             <a:off x="685800" y="4400640"/>
-            <a:ext cx="5486040" cy="3600000"/>
+            <a:ext cx="5485320" cy="3599280"/>
           </a:xfrm>
           <a:prstGeom prst="rect">
             <a:avLst/>
@@ -2093,6 +1839,9 @@
                 <a:spcPct val="100000"/>
               </a:lnSpc>
               <a:buNone/>
+              <a:tabLst>
+                <a:tab algn="l" pos="0"/>
+              </a:tabLst>
             </a:pPr>
             <a:r>
               <a:rPr b="0" lang="en-US" sz="2000" spc="-1" strike="noStrike">
@@ -2101,52 +1850,7 @@
                 </a:solidFill>
                 <a:latin typeface="Arial"/>
               </a:rPr>
-              <a:t>Everything in PKI exists to answer one question: does this </a:t>
-            </a:r>
-            <a:r>
-              <a:rPr b="0" lang="en-US" sz="2000" spc="-1" strike="noStrike">
-                <a:solidFill>
-                  <a:srgbClr val="000000"/>
-                </a:solidFill>
-                <a:latin typeface="Arial"/>
-              </a:rPr>
-              <a:t>public key really belong to who it claims? The CA acts as a </a:t>
-            </a:r>
-            <a:r>
-              <a:rPr b="0" lang="en-US" sz="2000" spc="-1" strike="noStrike">
-                <a:solidFill>
-                  <a:srgbClr val="000000"/>
-                </a:solidFill>
-                <a:latin typeface="Arial"/>
-              </a:rPr>
-              <a:t>trusted third party that vouches for that binding by signing the </a:t>
-            </a:r>
-            <a:r>
-              <a:rPr b="0" lang="en-US" sz="2000" spc="-1" strike="noStrike">
-                <a:solidFill>
-                  <a:srgbClr val="000000"/>
-                </a:solidFill>
-                <a:latin typeface="Arial"/>
-              </a:rPr>
-              <a:t>certificate. From that single mechanism we get the three TLS </a:t>
-            </a:r>
-            <a:r>
-              <a:rPr b="0" lang="en-US" sz="2000" spc="-1" strike="noStrike">
-                <a:solidFill>
-                  <a:srgbClr val="000000"/>
-                </a:solidFill>
-                <a:latin typeface="Arial"/>
-              </a:rPr>
-              <a:t>guarantees on the right: authentication, confidentiality and </a:t>
-            </a:r>
-            <a:r>
-              <a:rPr b="0" lang="en-US" sz="2000" spc="-1" strike="noStrike">
-                <a:solidFill>
-                  <a:srgbClr val="000000"/>
-                </a:solidFill>
-                <a:latin typeface="Arial"/>
-              </a:rPr>
-              <a:t>integrity.</a:t>
+              <a:t>Everything in PKI exists to answer one question: does this public key really belong to who it claims? The CA acts as a trusted third party that vouches for that binding by signing the certificate. From that single mechanism we get the three TLS guarantees on the right: authentication, confidentiality and integrity.</a:t>
             </a:r>
             <a:endParaRPr b="0" lang="en-US" sz="2000" spc="-1" strike="noStrike">
               <a:solidFill>
@@ -2159,7 +1863,7 @@
       </p:sp>
       <p:sp>
         <p:nvSpPr>
-          <p:cNvPr id="355" name="PlaceHolder 3"/>
+          <p:cNvPr id="365" name="PlaceHolder 3"/>
           <p:cNvSpPr>
             <a:spLocks noGrp="1"/>
           </p:cNvSpPr>
@@ -2170,7 +1874,7 @@
         <p:spPr>
           <a:xfrm>
             <a:off x="3884760" y="8685360"/>
-            <a:ext cx="2971440" cy="458280"/>
+            <a:ext cx="2970720" cy="457560"/>
           </a:xfrm>
           <a:prstGeom prst="rect">
             <a:avLst/>
@@ -2190,6 +1894,9 @@
                 <a:spcPct val="100000"/>
               </a:lnSpc>
               <a:buNone/>
+              <a:tabLst>
+                <a:tab algn="l" pos="0"/>
+              </a:tabLst>
               <a:defRPr b="0" lang="en-US" sz="1200" spc="-1" strike="noStrike">
                 <a:solidFill>
                   <a:schemeClr val="dk1"/>
@@ -2205,8 +1912,11 @@
                 <a:spcPct val="100000"/>
               </a:lnSpc>
               <a:buNone/>
-            </a:pPr>
-            <a:fld id="{0ABA8C0C-855A-4CF6-9D2C-491F8B983696}" type="slidenum">
+              <a:tabLst>
+                <a:tab algn="l" pos="0"/>
+              </a:tabLst>
+            </a:pPr>
+            <a:fld id="{CFCE6621-ED2F-44B6-A1C6-7BE37F7091C5}" type="slidenum">
               <a:rPr b="0" lang="en-US" sz="1200" spc="-1" strike="noStrike">
                 <a:solidFill>
                   <a:schemeClr val="dk1"/>
@@ -2249,7 +1959,7 @@
       </p:grpSpPr>
       <p:sp>
         <p:nvSpPr>
-          <p:cNvPr id="356" name="PlaceHolder 1"/>
+          <p:cNvPr id="366" name="PlaceHolder 1"/>
           <p:cNvSpPr>
             <a:spLocks noGrp="1"/>
           </p:cNvSpPr>
@@ -2260,19 +1970,19 @@
         <p:spPr>
           <a:xfrm>
             <a:off x="685800" y="1143000"/>
-            <a:ext cx="5486040" cy="3085920"/>
-          </a:xfrm>
-          <a:prstGeom prst="rect">
-            <a:avLst/>
-          </a:prstGeom>
-          <a:ln w="0">
-            <a:noFill/>
-          </a:ln>
-        </p:spPr>
-      </p:sp>
-      <p:sp>
-        <p:nvSpPr>
-          <p:cNvPr id="357" name="PlaceHolder 2"/>
+            <a:ext cx="5485320" cy="3085200"/>
+          </a:xfrm>
+          <a:prstGeom prst="rect">
+            <a:avLst/>
+          </a:prstGeom>
+          <a:ln w="0">
+            <a:noFill/>
+          </a:ln>
+        </p:spPr>
+      </p:sp>
+      <p:sp>
+        <p:nvSpPr>
+          <p:cNvPr id="367" name="PlaceHolder 2"/>
           <p:cNvSpPr>
             <a:spLocks noGrp="1"/>
           </p:cNvSpPr>
@@ -2283,7 +1993,7 @@
         <p:spPr>
           <a:xfrm>
             <a:off x="685800" y="4400640"/>
-            <a:ext cx="5486040" cy="3600000"/>
+            <a:ext cx="5485320" cy="3599280"/>
           </a:xfrm>
           <a:prstGeom prst="rect">
             <a:avLst/>
@@ -2303,6 +2013,9 @@
                 <a:spcPct val="100000"/>
               </a:lnSpc>
               <a:buNone/>
+              <a:tabLst>
+                <a:tab algn="l" pos="0"/>
+              </a:tabLst>
             </a:pPr>
             <a:r>
               <a:rPr b="0" lang="en-US" sz="2000" spc="-1" strike="noStrike">
@@ -2324,7 +2037,7 @@
       </p:sp>
       <p:sp>
         <p:nvSpPr>
-          <p:cNvPr id="358" name="PlaceHolder 3"/>
+          <p:cNvPr id="368" name="PlaceHolder 3"/>
           <p:cNvSpPr>
             <a:spLocks noGrp="1"/>
           </p:cNvSpPr>
@@ -2335,7 +2048,7 @@
         <p:spPr>
           <a:xfrm>
             <a:off x="3884760" y="8685360"/>
-            <a:ext cx="2971440" cy="458280"/>
+            <a:ext cx="2970720" cy="457560"/>
           </a:xfrm>
           <a:prstGeom prst="rect">
             <a:avLst/>
@@ -2355,6 +2068,9 @@
                 <a:spcPct val="100000"/>
               </a:lnSpc>
               <a:buNone/>
+              <a:tabLst>
+                <a:tab algn="l" pos="0"/>
+              </a:tabLst>
               <a:defRPr b="0" lang="en-US" sz="1200" spc="-1" strike="noStrike">
                 <a:solidFill>
                   <a:schemeClr val="dk1"/>
@@ -2370,8 +2086,11 @@
                 <a:spcPct val="100000"/>
               </a:lnSpc>
               <a:buNone/>
-            </a:pPr>
-            <a:fld id="{941A2ABE-CF07-48E3-A046-02D4C23F9998}" type="slidenum">
+              <a:tabLst>
+                <a:tab algn="l" pos="0"/>
+              </a:tabLst>
+            </a:pPr>
+            <a:fld id="{DCBC6EEB-E9F5-4B19-A550-702A8A4C5A50}" type="slidenum">
               <a:rPr b="0" lang="en-US" sz="1200" spc="-1" strike="noStrike">
                 <a:solidFill>
                   <a:schemeClr val="dk1"/>
@@ -2414,7 +2133,7 @@
       </p:grpSpPr>
       <p:sp>
         <p:nvSpPr>
-          <p:cNvPr id="359" name="PlaceHolder 1"/>
+          <p:cNvPr id="369" name="PlaceHolder 1"/>
           <p:cNvSpPr>
             <a:spLocks noGrp="1"/>
           </p:cNvSpPr>
@@ -2425,19 +2144,19 @@
         <p:spPr>
           <a:xfrm>
             <a:off x="685800" y="1143000"/>
-            <a:ext cx="5486040" cy="3085920"/>
-          </a:xfrm>
-          <a:prstGeom prst="rect">
-            <a:avLst/>
-          </a:prstGeom>
-          <a:ln w="0">
-            <a:noFill/>
-          </a:ln>
-        </p:spPr>
-      </p:sp>
-      <p:sp>
-        <p:nvSpPr>
-          <p:cNvPr id="360" name="PlaceHolder 2"/>
+            <a:ext cx="5485320" cy="3085200"/>
+          </a:xfrm>
+          <a:prstGeom prst="rect">
+            <a:avLst/>
+          </a:prstGeom>
+          <a:ln w="0">
+            <a:noFill/>
+          </a:ln>
+        </p:spPr>
+      </p:sp>
+      <p:sp>
+        <p:nvSpPr>
+          <p:cNvPr id="370" name="PlaceHolder 2"/>
           <p:cNvSpPr>
             <a:spLocks noGrp="1"/>
           </p:cNvSpPr>
@@ -2448,7 +2167,7 @@
         <p:spPr>
           <a:xfrm>
             <a:off x="685800" y="4400640"/>
-            <a:ext cx="5486040" cy="3600000"/>
+            <a:ext cx="5485320" cy="3599280"/>
           </a:xfrm>
           <a:prstGeom prst="rect">
             <a:avLst/>
@@ -2468,6 +2187,9 @@
                 <a:spcPct val="100000"/>
               </a:lnSpc>
               <a:buNone/>
+              <a:tabLst>
+                <a:tab algn="l" pos="0"/>
+              </a:tabLst>
             </a:pPr>
             <a:r>
               <a:rPr b="0" lang="en-US" sz="2000" spc="-1" strike="noStrike">
@@ -2476,169 +2198,7 @@
                 </a:solidFill>
                 <a:latin typeface="Arial"/>
               </a:rPr>
-              <a:t>Public PKI uses a </a:t>
-            </a:r>
-            <a:r>
-              <a:rPr b="0" lang="en-US" sz="2000" spc="-1" strike="noStrike">
-                <a:solidFill>
-                  <a:srgbClr val="000000"/>
-                </a:solidFill>
-                <a:latin typeface="Arial"/>
-              </a:rPr>
-              <a:t>hierarchy. The Root is </a:t>
-            </a:r>
-            <a:r>
-              <a:rPr b="0" lang="en-US" sz="2000" spc="-1" strike="noStrike">
-                <a:solidFill>
-                  <a:srgbClr val="000000"/>
-                </a:solidFill>
-                <a:latin typeface="Arial"/>
-              </a:rPr>
-              <a:t>the trust anchor — self-</a:t>
-            </a:r>
-            <a:r>
-              <a:rPr b="0" lang="en-US" sz="2000" spc="-1" strike="noStrike">
-                <a:solidFill>
-                  <a:srgbClr val="000000"/>
-                </a:solidFill>
-                <a:latin typeface="Arial"/>
-              </a:rPr>
-              <a:t>signed, very long-lived, </a:t>
-            </a:r>
-            <a:r>
-              <a:rPr b="0" lang="en-US" sz="2000" spc="-1" strike="noStrike">
-                <a:solidFill>
-                  <a:srgbClr val="000000"/>
-                </a:solidFill>
-                <a:latin typeface="Arial"/>
-              </a:rPr>
-              <a:t>and kept offline. It signs </a:t>
-            </a:r>
-            <a:r>
-              <a:rPr b="0" lang="en-US" sz="2000" spc="-1" strike="noStrike">
-                <a:solidFill>
-                  <a:srgbClr val="000000"/>
-                </a:solidFill>
-                <a:latin typeface="Arial"/>
-              </a:rPr>
-              <a:t>exactly one thing: the </a:t>
-            </a:r>
-            <a:r>
-              <a:rPr b="0" lang="en-US" sz="2000" spc="-1" strike="noStrike">
-                <a:solidFill>
-                  <a:srgbClr val="000000"/>
-                </a:solidFill>
-                <a:latin typeface="Arial"/>
-              </a:rPr>
-              <a:t>Intermediate. The </a:t>
-            </a:r>
-            <a:r>
-              <a:rPr b="0" lang="en-US" sz="2000" spc="-1" strike="noStrike">
-                <a:solidFill>
-                  <a:srgbClr val="000000"/>
-                </a:solidFill>
-                <a:latin typeface="Arial"/>
-              </a:rPr>
-              <a:t>Intermediate does the </a:t>
-            </a:r>
-            <a:r>
-              <a:rPr b="0" lang="en-US" sz="2000" spc="-1" strike="noStrike">
-                <a:solidFill>
-                  <a:srgbClr val="000000"/>
-                </a:solidFill>
-                <a:latin typeface="Arial"/>
-              </a:rPr>
-              <a:t>daily work of issuing </a:t>
-            </a:r>
-            <a:r>
-              <a:rPr b="0" lang="en-US" sz="2000" spc="-1" strike="noStrike">
-                <a:solidFill>
-                  <a:srgbClr val="000000"/>
-                </a:solidFill>
-                <a:latin typeface="Arial"/>
-              </a:rPr>
-              <a:t>server and client certs. </a:t>
-            </a:r>
-            <a:r>
-              <a:rPr b="0" lang="en-US" sz="2000" spc="-1" strike="noStrike">
-                <a:solidFill>
-                  <a:srgbClr val="000000"/>
-                </a:solidFill>
-                <a:latin typeface="Arial"/>
-              </a:rPr>
-              <a:t>The pathlen:0 constraint </a:t>
-            </a:r>
-            <a:r>
-              <a:rPr b="0" lang="en-US" sz="2000" spc="-1" strike="noStrike">
-                <a:solidFill>
-                  <a:srgbClr val="000000"/>
-                </a:solidFill>
-                <a:latin typeface="Arial"/>
-              </a:rPr>
-              <a:t>stops it from creating </a:t>
-            </a:r>
-            <a:r>
-              <a:rPr b="0" lang="en-US" sz="2000" spc="-1" strike="noStrike">
-                <a:solidFill>
-                  <a:srgbClr val="000000"/>
-                </a:solidFill>
-                <a:latin typeface="Arial"/>
-              </a:rPr>
-              <a:t>further CAs. The payoff </a:t>
-            </a:r>
-            <a:r>
-              <a:rPr b="0" lang="en-US" sz="2000" spc="-1" strike="noStrike">
-                <a:solidFill>
-                  <a:srgbClr val="000000"/>
-                </a:solidFill>
-                <a:latin typeface="Arial"/>
-              </a:rPr>
-              <a:t>is in the banner: if the </a:t>
-            </a:r>
-            <a:r>
-              <a:rPr b="0" lang="en-US" sz="2000" spc="-1" strike="noStrike">
-                <a:solidFill>
-                  <a:srgbClr val="000000"/>
-                </a:solidFill>
-                <a:latin typeface="Arial"/>
-              </a:rPr>
-              <a:t>online Intermediate is </a:t>
-            </a:r>
-            <a:r>
-              <a:rPr b="0" lang="en-US" sz="2000" spc="-1" strike="noStrike">
-                <a:solidFill>
-                  <a:srgbClr val="000000"/>
-                </a:solidFill>
-                <a:latin typeface="Arial"/>
-              </a:rPr>
-              <a:t>ever compromised, you </a:t>
-            </a:r>
-            <a:r>
-              <a:rPr b="0" lang="en-US" sz="2000" spc="-1" strike="noStrike">
-                <a:solidFill>
-                  <a:srgbClr val="000000"/>
-                </a:solidFill>
-                <a:latin typeface="Arial"/>
-              </a:rPr>
-              <a:t>revoke and replace it </a:t>
-            </a:r>
-            <a:r>
-              <a:rPr b="0" lang="en-US" sz="2000" spc="-1" strike="noStrike">
-                <a:solidFill>
-                  <a:srgbClr val="000000"/>
-                </a:solidFill>
-                <a:latin typeface="Arial"/>
-              </a:rPr>
-              <a:t>without touching the </a:t>
-            </a:r>
-            <a:r>
-              <a:rPr b="0" lang="en-US" sz="2000" spc="-1" strike="noStrike">
-                <a:solidFill>
-                  <a:srgbClr val="000000"/>
-                </a:solidFill>
-                <a:latin typeface="Arial"/>
-              </a:rPr>
-              <a:t>Root.</a:t>
+              <a:t>Public PKI uses a hierarchy. The Root is the trust anchor — self-signed, very long-lived, and kept offline. It signs exactly one thing: the Intermediate. The Intermediate does the daily work of issuing server and client certs. The pathlen:0 constraint stops it from creating further CAs. The payoff is in the banner: if the online Intermediate is ever compromised, you revoke and replace it without touching the Root.</a:t>
             </a:r>
             <a:endParaRPr b="0" lang="en-US" sz="2000" spc="-1" strike="noStrike">
               <a:solidFill>
@@ -2651,7 +2211,7 @@
       </p:sp>
       <p:sp>
         <p:nvSpPr>
-          <p:cNvPr id="361" name="PlaceHolder 3"/>
+          <p:cNvPr id="371" name="PlaceHolder 3"/>
           <p:cNvSpPr>
             <a:spLocks noGrp="1"/>
           </p:cNvSpPr>
@@ -2662,7 +2222,7 @@
         <p:spPr>
           <a:xfrm>
             <a:off x="3884760" y="8685360"/>
-            <a:ext cx="2971440" cy="458280"/>
+            <a:ext cx="2970720" cy="457560"/>
           </a:xfrm>
           <a:prstGeom prst="rect">
             <a:avLst/>
@@ -2682,6 +2242,9 @@
                 <a:spcPct val="100000"/>
               </a:lnSpc>
               <a:buNone/>
+              <a:tabLst>
+                <a:tab algn="l" pos="0"/>
+              </a:tabLst>
               <a:defRPr b="0" lang="en-US" sz="1200" spc="-1" strike="noStrike">
                 <a:solidFill>
                   <a:schemeClr val="dk1"/>
@@ -2697,8 +2260,11 @@
                 <a:spcPct val="100000"/>
               </a:lnSpc>
               <a:buNone/>
-            </a:pPr>
-            <a:fld id="{A889D9E3-7ECF-4EC4-99B5-5B55F93F051F}" type="slidenum">
+              <a:tabLst>
+                <a:tab algn="l" pos="0"/>
+              </a:tabLst>
+            </a:pPr>
+            <a:fld id="{3A2B08F7-C15E-46DA-8B2F-F404222C5B9C}" type="slidenum">
               <a:rPr b="0" lang="en-US" sz="1200" spc="-1" strike="noStrike">
                 <a:solidFill>
                   <a:schemeClr val="dk1"/>
@@ -2741,7 +2307,7 @@
       </p:grpSpPr>
       <p:sp>
         <p:nvSpPr>
-          <p:cNvPr id="362" name="PlaceHolder 1"/>
+          <p:cNvPr id="372" name="PlaceHolder 1"/>
           <p:cNvSpPr>
             <a:spLocks noGrp="1"/>
           </p:cNvSpPr>
@@ -2752,19 +2318,19 @@
         <p:spPr>
           <a:xfrm>
             <a:off x="685800" y="1143000"/>
-            <a:ext cx="5486040" cy="3085920"/>
-          </a:xfrm>
-          <a:prstGeom prst="rect">
-            <a:avLst/>
-          </a:prstGeom>
-          <a:ln w="0">
-            <a:noFill/>
-          </a:ln>
-        </p:spPr>
-      </p:sp>
-      <p:sp>
-        <p:nvSpPr>
-          <p:cNvPr id="363" name="PlaceHolder 2"/>
+            <a:ext cx="5485320" cy="3085200"/>
+          </a:xfrm>
+          <a:prstGeom prst="rect">
+            <a:avLst/>
+          </a:prstGeom>
+          <a:ln w="0">
+            <a:noFill/>
+          </a:ln>
+        </p:spPr>
+      </p:sp>
+      <p:sp>
+        <p:nvSpPr>
+          <p:cNvPr id="373" name="PlaceHolder 2"/>
           <p:cNvSpPr>
             <a:spLocks noGrp="1"/>
           </p:cNvSpPr>
@@ -2775,7 +2341,7 @@
         <p:spPr>
           <a:xfrm>
             <a:off x="685800" y="4400640"/>
-            <a:ext cx="5486040" cy="3600000"/>
+            <a:ext cx="5485320" cy="3599280"/>
           </a:xfrm>
           <a:prstGeom prst="rect">
             <a:avLst/>
@@ -2795,6 +2361,9 @@
                 <a:spcPct val="100000"/>
               </a:lnSpc>
               <a:buNone/>
+              <a:tabLst>
+                <a:tab algn="l" pos="0"/>
+              </a:tabLst>
             </a:pPr>
             <a:r>
               <a:rPr b="0" lang="en-US" sz="2000" spc="-1" strike="noStrike">
@@ -2816,7 +2385,7 @@
       </p:sp>
       <p:sp>
         <p:nvSpPr>
-          <p:cNvPr id="364" name="PlaceHolder 3"/>
+          <p:cNvPr id="374" name="PlaceHolder 3"/>
           <p:cNvSpPr>
             <a:spLocks noGrp="1"/>
           </p:cNvSpPr>
@@ -2827,7 +2396,7 @@
         <p:spPr>
           <a:xfrm>
             <a:off x="3884760" y="8685360"/>
-            <a:ext cx="2971440" cy="458280"/>
+            <a:ext cx="2970720" cy="457560"/>
           </a:xfrm>
           <a:prstGeom prst="rect">
             <a:avLst/>
@@ -2847,6 +2416,9 @@
                 <a:spcPct val="100000"/>
               </a:lnSpc>
               <a:buNone/>
+              <a:tabLst>
+                <a:tab algn="l" pos="0"/>
+              </a:tabLst>
               <a:defRPr b="0" lang="en-US" sz="1200" spc="-1" strike="noStrike">
                 <a:solidFill>
                   <a:schemeClr val="dk1"/>
@@ -2862,8 +2434,11 @@
                 <a:spcPct val="100000"/>
               </a:lnSpc>
               <a:buNone/>
-            </a:pPr>
-            <a:fld id="{E0A0A55F-F78D-41A7-8F99-BBEF16C6D2E9}" type="slidenum">
+              <a:tabLst>
+                <a:tab algn="l" pos="0"/>
+              </a:tabLst>
+            </a:pPr>
+            <a:fld id="{FFD3A453-6C0B-4AE9-B1E4-E098CFD48CAA}" type="slidenum">
               <a:rPr b="0" lang="en-US" sz="1200" spc="-1" strike="noStrike">
                 <a:solidFill>
                   <a:schemeClr val="dk1"/>
@@ -2906,7 +2481,7 @@
       </p:grpSpPr>
       <p:sp>
         <p:nvSpPr>
-          <p:cNvPr id="365" name="PlaceHolder 1"/>
+          <p:cNvPr id="375" name="PlaceHolder 1"/>
           <p:cNvSpPr>
             <a:spLocks noGrp="1"/>
           </p:cNvSpPr>
@@ -2917,19 +2492,19 @@
         <p:spPr>
           <a:xfrm>
             <a:off x="685800" y="1143000"/>
-            <a:ext cx="5486040" cy="3085920"/>
-          </a:xfrm>
-          <a:prstGeom prst="rect">
-            <a:avLst/>
-          </a:prstGeom>
-          <a:ln w="0">
-            <a:noFill/>
-          </a:ln>
-        </p:spPr>
-      </p:sp>
-      <p:sp>
-        <p:nvSpPr>
-          <p:cNvPr id="366" name="PlaceHolder 2"/>
+            <a:ext cx="5485320" cy="3085200"/>
+          </a:xfrm>
+          <a:prstGeom prst="rect">
+            <a:avLst/>
+          </a:prstGeom>
+          <a:ln w="0">
+            <a:noFill/>
+          </a:ln>
+        </p:spPr>
+      </p:sp>
+      <p:sp>
+        <p:nvSpPr>
+          <p:cNvPr id="376" name="PlaceHolder 2"/>
           <p:cNvSpPr>
             <a:spLocks noGrp="1"/>
           </p:cNvSpPr>
@@ -2940,7 +2515,7 @@
         <p:spPr>
           <a:xfrm>
             <a:off x="685800" y="4400640"/>
-            <a:ext cx="5486040" cy="3600000"/>
+            <a:ext cx="5485320" cy="3599280"/>
           </a:xfrm>
           <a:prstGeom prst="rect">
             <a:avLst/>
@@ -2960,6 +2535,9 @@
                 <a:spcPct val="100000"/>
               </a:lnSpc>
               <a:buNone/>
+              <a:tabLst>
+                <a:tab algn="l" pos="0"/>
+              </a:tabLst>
             </a:pPr>
             <a:r>
               <a:rPr b="0" lang="en-US" sz="2000" spc="-1" strike="noStrike">
@@ -2981,7 +2559,7 @@
       </p:sp>
       <p:sp>
         <p:nvSpPr>
-          <p:cNvPr id="367" name="PlaceHolder 3"/>
+          <p:cNvPr id="377" name="PlaceHolder 3"/>
           <p:cNvSpPr>
             <a:spLocks noGrp="1"/>
           </p:cNvSpPr>
@@ -2992,7 +2570,7 @@
         <p:spPr>
           <a:xfrm>
             <a:off x="3884760" y="8685360"/>
-            <a:ext cx="2971440" cy="458280"/>
+            <a:ext cx="2970720" cy="457560"/>
           </a:xfrm>
           <a:prstGeom prst="rect">
             <a:avLst/>
@@ -3012,6 +2590,9 @@
                 <a:spcPct val="100000"/>
               </a:lnSpc>
               <a:buNone/>
+              <a:tabLst>
+                <a:tab algn="l" pos="0"/>
+              </a:tabLst>
               <a:defRPr b="0" lang="en-US" sz="1200" spc="-1" strike="noStrike">
                 <a:solidFill>
                   <a:schemeClr val="dk1"/>
@@ -3027,8 +2608,11 @@
                 <a:spcPct val="100000"/>
               </a:lnSpc>
               <a:buNone/>
-            </a:pPr>
-            <a:fld id="{7DD1DC4A-2CB3-44C1-A597-66184792CCFD}" type="slidenum">
+              <a:tabLst>
+                <a:tab algn="l" pos="0"/>
+              </a:tabLst>
+            </a:pPr>
+            <a:fld id="{834B9947-1262-4041-8A83-D2080B89439A}" type="slidenum">
               <a:rPr b="0" lang="en-US" sz="1200" spc="-1" strike="noStrike">
                 <a:solidFill>
                   <a:schemeClr val="dk1"/>
@@ -3071,7 +2655,7 @@
       </p:grpSpPr>
       <p:sp>
         <p:nvSpPr>
-          <p:cNvPr id="368" name="PlaceHolder 1"/>
+          <p:cNvPr id="378" name="PlaceHolder 1"/>
           <p:cNvSpPr>
             <a:spLocks noGrp="1"/>
           </p:cNvSpPr>
@@ -3082,19 +2666,19 @@
         <p:spPr>
           <a:xfrm>
             <a:off x="685800" y="1143000"/>
-            <a:ext cx="5486040" cy="3085920"/>
-          </a:xfrm>
-          <a:prstGeom prst="rect">
-            <a:avLst/>
-          </a:prstGeom>
-          <a:ln w="0">
-            <a:noFill/>
-          </a:ln>
-        </p:spPr>
-      </p:sp>
-      <p:sp>
-        <p:nvSpPr>
-          <p:cNvPr id="369" name="PlaceHolder 2"/>
+            <a:ext cx="5485320" cy="3085200"/>
+          </a:xfrm>
+          <a:prstGeom prst="rect">
+            <a:avLst/>
+          </a:prstGeom>
+          <a:ln w="0">
+            <a:noFill/>
+          </a:ln>
+        </p:spPr>
+      </p:sp>
+      <p:sp>
+        <p:nvSpPr>
+          <p:cNvPr id="379" name="PlaceHolder 2"/>
           <p:cNvSpPr>
             <a:spLocks noGrp="1"/>
           </p:cNvSpPr>
@@ -3105,7 +2689,7 @@
         <p:spPr>
           <a:xfrm>
             <a:off x="685800" y="4400640"/>
-            <a:ext cx="5486040" cy="3600000"/>
+            <a:ext cx="5485320" cy="3599280"/>
           </a:xfrm>
           <a:prstGeom prst="rect">
             <a:avLst/>
@@ -3125,6 +2709,9 @@
                 <a:spcPct val="100000"/>
               </a:lnSpc>
               <a:buNone/>
+              <a:tabLst>
+                <a:tab algn="l" pos="0"/>
+              </a:tabLst>
             </a:pPr>
             <a:r>
               <a:rPr b="0" lang="en-US" sz="2000" spc="-1" strike="noStrike">
@@ -3146,7 +2733,7 @@
       </p:sp>
       <p:sp>
         <p:nvSpPr>
-          <p:cNvPr id="370" name="PlaceHolder 3"/>
+          <p:cNvPr id="380" name="PlaceHolder 3"/>
           <p:cNvSpPr>
             <a:spLocks noGrp="1"/>
           </p:cNvSpPr>
@@ -3157,7 +2744,7 @@
         <p:spPr>
           <a:xfrm>
             <a:off x="3884760" y="8685360"/>
-            <a:ext cx="2971440" cy="458280"/>
+            <a:ext cx="2970720" cy="457560"/>
           </a:xfrm>
           <a:prstGeom prst="rect">
             <a:avLst/>
@@ -3177,6 +2764,9 @@
                 <a:spcPct val="100000"/>
               </a:lnSpc>
               <a:buNone/>
+              <a:tabLst>
+                <a:tab algn="l" pos="0"/>
+              </a:tabLst>
               <a:defRPr b="0" lang="en-US" sz="1200" spc="-1" strike="noStrike">
                 <a:solidFill>
                   <a:schemeClr val="dk1"/>
@@ -3192,8 +2782,11 @@
                 <a:spcPct val="100000"/>
               </a:lnSpc>
               <a:buNone/>
-            </a:pPr>
-            <a:fld id="{EEEE004F-BF60-4D7D-877B-2E91141CE646}" type="slidenum">
+              <a:tabLst>
+                <a:tab algn="l" pos="0"/>
+              </a:tabLst>
+            </a:pPr>
+            <a:fld id="{288111DB-8C3A-4CA9-AA1A-1895C68BF7B7}" type="slidenum">
               <a:rPr b="0" lang="en-US" sz="1200" spc="-1" strike="noStrike">
                 <a:solidFill>
                   <a:schemeClr val="dk1"/>
@@ -3236,7 +2829,7 @@
       </p:grpSpPr>
       <p:sp>
         <p:nvSpPr>
-          <p:cNvPr id="371" name="PlaceHolder 1"/>
+          <p:cNvPr id="381" name="PlaceHolder 1"/>
           <p:cNvSpPr>
             <a:spLocks noGrp="1"/>
           </p:cNvSpPr>
@@ -3247,19 +2840,19 @@
         <p:spPr>
           <a:xfrm>
             <a:off x="685800" y="1143000"/>
-            <a:ext cx="5486040" cy="3085920"/>
-          </a:xfrm>
-          <a:prstGeom prst="rect">
-            <a:avLst/>
-          </a:prstGeom>
-          <a:ln w="0">
-            <a:noFill/>
-          </a:ln>
-        </p:spPr>
-      </p:sp>
-      <p:sp>
-        <p:nvSpPr>
-          <p:cNvPr id="372" name="PlaceHolder 2"/>
+            <a:ext cx="5485320" cy="3085200"/>
+          </a:xfrm>
+          <a:prstGeom prst="rect">
+            <a:avLst/>
+          </a:prstGeom>
+          <a:ln w="0">
+            <a:noFill/>
+          </a:ln>
+        </p:spPr>
+      </p:sp>
+      <p:sp>
+        <p:nvSpPr>
+          <p:cNvPr id="382" name="PlaceHolder 2"/>
           <p:cNvSpPr>
             <a:spLocks noGrp="1"/>
           </p:cNvSpPr>
@@ -3270,7 +2863,7 @@
         <p:spPr>
           <a:xfrm>
             <a:off x="685800" y="4400640"/>
-            <a:ext cx="5486040" cy="3600000"/>
+            <a:ext cx="5485320" cy="3599280"/>
           </a:xfrm>
           <a:prstGeom prst="rect">
             <a:avLst/>
@@ -3290,6 +2883,9 @@
                 <a:spcPct val="100000"/>
               </a:lnSpc>
               <a:buNone/>
+              <a:tabLst>
+                <a:tab algn="l" pos="0"/>
+              </a:tabLst>
             </a:pPr>
             <a:r>
               <a:rPr b="0" lang="en-US" sz="2000" spc="-1" strike="noStrike">
@@ -3311,7 +2907,7 @@
       </p:sp>
       <p:sp>
         <p:nvSpPr>
-          <p:cNvPr id="373" name="PlaceHolder 3"/>
+          <p:cNvPr id="383" name="PlaceHolder 3"/>
           <p:cNvSpPr>
             <a:spLocks noGrp="1"/>
           </p:cNvSpPr>
@@ -3322,7 +2918,7 @@
         <p:spPr>
           <a:xfrm>
             <a:off x="3884760" y="8685360"/>
-            <a:ext cx="2971440" cy="458280"/>
+            <a:ext cx="2970720" cy="457560"/>
           </a:xfrm>
           <a:prstGeom prst="rect">
             <a:avLst/>
@@ -3342,6 +2938,9 @@
                 <a:spcPct val="100000"/>
               </a:lnSpc>
               <a:buNone/>
+              <a:tabLst>
+                <a:tab algn="l" pos="0"/>
+              </a:tabLst>
               <a:defRPr b="0" lang="en-US" sz="1200" spc="-1" strike="noStrike">
                 <a:solidFill>
                   <a:schemeClr val="dk1"/>
@@ -3357,8 +2956,11 @@
                 <a:spcPct val="100000"/>
               </a:lnSpc>
               <a:buNone/>
-            </a:pPr>
-            <a:fld id="{E65BF2D5-3F7E-4242-A9AE-58052FBE1AD6}" type="slidenum">
+              <a:tabLst>
+                <a:tab algn="l" pos="0"/>
+              </a:tabLst>
+            </a:pPr>
+            <a:fld id="{30FC4F03-D74D-496A-BFA7-C5CAC7B6C9AA}" type="slidenum">
               <a:rPr b="0" lang="en-US" sz="1200" spc="-1" strike="noStrike">
                 <a:solidFill>
                   <a:schemeClr val="dk1"/>
@@ -3456,32 +3058,23 @@
             <a:noAutofit/>
           </a:bodyPr>
           <a:p>
-            <a:pPr indent="0">
+            <a:pPr indent="0" algn="ctr">
               <a:buNone/>
             </a:pPr>
             <a:r>
-              <a:rPr b="0" lang="en-US" sz="1800" spc="-1" strike="noStrike">
-                <a:solidFill>
-                  <a:schemeClr val="dk1"/>
-                </a:solidFill>
-                <a:latin typeface="Calibri"/>
-              </a:rPr>
-              <a:t>Click to edit the title text </a:t>
-            </a:r>
-            <a:r>
-              <a:rPr b="0" lang="en-US" sz="1800" spc="-1" strike="noStrike">
-                <a:solidFill>
-                  <a:schemeClr val="dk1"/>
-                </a:solidFill>
-                <a:latin typeface="Calibri"/>
-              </a:rPr>
-              <a:t>format</a:t>
-            </a:r>
-            <a:endParaRPr b="0" lang="en-US" sz="1800" spc="-1" strike="noStrike">
-              <a:solidFill>
-                <a:schemeClr val="dk1"/>
-              </a:solidFill>
-              <a:latin typeface="Calibri"/>
+              <a:rPr b="0" lang="en-US" sz="4400" spc="-1" strike="noStrike">
+                <a:solidFill>
+                  <a:srgbClr val="000000"/>
+                </a:solidFill>
+                <a:latin typeface="Arial"/>
+              </a:rPr>
+              <a:t>Click to edit the title text format</a:t>
+            </a:r>
+            <a:endParaRPr b="0" lang="en-US" sz="4400" spc="-1" strike="noStrike">
+              <a:solidFill>
+                <a:srgbClr val="000000"/>
+              </a:solidFill>
+              <a:latin typeface="Arial"/>
             </a:endParaRPr>
           </a:p>
         </p:txBody>
@@ -3528,17 +3121,17 @@
             <a:r>
               <a:rPr b="0" lang="en-US" sz="3200" spc="-1" strike="noStrike">
                 <a:solidFill>
-                  <a:schemeClr val="dk1"/>
-                </a:solidFill>
-                <a:latin typeface="Calibri"/>
+                  <a:srgbClr val="000000"/>
+                </a:solidFill>
+                <a:latin typeface="Arial"/>
               </a:rPr>
               <a:t>Click to edit the outline text format</a:t>
             </a:r>
             <a:endParaRPr b="0" lang="en-US" sz="3200" spc="-1" strike="noStrike">
               <a:solidFill>
-                <a:schemeClr val="dk1"/>
-              </a:solidFill>
-              <a:latin typeface="Calibri"/>
+                <a:srgbClr val="000000"/>
+              </a:solidFill>
+              <a:latin typeface="Arial"/>
             </a:endParaRPr>
           </a:p>
           <a:p>
@@ -3554,19 +3147,19 @@
               <a:buChar char=""/>
             </a:pPr>
             <a:r>
-              <a:rPr b="0" lang="en-US" sz="2400" spc="-1" strike="noStrike">
-                <a:solidFill>
-                  <a:schemeClr val="dk1"/>
-                </a:solidFill>
-                <a:latin typeface="Calibri"/>
+              <a:rPr b="0" lang="en-US" sz="2800" spc="-1" strike="noStrike">
+                <a:solidFill>
+                  <a:srgbClr val="000000"/>
+                </a:solidFill>
+                <a:latin typeface="Arial"/>
               </a:rPr>
               <a:t>Second Outline Level</a:t>
             </a:r>
-            <a:endParaRPr b="0" lang="en-US" sz="2400" spc="-1" strike="noStrike">
-              <a:solidFill>
-                <a:schemeClr val="dk1"/>
-              </a:solidFill>
-              <a:latin typeface="Calibri"/>
+            <a:endParaRPr b="0" lang="en-US" sz="2800" spc="-1" strike="noStrike">
+              <a:solidFill>
+                <a:srgbClr val="000000"/>
+              </a:solidFill>
+              <a:latin typeface="Arial"/>
             </a:endParaRPr>
           </a:p>
           <a:p>
@@ -3582,19 +3175,19 @@
               <a:buChar char=""/>
             </a:pPr>
             <a:r>
-              <a:rPr b="0" lang="en-US" sz="2000" spc="-1" strike="noStrike">
-                <a:solidFill>
-                  <a:schemeClr val="dk1"/>
-                </a:solidFill>
-                <a:latin typeface="Calibri"/>
+              <a:rPr b="0" lang="en-US" sz="2400" spc="-1" strike="noStrike">
+                <a:solidFill>
+                  <a:srgbClr val="000000"/>
+                </a:solidFill>
+                <a:latin typeface="Arial"/>
               </a:rPr>
               <a:t>Third Outline Level</a:t>
             </a:r>
-            <a:endParaRPr b="0" lang="en-US" sz="2000" spc="-1" strike="noStrike">
-              <a:solidFill>
-                <a:schemeClr val="dk1"/>
-              </a:solidFill>
-              <a:latin typeface="Calibri"/>
+            <a:endParaRPr b="0" lang="en-US" sz="2400" spc="-1" strike="noStrike">
+              <a:solidFill>
+                <a:srgbClr val="000000"/>
+              </a:solidFill>
+              <a:latin typeface="Arial"/>
             </a:endParaRPr>
           </a:p>
           <a:p>
@@ -3612,17 +3205,17 @@
             <a:r>
               <a:rPr b="0" lang="en-US" sz="2000" spc="-1" strike="noStrike">
                 <a:solidFill>
-                  <a:schemeClr val="dk1"/>
-                </a:solidFill>
-                <a:latin typeface="Calibri"/>
+                  <a:srgbClr val="000000"/>
+                </a:solidFill>
+                <a:latin typeface="Arial"/>
               </a:rPr>
               <a:t>Fourth Outline Level</a:t>
             </a:r>
             <a:endParaRPr b="0" lang="en-US" sz="2000" spc="-1" strike="noStrike">
               <a:solidFill>
-                <a:schemeClr val="dk1"/>
-              </a:solidFill>
-              <a:latin typeface="Calibri"/>
+                <a:srgbClr val="000000"/>
+              </a:solidFill>
+              <a:latin typeface="Arial"/>
             </a:endParaRPr>
           </a:p>
           <a:p>
@@ -3640,17 +3233,17 @@
             <a:r>
               <a:rPr b="0" lang="en-US" sz="2000" spc="-1" strike="noStrike">
                 <a:solidFill>
-                  <a:schemeClr val="dk1"/>
-                </a:solidFill>
-                <a:latin typeface="Calibri"/>
+                  <a:srgbClr val="000000"/>
+                </a:solidFill>
+                <a:latin typeface="Arial"/>
               </a:rPr>
               <a:t>Fifth Outline Level</a:t>
             </a:r>
             <a:endParaRPr b="0" lang="en-US" sz="2000" spc="-1" strike="noStrike">
               <a:solidFill>
-                <a:schemeClr val="dk1"/>
-              </a:solidFill>
-              <a:latin typeface="Calibri"/>
+                <a:srgbClr val="000000"/>
+              </a:solidFill>
+              <a:latin typeface="Arial"/>
             </a:endParaRPr>
           </a:p>
           <a:p>
@@ -3668,17 +3261,17 @@
             <a:r>
               <a:rPr b="0" lang="en-US" sz="2000" spc="-1" strike="noStrike">
                 <a:solidFill>
-                  <a:schemeClr val="dk1"/>
-                </a:solidFill>
-                <a:latin typeface="Calibri"/>
+                  <a:srgbClr val="000000"/>
+                </a:solidFill>
+                <a:latin typeface="Arial"/>
               </a:rPr>
               <a:t>Sixth Outline Level</a:t>
             </a:r>
             <a:endParaRPr b="0" lang="en-US" sz="2000" spc="-1" strike="noStrike">
               <a:solidFill>
-                <a:schemeClr val="dk1"/>
-              </a:solidFill>
-              <a:latin typeface="Calibri"/>
+                <a:srgbClr val="000000"/>
+              </a:solidFill>
+              <a:latin typeface="Arial"/>
             </a:endParaRPr>
           </a:p>
           <a:p>
@@ -3696,17 +3289,17 @@
             <a:r>
               <a:rPr b="0" lang="en-US" sz="2000" spc="-1" strike="noStrike">
                 <a:solidFill>
-                  <a:schemeClr val="dk1"/>
-                </a:solidFill>
-                <a:latin typeface="Calibri"/>
+                  <a:srgbClr val="000000"/>
+                </a:solidFill>
+                <a:latin typeface="Arial"/>
               </a:rPr>
               <a:t>Seventh Outline Level</a:t>
             </a:r>
             <a:endParaRPr b="0" lang="en-US" sz="2000" spc="-1" strike="noStrike">
               <a:solidFill>
-                <a:schemeClr val="dk1"/>
-              </a:solidFill>
-              <a:latin typeface="Calibri"/>
+                <a:srgbClr val="000000"/>
+              </a:solidFill>
+              <a:latin typeface="Arial"/>
             </a:endParaRPr>
           </a:p>
         </p:txBody>
@@ -3757,7 +3350,7 @@
         <p:spPr>
           <a:xfrm>
             <a:off x="6766920" y="1600200"/>
-            <a:ext cx="1919880" cy="1919880"/>
+            <a:ext cx="1919160" cy="1919160"/>
           </a:xfrm>
           <a:prstGeom prst="rect">
             <a:avLst/>
@@ -3776,7 +3369,7 @@
         <p:spPr>
           <a:xfrm>
             <a:off x="548640" y="914400"/>
-            <a:ext cx="5486040" cy="273960"/>
+            <a:ext cx="5485320" cy="273240"/>
           </a:xfrm>
           <a:prstGeom prst="rect">
             <a:avLst/>
@@ -3806,7 +3399,7 @@
               </a:tabLst>
             </a:pPr>
             <a:r>
-              <a:rPr b="1" lang="en-US" sz="1300" spc="299" strike="noStrike">
+              <a:rPr b="1" lang="en-US" sz="1300" spc="293" strike="noStrike">
                 <a:solidFill>
                   <a:srgbClr val="33c2ce"/>
                 </a:solidFill>
@@ -3833,7 +3426,7 @@
         <p:spPr>
           <a:xfrm>
             <a:off x="502920" y="1280160"/>
-            <a:ext cx="5668920" cy="1371240"/>
+            <a:ext cx="5668200" cy="1370520"/>
           </a:xfrm>
           <a:prstGeom prst="rect">
             <a:avLst/>
@@ -3890,7 +3483,7 @@
         <p:spPr>
           <a:xfrm>
             <a:off x="548640" y="2743200"/>
-            <a:ext cx="5486040" cy="639720"/>
+            <a:ext cx="5485320" cy="639000"/>
           </a:xfrm>
           <a:prstGeom prst="rect">
             <a:avLst/>
@@ -3937,7 +3530,7 @@
         <p:spPr>
           <a:xfrm>
             <a:off x="503280" y="3475080"/>
-            <a:ext cx="5668920" cy="639720"/>
+            <a:ext cx="5668200" cy="639000"/>
           </a:xfrm>
           <a:prstGeom prst="rect">
             <a:avLst/>
@@ -3974,17 +3567,7 @@
                 <a:latin typeface="Calibri"/>
                 <a:ea typeface="Calibri"/>
               </a:rPr>
-              <a:t>·  </a:t>
-            </a:r>
-            <a:r>
-              <a:rPr b="0" lang="en-US" sz="1200" spc="-1" strike="noStrike">
-                <a:solidFill>
-                  <a:srgbClr val="d7e2e8"/>
-                </a:solidFill>
-                <a:latin typeface="Calibri"/>
-                <a:ea typeface="Calibri"/>
-              </a:rPr>
-              <a:t>Fernandez Ojeda Franklin  </a:t>
+              <a:t>·  Fernandez Ojeda Franklin  </a:t>
             </a:r>
             <a:endParaRPr b="0" lang="en-US" sz="1200" spc="-1" strike="noStrike">
               <a:solidFill>
@@ -4036,17 +3619,7 @@
                 <a:latin typeface="Calibri"/>
                 <a:ea typeface="Calibri"/>
               </a:rPr>
-              <a:t>· </a:t>
-            </a:r>
-            <a:r>
-              <a:rPr b="0" lang="en-US" sz="1200" spc="-1" strike="noStrike">
-                <a:solidFill>
-                  <a:srgbClr val="d7e2e8"/>
-                </a:solidFill>
-                <a:latin typeface="Calibri"/>
-                <a:ea typeface="Calibri"/>
-              </a:rPr>
-              <a:t> Otto Aleksandra</a:t>
+              <a:t>·  Otto Aleksandra</a:t>
             </a:r>
             <a:endParaRPr b="0" lang="en-US" sz="1200" spc="-1" strike="noStrike">
               <a:solidFill>
@@ -4072,17 +3645,7 @@
                 <a:latin typeface="Calibri"/>
                 <a:ea typeface="Calibri"/>
               </a:rPr>
-              <a:t>·  </a:t>
-            </a:r>
-            <a:r>
-              <a:rPr b="0" lang="en-US" sz="1200" spc="-1" strike="noStrike">
-                <a:solidFill>
-                  <a:srgbClr val="d7e2e8"/>
-                </a:solidFill>
-                <a:latin typeface="Calibri"/>
-                <a:ea typeface="Calibri"/>
-              </a:rPr>
-              <a:t>Rafaat Moheeb Eeskandar Abanoub  </a:t>
+              <a:t>·  Rafaat Moheeb Eeskandar Abanoub  </a:t>
             </a:r>
             <a:endParaRPr b="0" lang="en-US" sz="1200" spc="-1" strike="noStrike">
               <a:solidFill>
@@ -4128,7 +3691,7 @@
         <p:spPr>
           <a:xfrm>
             <a:off x="548640" y="4434840"/>
-            <a:ext cx="5486040" cy="273960"/>
+            <a:ext cx="5485320" cy="273240"/>
           </a:xfrm>
           <a:prstGeom prst="rect">
             <a:avLst/>
@@ -4222,7 +3785,7 @@
         <p:spPr>
           <a:xfrm>
             <a:off x="457200" y="384120"/>
-            <a:ext cx="566640" cy="566640"/>
+            <a:ext cx="565920" cy="565920"/>
           </a:xfrm>
           <a:prstGeom prst="ellipse">
             <a:avLst/>
@@ -4245,6 +3808,11 @@
             <a:noAutofit/>
           </a:bodyPr>
           <a:p>
+            <a:pPr>
+              <a:lnSpc>
+                <a:spcPct val="100000"/>
+              </a:lnSpc>
+            </a:pPr>
             <a:endParaRPr b="0" lang="en-US" sz="1800" spc="-1" strike="noStrike">
               <a:solidFill>
                 <a:srgbClr val="ffffff"/>
@@ -4267,7 +3835,7 @@
         <p:spPr>
           <a:xfrm>
             <a:off x="589680" y="516600"/>
-            <a:ext cx="301320" cy="301320"/>
+            <a:ext cx="300600" cy="300600"/>
           </a:xfrm>
           <a:prstGeom prst="rect">
             <a:avLst/>
@@ -4286,7 +3854,7 @@
         <p:spPr>
           <a:xfrm>
             <a:off x="1188720" y="402480"/>
-            <a:ext cx="7314840" cy="219240"/>
+            <a:ext cx="7314120" cy="218520"/>
           </a:xfrm>
           <a:prstGeom prst="rect">
             <a:avLst/>
@@ -4316,7 +3884,7 @@
               </a:tabLst>
             </a:pPr>
             <a:r>
-              <a:rPr b="1" lang="en-US" sz="1100" spc="199" strike="noStrike">
+              <a:rPr b="1" lang="en-US" sz="1100" spc="194" strike="noStrike">
                 <a:solidFill>
                   <a:srgbClr val="0f9c92"/>
                 </a:solidFill>
@@ -4343,7 +3911,7 @@
         <p:spPr>
           <a:xfrm>
             <a:off x="1170360" y="603360"/>
-            <a:ext cx="7497720" cy="456840"/>
+            <a:ext cx="7497000" cy="456120"/>
           </a:xfrm>
           <a:prstGeom prst="rect">
             <a:avLst/>
@@ -4399,7 +3967,7 @@
         </p:nvGraphicFramePr>
         <p:xfrm>
           <a:off x="640080" y="1508760"/>
-          <a:ext cx="7863480" cy="2852640"/>
+          <a:ext cx="7863480" cy="2851200"/>
         </p:xfrm>
         <a:graphic>
           <a:graphicData uri="http://schemas.openxmlformats.org/drawingml/2006/table">
@@ -4413,7 +3981,7 @@
               <a:tr h="475200">
                 <a:tc>
                   <a:txBody>
-                    <a:bodyPr lIns="50760" rIns="50760" tIns="50760" bIns="50760" anchor="ctr">
+                    <a:bodyPr lIns="50760" rIns="50760" anchor="ctr">
                       <a:noAutofit/>
                     </a:bodyPr>
                     <a:p>
@@ -4458,7 +4026,7 @@
                 </a:tc>
                 <a:tc>
                   <a:txBody>
-                    <a:bodyPr lIns="50760" rIns="50760" tIns="50760" bIns="50760" anchor="ctr">
+                    <a:bodyPr lIns="50760" rIns="50760" anchor="ctr">
                       <a:noAutofit/>
                     </a:bodyPr>
                     <a:p>
@@ -4520,7 +4088,7 @@
                 </a:tc>
                 <a:tc>
                   <a:txBody>
-                    <a:bodyPr lIns="50760" rIns="50760" tIns="50760" bIns="50760" anchor="ctr">
+                    <a:bodyPr lIns="50760" rIns="50760" anchor="ctr">
                       <a:noAutofit/>
                     </a:bodyPr>
                     <a:p>
@@ -4584,7 +4152,7 @@
               <a:tr h="475200">
                 <a:tc>
                   <a:txBody>
-                    <a:bodyPr lIns="50760" rIns="50760" tIns="50760" bIns="50760" anchor="ctr">
+                    <a:bodyPr lIns="50760" rIns="50760" anchor="ctr">
                       <a:noAutofit/>
                     </a:bodyPr>
                     <a:p>
@@ -4646,7 +4214,7 @@
                 </a:tc>
                 <a:tc>
                   <a:txBody>
-                    <a:bodyPr lIns="50760" rIns="50760" tIns="50760" bIns="50760" anchor="ctr">
+                    <a:bodyPr lIns="50760" rIns="50760" anchor="ctr">
                       <a:noAutofit/>
                     </a:bodyPr>
                     <a:p>
@@ -4708,7 +4276,7 @@
                 </a:tc>
                 <a:tc>
                   <a:txBody>
-                    <a:bodyPr lIns="50760" rIns="50760" tIns="50760" bIns="50760" anchor="ctr">
+                    <a:bodyPr lIns="50760" rIns="50760" anchor="ctr">
                       <a:noAutofit/>
                     </a:bodyPr>
                     <a:p>
@@ -4772,7 +4340,7 @@
               <a:tr h="475200">
                 <a:tc>
                   <a:txBody>
-                    <a:bodyPr lIns="50760" rIns="50760" tIns="50760" bIns="50760" anchor="ctr">
+                    <a:bodyPr lIns="50760" rIns="50760" anchor="ctr">
                       <a:noAutofit/>
                     </a:bodyPr>
                     <a:p>
@@ -4834,7 +4402,7 @@
                 </a:tc>
                 <a:tc>
                   <a:txBody>
-                    <a:bodyPr lIns="50760" rIns="50760" tIns="50760" bIns="50760" anchor="ctr">
+                    <a:bodyPr lIns="50760" rIns="50760" anchor="ctr">
                       <a:noAutofit/>
                     </a:bodyPr>
                     <a:p>
@@ -4896,7 +4464,7 @@
                 </a:tc>
                 <a:tc>
                   <a:txBody>
-                    <a:bodyPr lIns="50760" rIns="50760" tIns="50760" bIns="50760" anchor="ctr">
+                    <a:bodyPr lIns="50760" rIns="50760" anchor="ctr">
                       <a:noAutofit/>
                     </a:bodyPr>
                     <a:p>
@@ -4960,7 +4528,7 @@
               <a:tr h="475200">
                 <a:tc>
                   <a:txBody>
-                    <a:bodyPr lIns="50760" rIns="50760" tIns="50760" bIns="50760" anchor="ctr">
+                    <a:bodyPr lIns="50760" rIns="50760" anchor="ctr">
                       <a:noAutofit/>
                     </a:bodyPr>
                     <a:p>
@@ -5022,7 +4590,7 @@
                 </a:tc>
                 <a:tc>
                   <a:txBody>
-                    <a:bodyPr lIns="50760" rIns="50760" tIns="50760" bIns="50760" anchor="ctr">
+                    <a:bodyPr lIns="50760" rIns="50760" anchor="ctr">
                       <a:noAutofit/>
                     </a:bodyPr>
                     <a:p>
@@ -5084,7 +4652,7 @@
                 </a:tc>
                 <a:tc>
                   <a:txBody>
-                    <a:bodyPr lIns="50760" rIns="50760" tIns="50760" bIns="50760" anchor="ctr">
+                    <a:bodyPr lIns="50760" rIns="50760" anchor="ctr">
                       <a:noAutofit/>
                     </a:bodyPr>
                     <a:p>
@@ -5148,7 +4716,7 @@
               <a:tr h="475200">
                 <a:tc>
                   <a:txBody>
-                    <a:bodyPr lIns="50760" rIns="50760" tIns="50760" bIns="50760" anchor="ctr">
+                    <a:bodyPr lIns="50760" rIns="50760" anchor="ctr">
                       <a:noAutofit/>
                     </a:bodyPr>
                     <a:p>
@@ -5210,7 +4778,7 @@
                 </a:tc>
                 <a:tc>
                   <a:txBody>
-                    <a:bodyPr lIns="50760" rIns="50760" tIns="50760" bIns="50760" anchor="ctr">
+                    <a:bodyPr lIns="50760" rIns="50760" anchor="ctr">
                       <a:noAutofit/>
                     </a:bodyPr>
                     <a:p>
@@ -5272,7 +4840,7 @@
                 </a:tc>
                 <a:tc>
                   <a:txBody>
-                    <a:bodyPr lIns="50760" rIns="50760" tIns="50760" bIns="50760" anchor="ctr">
+                    <a:bodyPr lIns="50760" rIns="50760" anchor="ctr">
                       <a:noAutofit/>
                     </a:bodyPr>
                     <a:p>
@@ -5336,7 +4904,7 @@
               <a:tr h="475200">
                 <a:tc>
                   <a:txBody>
-                    <a:bodyPr lIns="50760" rIns="50760" tIns="50760" bIns="50760" anchor="ctr">
+                    <a:bodyPr lIns="50760" rIns="50760" anchor="ctr">
                       <a:noAutofit/>
                     </a:bodyPr>
                     <a:p>
@@ -5398,7 +4966,7 @@
                 </a:tc>
                 <a:tc>
                   <a:txBody>
-                    <a:bodyPr lIns="50760" rIns="50760" tIns="50760" bIns="50760" anchor="ctr">
+                    <a:bodyPr lIns="50760" rIns="50760" anchor="ctr">
                       <a:noAutofit/>
                     </a:bodyPr>
                     <a:p>
@@ -5460,7 +5028,7 @@
                 </a:tc>
                 <a:tc>
                   <a:txBody>
-                    <a:bodyPr lIns="50760" rIns="50760" tIns="50760" bIns="50760" anchor="ctr">
+                    <a:bodyPr lIns="50760" rIns="50760" anchor="ctr">
                       <a:noAutofit/>
                     </a:bodyPr>
                     <a:p>
@@ -5534,7 +5102,7 @@
         <p:spPr>
           <a:xfrm>
             <a:off x="457200" y="4855320"/>
-            <a:ext cx="5486040" cy="228240"/>
+            <a:ext cx="5485320" cy="227520"/>
           </a:xfrm>
           <a:prstGeom prst="rect">
             <a:avLst/>
@@ -5591,7 +5159,7 @@
         <p:spPr>
           <a:xfrm>
             <a:off x="8229600" y="4855320"/>
-            <a:ext cx="456840" cy="228240"/>
+            <a:ext cx="456120" cy="227520"/>
           </a:xfrm>
           <a:prstGeom prst="rect">
             <a:avLst/>
@@ -5685,7 +5253,7 @@
         <p:spPr>
           <a:xfrm>
             <a:off x="457200" y="384120"/>
-            <a:ext cx="566640" cy="566640"/>
+            <a:ext cx="565920" cy="565920"/>
           </a:xfrm>
           <a:prstGeom prst="ellipse">
             <a:avLst/>
@@ -5708,6 +5276,11 @@
             <a:noAutofit/>
           </a:bodyPr>
           <a:p>
+            <a:pPr>
+              <a:lnSpc>
+                <a:spcPct val="100000"/>
+              </a:lnSpc>
+            </a:pPr>
             <a:endParaRPr b="0" lang="en-US" sz="1800" spc="-1" strike="noStrike">
               <a:solidFill>
                 <a:srgbClr val="ffffff"/>
@@ -5730,7 +5303,7 @@
         <p:spPr>
           <a:xfrm>
             <a:off x="589680" y="516600"/>
-            <a:ext cx="301320" cy="301320"/>
+            <a:ext cx="300600" cy="300600"/>
           </a:xfrm>
           <a:prstGeom prst="rect">
             <a:avLst/>
@@ -5749,7 +5322,7 @@
         <p:spPr>
           <a:xfrm>
             <a:off x="1188720" y="402480"/>
-            <a:ext cx="7314840" cy="219240"/>
+            <a:ext cx="7314120" cy="218520"/>
           </a:xfrm>
           <a:prstGeom prst="rect">
             <a:avLst/>
@@ -5779,7 +5352,7 @@
               </a:tabLst>
             </a:pPr>
             <a:r>
-              <a:rPr b="1" lang="en-US" sz="1100" spc="199" strike="noStrike">
+              <a:rPr b="1" lang="en-US" sz="1100" spc="194" strike="noStrike">
                 <a:solidFill>
                   <a:srgbClr val="0f9c92"/>
                 </a:solidFill>
@@ -5806,7 +5379,7 @@
         <p:spPr>
           <a:xfrm>
             <a:off x="1170360" y="603360"/>
-            <a:ext cx="7497720" cy="456840"/>
+            <a:ext cx="7497000" cy="456120"/>
           </a:xfrm>
           <a:prstGeom prst="rect">
             <a:avLst/>
@@ -5863,7 +5436,7 @@
         <p:spPr>
           <a:xfrm>
             <a:off x="548640" y="1417320"/>
-            <a:ext cx="8046360" cy="475200"/>
+            <a:ext cx="8045640" cy="474480"/>
           </a:xfrm>
           <a:prstGeom prst="roundRect">
             <a:avLst>
@@ -5895,6 +5468,11 @@
             <a:noAutofit/>
           </a:bodyPr>
           <a:p>
+            <a:pPr>
+              <a:lnSpc>
+                <a:spcPct val="100000"/>
+              </a:lnSpc>
+            </a:pPr>
             <a:endParaRPr b="0" lang="en-US" sz="1800" spc="-1" strike="noStrike">
               <a:solidFill>
                 <a:srgbClr val="000000"/>
@@ -5913,7 +5491,7 @@
         <p:spPr>
           <a:xfrm>
             <a:off x="713160" y="1490400"/>
-            <a:ext cx="328680" cy="328680"/>
+            <a:ext cx="327960" cy="327960"/>
           </a:xfrm>
           <a:prstGeom prst="ellipse">
             <a:avLst/>
@@ -5936,6 +5514,11 @@
             <a:noAutofit/>
           </a:bodyPr>
           <a:p>
+            <a:pPr>
+              <a:lnSpc>
+                <a:spcPct val="100000"/>
+              </a:lnSpc>
+            </a:pPr>
             <a:endParaRPr b="0" lang="en-US" sz="1800" spc="-1" strike="noStrike">
               <a:solidFill>
                 <a:srgbClr val="ffffff"/>
@@ -5958,7 +5541,7 @@
         <p:spPr>
           <a:xfrm>
             <a:off x="786240" y="1563480"/>
-            <a:ext cx="182520" cy="182520"/>
+            <a:ext cx="181800" cy="181800"/>
           </a:xfrm>
           <a:prstGeom prst="rect">
             <a:avLst/>
@@ -5977,7 +5560,7 @@
         <p:spPr>
           <a:xfrm>
             <a:off x="1188720" y="1417320"/>
-            <a:ext cx="914040" cy="475200"/>
+            <a:ext cx="913320" cy="474480"/>
           </a:xfrm>
           <a:prstGeom prst="rect">
             <a:avLst/>
@@ -6034,7 +5617,7 @@
         <p:spPr>
           <a:xfrm>
             <a:off x="2103120" y="1417320"/>
-            <a:ext cx="6309000" cy="475200"/>
+            <a:ext cx="6308280" cy="474480"/>
           </a:xfrm>
           <a:prstGeom prst="rect">
             <a:avLst/>
@@ -6091,7 +5674,7 @@
         <p:spPr>
           <a:xfrm>
             <a:off x="548640" y="1956960"/>
-            <a:ext cx="8046360" cy="475200"/>
+            <a:ext cx="8045640" cy="474480"/>
           </a:xfrm>
           <a:prstGeom prst="roundRect">
             <a:avLst>
@@ -6123,6 +5706,11 @@
             <a:noAutofit/>
           </a:bodyPr>
           <a:p>
+            <a:pPr>
+              <a:lnSpc>
+                <a:spcPct val="100000"/>
+              </a:lnSpc>
+            </a:pPr>
             <a:endParaRPr b="0" lang="en-US" sz="1800" spc="-1" strike="noStrike">
               <a:solidFill>
                 <a:srgbClr val="000000"/>
@@ -6141,7 +5729,7 @@
         <p:spPr>
           <a:xfrm>
             <a:off x="713160" y="2030040"/>
-            <a:ext cx="328680" cy="328680"/>
+            <a:ext cx="327960" cy="327960"/>
           </a:xfrm>
           <a:prstGeom prst="ellipse">
             <a:avLst/>
@@ -6164,6 +5752,11 @@
             <a:noAutofit/>
           </a:bodyPr>
           <a:p>
+            <a:pPr>
+              <a:lnSpc>
+                <a:spcPct val="100000"/>
+              </a:lnSpc>
+            </a:pPr>
             <a:endParaRPr b="0" lang="en-US" sz="1800" spc="-1" strike="noStrike">
               <a:solidFill>
                 <a:srgbClr val="ffffff"/>
@@ -6186,7 +5779,7 @@
         <p:spPr>
           <a:xfrm>
             <a:off x="786240" y="2103120"/>
-            <a:ext cx="182520" cy="182520"/>
+            <a:ext cx="181800" cy="181800"/>
           </a:xfrm>
           <a:prstGeom prst="rect">
             <a:avLst/>
@@ -6205,7 +5798,7 @@
         <p:spPr>
           <a:xfrm>
             <a:off x="1188720" y="1956960"/>
-            <a:ext cx="914040" cy="475200"/>
+            <a:ext cx="913320" cy="474480"/>
           </a:xfrm>
           <a:prstGeom prst="rect">
             <a:avLst/>
@@ -6262,7 +5855,7 @@
         <p:spPr>
           <a:xfrm>
             <a:off x="2103120" y="1956960"/>
-            <a:ext cx="6309000" cy="475200"/>
+            <a:ext cx="6308280" cy="474480"/>
           </a:xfrm>
           <a:prstGeom prst="rect">
             <a:avLst/>
@@ -6319,7 +5912,7 @@
         <p:spPr>
           <a:xfrm>
             <a:off x="548640" y="2496240"/>
-            <a:ext cx="8046360" cy="475200"/>
+            <a:ext cx="8045640" cy="474480"/>
           </a:xfrm>
           <a:prstGeom prst="roundRect">
             <a:avLst>
@@ -6351,6 +5944,11 @@
             <a:noAutofit/>
           </a:bodyPr>
           <a:p>
+            <a:pPr>
+              <a:lnSpc>
+                <a:spcPct val="100000"/>
+              </a:lnSpc>
+            </a:pPr>
             <a:endParaRPr b="0" lang="en-US" sz="1800" spc="-1" strike="noStrike">
               <a:solidFill>
                 <a:srgbClr val="000000"/>
@@ -6369,7 +5967,7 @@
         <p:spPr>
           <a:xfrm>
             <a:off x="713160" y="2569320"/>
-            <a:ext cx="328680" cy="328680"/>
+            <a:ext cx="327960" cy="327960"/>
           </a:xfrm>
           <a:prstGeom prst="ellipse">
             <a:avLst/>
@@ -6392,6 +5990,11 @@
             <a:noAutofit/>
           </a:bodyPr>
           <a:p>
+            <a:pPr>
+              <a:lnSpc>
+                <a:spcPct val="100000"/>
+              </a:lnSpc>
+            </a:pPr>
             <a:endParaRPr b="0" lang="en-US" sz="1800" spc="-1" strike="noStrike">
               <a:solidFill>
                 <a:srgbClr val="ffffff"/>
@@ -6414,7 +6017,7 @@
         <p:spPr>
           <a:xfrm>
             <a:off x="786240" y="2642760"/>
-            <a:ext cx="182520" cy="182520"/>
+            <a:ext cx="181800" cy="181800"/>
           </a:xfrm>
           <a:prstGeom prst="rect">
             <a:avLst/>
@@ -6433,7 +6036,7 @@
         <p:spPr>
           <a:xfrm>
             <a:off x="1188720" y="2496240"/>
-            <a:ext cx="914040" cy="475200"/>
+            <a:ext cx="913320" cy="474480"/>
           </a:xfrm>
           <a:prstGeom prst="rect">
             <a:avLst/>
@@ -6490,7 +6093,7 @@
         <p:spPr>
           <a:xfrm>
             <a:off x="2103120" y="2496240"/>
-            <a:ext cx="6309000" cy="475200"/>
+            <a:ext cx="6308280" cy="474480"/>
           </a:xfrm>
           <a:prstGeom prst="rect">
             <a:avLst/>
@@ -6547,7 +6150,7 @@
         <p:spPr>
           <a:xfrm>
             <a:off x="548640" y="3035880"/>
-            <a:ext cx="8046360" cy="475200"/>
+            <a:ext cx="8045640" cy="474480"/>
           </a:xfrm>
           <a:prstGeom prst="roundRect">
             <a:avLst>
@@ -6579,6 +6182,11 @@
             <a:noAutofit/>
           </a:bodyPr>
           <a:p>
+            <a:pPr>
+              <a:lnSpc>
+                <a:spcPct val="100000"/>
+              </a:lnSpc>
+            </a:pPr>
             <a:endParaRPr b="0" lang="en-US" sz="1800" spc="-1" strike="noStrike">
               <a:solidFill>
                 <a:srgbClr val="000000"/>
@@ -6597,7 +6205,7 @@
         <p:spPr>
           <a:xfrm>
             <a:off x="713160" y="3108960"/>
-            <a:ext cx="328680" cy="328680"/>
+            <a:ext cx="327960" cy="327960"/>
           </a:xfrm>
           <a:prstGeom prst="ellipse">
             <a:avLst/>
@@ -6620,6 +6228,11 @@
             <a:noAutofit/>
           </a:bodyPr>
           <a:p>
+            <a:pPr>
+              <a:lnSpc>
+                <a:spcPct val="100000"/>
+              </a:lnSpc>
+            </a:pPr>
             <a:endParaRPr b="0" lang="en-US" sz="1800" spc="-1" strike="noStrike">
               <a:solidFill>
                 <a:srgbClr val="ffffff"/>
@@ -6642,7 +6255,7 @@
         <p:spPr>
           <a:xfrm>
             <a:off x="786240" y="3182040"/>
-            <a:ext cx="182520" cy="182520"/>
+            <a:ext cx="181800" cy="181800"/>
           </a:xfrm>
           <a:prstGeom prst="rect">
             <a:avLst/>
@@ -6661,7 +6274,7 @@
         <p:spPr>
           <a:xfrm>
             <a:off x="1188720" y="3035880"/>
-            <a:ext cx="914040" cy="475200"/>
+            <a:ext cx="913320" cy="474480"/>
           </a:xfrm>
           <a:prstGeom prst="rect">
             <a:avLst/>
@@ -6718,7 +6331,7 @@
         <p:spPr>
           <a:xfrm>
             <a:off x="2103120" y="3035880"/>
-            <a:ext cx="6309000" cy="475200"/>
+            <a:ext cx="6308280" cy="474480"/>
           </a:xfrm>
           <a:prstGeom prst="rect">
             <a:avLst/>
@@ -6775,7 +6388,7 @@
         <p:spPr>
           <a:xfrm>
             <a:off x="548640" y="3575160"/>
-            <a:ext cx="8046360" cy="475200"/>
+            <a:ext cx="8045640" cy="474480"/>
           </a:xfrm>
           <a:prstGeom prst="roundRect">
             <a:avLst>
@@ -6807,6 +6420,11 @@
             <a:noAutofit/>
           </a:bodyPr>
           <a:p>
+            <a:pPr>
+              <a:lnSpc>
+                <a:spcPct val="100000"/>
+              </a:lnSpc>
+            </a:pPr>
             <a:endParaRPr b="0" lang="en-US" sz="1800" spc="-1" strike="noStrike">
               <a:solidFill>
                 <a:srgbClr val="000000"/>
@@ -6825,7 +6443,7 @@
         <p:spPr>
           <a:xfrm>
             <a:off x="713160" y="3648600"/>
-            <a:ext cx="328680" cy="328680"/>
+            <a:ext cx="327960" cy="327960"/>
           </a:xfrm>
           <a:prstGeom prst="ellipse">
             <a:avLst/>
@@ -6848,6 +6466,11 @@
             <a:noAutofit/>
           </a:bodyPr>
           <a:p>
+            <a:pPr>
+              <a:lnSpc>
+                <a:spcPct val="100000"/>
+              </a:lnSpc>
+            </a:pPr>
             <a:endParaRPr b="0" lang="en-US" sz="1800" spc="-1" strike="noStrike">
               <a:solidFill>
                 <a:srgbClr val="ffffff"/>
@@ -6870,7 +6493,7 @@
         <p:spPr>
           <a:xfrm>
             <a:off x="786240" y="3721680"/>
-            <a:ext cx="182520" cy="182520"/>
+            <a:ext cx="181800" cy="181800"/>
           </a:xfrm>
           <a:prstGeom prst="rect">
             <a:avLst/>
@@ -6889,7 +6512,7 @@
         <p:spPr>
           <a:xfrm>
             <a:off x="1188720" y="3575160"/>
-            <a:ext cx="914040" cy="475200"/>
+            <a:ext cx="913320" cy="474480"/>
           </a:xfrm>
           <a:prstGeom prst="rect">
             <a:avLst/>
@@ -6946,7 +6569,7 @@
         <p:spPr>
           <a:xfrm>
             <a:off x="2103120" y="3575160"/>
-            <a:ext cx="6309000" cy="475200"/>
+            <a:ext cx="6308280" cy="474480"/>
           </a:xfrm>
           <a:prstGeom prst="rect">
             <a:avLst/>
@@ -7003,7 +6626,7 @@
         <p:spPr>
           <a:xfrm>
             <a:off x="548640" y="4114800"/>
-            <a:ext cx="8046360" cy="475200"/>
+            <a:ext cx="8045640" cy="474480"/>
           </a:xfrm>
           <a:prstGeom prst="roundRect">
             <a:avLst>
@@ -7035,6 +6658,11 @@
             <a:noAutofit/>
           </a:bodyPr>
           <a:p>
+            <a:pPr>
+              <a:lnSpc>
+                <a:spcPct val="100000"/>
+              </a:lnSpc>
+            </a:pPr>
             <a:endParaRPr b="0" lang="en-US" sz="1800" spc="-1" strike="noStrike">
               <a:solidFill>
                 <a:srgbClr val="000000"/>
@@ -7053,7 +6681,7 @@
         <p:spPr>
           <a:xfrm>
             <a:off x="713160" y="4187880"/>
-            <a:ext cx="328680" cy="328680"/>
+            <a:ext cx="327960" cy="327960"/>
           </a:xfrm>
           <a:prstGeom prst="ellipse">
             <a:avLst/>
@@ -7076,6 +6704,11 @@
             <a:noAutofit/>
           </a:bodyPr>
           <a:p>
+            <a:pPr>
+              <a:lnSpc>
+                <a:spcPct val="100000"/>
+              </a:lnSpc>
+            </a:pPr>
             <a:endParaRPr b="0" lang="en-US" sz="1800" spc="-1" strike="noStrike">
               <a:solidFill>
                 <a:srgbClr val="ffffff"/>
@@ -7098,7 +6731,7 @@
         <p:spPr>
           <a:xfrm>
             <a:off x="786240" y="4260960"/>
-            <a:ext cx="182520" cy="182520"/>
+            <a:ext cx="181800" cy="181800"/>
           </a:xfrm>
           <a:prstGeom prst="rect">
             <a:avLst/>
@@ -7117,7 +6750,7 @@
         <p:spPr>
           <a:xfrm>
             <a:off x="1188720" y="4114800"/>
-            <a:ext cx="914040" cy="475200"/>
+            <a:ext cx="913320" cy="474480"/>
           </a:xfrm>
           <a:prstGeom prst="rect">
             <a:avLst/>
@@ -7174,7 +6807,7 @@
         <p:spPr>
           <a:xfrm>
             <a:off x="2103120" y="4114800"/>
-            <a:ext cx="6309000" cy="475200"/>
+            <a:ext cx="6308280" cy="474480"/>
           </a:xfrm>
           <a:prstGeom prst="rect">
             <a:avLst/>
@@ -7231,7 +6864,7 @@
         <p:spPr>
           <a:xfrm>
             <a:off x="457200" y="4855320"/>
-            <a:ext cx="5486040" cy="228240"/>
+            <a:ext cx="5485320" cy="227520"/>
           </a:xfrm>
           <a:prstGeom prst="rect">
             <a:avLst/>
@@ -7288,7 +6921,7 @@
         <p:spPr>
           <a:xfrm>
             <a:off x="8229600" y="4855320"/>
-            <a:ext cx="456840" cy="228240"/>
+            <a:ext cx="456120" cy="227520"/>
           </a:xfrm>
           <a:prstGeom prst="rect">
             <a:avLst/>
@@ -7382,7 +7015,7 @@
         <p:spPr>
           <a:xfrm>
             <a:off x="457200" y="384120"/>
-            <a:ext cx="566640" cy="566640"/>
+            <a:ext cx="565920" cy="565920"/>
           </a:xfrm>
           <a:prstGeom prst="ellipse">
             <a:avLst/>
@@ -7405,6 +7038,11 @@
             <a:noAutofit/>
           </a:bodyPr>
           <a:p>
+            <a:pPr>
+              <a:lnSpc>
+                <a:spcPct val="100000"/>
+              </a:lnSpc>
+            </a:pPr>
             <a:endParaRPr b="0" lang="en-US" sz="1800" spc="-1" strike="noStrike">
               <a:solidFill>
                 <a:srgbClr val="ffffff"/>
@@ -7427,7 +7065,7 @@
         <p:spPr>
           <a:xfrm>
             <a:off x="589680" y="516600"/>
-            <a:ext cx="301320" cy="301320"/>
+            <a:ext cx="300600" cy="300600"/>
           </a:xfrm>
           <a:prstGeom prst="rect">
             <a:avLst/>
@@ -7446,7 +7084,7 @@
         <p:spPr>
           <a:xfrm>
             <a:off x="1188720" y="402480"/>
-            <a:ext cx="7314840" cy="219240"/>
+            <a:ext cx="7314120" cy="218520"/>
           </a:xfrm>
           <a:prstGeom prst="rect">
             <a:avLst/>
@@ -7476,7 +7114,7 @@
               </a:tabLst>
             </a:pPr>
             <a:r>
-              <a:rPr b="1" lang="en-US" sz="1100" spc="199" strike="noStrike">
+              <a:rPr b="1" lang="en-US" sz="1100" spc="194" strike="noStrike">
                 <a:solidFill>
                   <a:srgbClr val="33c2ce"/>
                 </a:solidFill>
@@ -7503,7 +7141,7 @@
         <p:spPr>
           <a:xfrm>
             <a:off x="1170360" y="603360"/>
-            <a:ext cx="7497720" cy="456840"/>
+            <a:ext cx="7497000" cy="456120"/>
           </a:xfrm>
           <a:prstGeom prst="rect">
             <a:avLst/>
@@ -7560,7 +7198,7 @@
         <p:spPr>
           <a:xfrm>
             <a:off x="548640" y="1463040"/>
-            <a:ext cx="2678760" cy="2331360"/>
+            <a:ext cx="2678040" cy="2330640"/>
           </a:xfrm>
           <a:prstGeom prst="roundRect">
             <a:avLst>
@@ -7592,6 +7230,11 @@
             <a:noAutofit/>
           </a:bodyPr>
           <a:p>
+            <a:pPr>
+              <a:lnSpc>
+                <a:spcPct val="100000"/>
+              </a:lnSpc>
+            </a:pPr>
             <a:endParaRPr b="0" lang="en-US" sz="1800" spc="-1" strike="noStrike">
               <a:solidFill>
                 <a:srgbClr val="ffffff"/>
@@ -7610,7 +7253,7 @@
         <p:spPr>
           <a:xfrm>
             <a:off x="1568160" y="1691640"/>
-            <a:ext cx="639720" cy="639720"/>
+            <a:ext cx="639000" cy="639000"/>
           </a:xfrm>
           <a:prstGeom prst="ellipse">
             <a:avLst/>
@@ -7633,6 +7276,11 @@
             <a:noAutofit/>
           </a:bodyPr>
           <a:p>
+            <a:pPr>
+              <a:lnSpc>
+                <a:spcPct val="100000"/>
+              </a:lnSpc>
+            </a:pPr>
             <a:endParaRPr b="0" lang="en-US" sz="1800" spc="-1" strike="noStrike">
               <a:solidFill>
                 <a:srgbClr val="ffffff"/>
@@ -7655,7 +7303,7 @@
         <p:spPr>
           <a:xfrm>
             <a:off x="1734480" y="1857960"/>
-            <a:ext cx="306720" cy="306720"/>
+            <a:ext cx="306000" cy="306000"/>
           </a:xfrm>
           <a:prstGeom prst="rect">
             <a:avLst/>
@@ -7674,7 +7322,7 @@
         <p:spPr>
           <a:xfrm>
             <a:off x="640080" y="2468880"/>
-            <a:ext cx="2495880" cy="365400"/>
+            <a:ext cx="2495160" cy="364680"/>
           </a:xfrm>
           <a:prstGeom prst="rect">
             <a:avLst/>
@@ -7731,7 +7379,7 @@
         <p:spPr>
           <a:xfrm>
             <a:off x="640080" y="2853000"/>
-            <a:ext cx="2495880" cy="319680"/>
+            <a:ext cx="2495160" cy="318960"/>
           </a:xfrm>
           <a:prstGeom prst="rect">
             <a:avLst/>
@@ -7788,7 +7436,7 @@
         <p:spPr>
           <a:xfrm>
             <a:off x="685800" y="3246120"/>
-            <a:ext cx="2404440" cy="456840"/>
+            <a:ext cx="2403720" cy="456120"/>
           </a:xfrm>
           <a:prstGeom prst="rect">
             <a:avLst/>
@@ -7855,7 +7503,7 @@
         <p:spPr>
           <a:xfrm>
             <a:off x="3415320" y="1463040"/>
-            <a:ext cx="2678760" cy="2331360"/>
+            <a:ext cx="2678040" cy="2330640"/>
           </a:xfrm>
           <a:prstGeom prst="roundRect">
             <a:avLst>
@@ -7887,6 +7535,11 @@
             <a:noAutofit/>
           </a:bodyPr>
           <a:p>
+            <a:pPr>
+              <a:lnSpc>
+                <a:spcPct val="100000"/>
+              </a:lnSpc>
+            </a:pPr>
             <a:endParaRPr b="0" lang="en-US" sz="1800" spc="-1" strike="noStrike">
               <a:solidFill>
                 <a:srgbClr val="ffffff"/>
@@ -7905,7 +7558,7 @@
         <p:spPr>
           <a:xfrm>
             <a:off x="4434840" y="1691640"/>
-            <a:ext cx="639720" cy="639720"/>
+            <a:ext cx="639000" cy="639000"/>
           </a:xfrm>
           <a:prstGeom prst="ellipse">
             <a:avLst/>
@@ -7928,6 +7581,11 @@
             <a:noAutofit/>
           </a:bodyPr>
           <a:p>
+            <a:pPr>
+              <a:lnSpc>
+                <a:spcPct val="100000"/>
+              </a:lnSpc>
+            </a:pPr>
             <a:endParaRPr b="0" lang="en-US" sz="1800" spc="-1" strike="noStrike">
               <a:solidFill>
                 <a:srgbClr val="ffffff"/>
@@ -7950,7 +7608,7 @@
         <p:spPr>
           <a:xfrm>
             <a:off x="4601160" y="1857960"/>
-            <a:ext cx="306720" cy="306720"/>
+            <a:ext cx="306000" cy="306000"/>
           </a:xfrm>
           <a:prstGeom prst="rect">
             <a:avLst/>
@@ -7969,7 +7627,7 @@
         <p:spPr>
           <a:xfrm>
             <a:off x="3506760" y="2468880"/>
-            <a:ext cx="2495880" cy="365400"/>
+            <a:ext cx="2495160" cy="364680"/>
           </a:xfrm>
           <a:prstGeom prst="rect">
             <a:avLst/>
@@ -8026,7 +7684,7 @@
         <p:spPr>
           <a:xfrm>
             <a:off x="3506760" y="2853000"/>
-            <a:ext cx="2495880" cy="319680"/>
+            <a:ext cx="2495160" cy="318960"/>
           </a:xfrm>
           <a:prstGeom prst="rect">
             <a:avLst/>
@@ -8083,7 +7741,7 @@
         <p:spPr>
           <a:xfrm>
             <a:off x="3552480" y="3246120"/>
-            <a:ext cx="2404440" cy="456840"/>
+            <a:ext cx="2403720" cy="456120"/>
           </a:xfrm>
           <a:prstGeom prst="rect">
             <a:avLst/>
@@ -8140,7 +7798,7 @@
         <p:spPr>
           <a:xfrm>
             <a:off x="6282000" y="1463040"/>
-            <a:ext cx="2678760" cy="2331360"/>
+            <a:ext cx="2678040" cy="2330640"/>
           </a:xfrm>
           <a:prstGeom prst="roundRect">
             <a:avLst>
@@ -8172,6 +7830,11 @@
             <a:noAutofit/>
           </a:bodyPr>
           <a:p>
+            <a:pPr>
+              <a:lnSpc>
+                <a:spcPct val="100000"/>
+              </a:lnSpc>
+            </a:pPr>
             <a:endParaRPr b="0" lang="en-US" sz="1800" spc="-1" strike="noStrike">
               <a:solidFill>
                 <a:srgbClr val="ffffff"/>
@@ -8190,7 +7853,7 @@
         <p:spPr>
           <a:xfrm>
             <a:off x="7301520" y="1691640"/>
-            <a:ext cx="639720" cy="639720"/>
+            <a:ext cx="639000" cy="639000"/>
           </a:xfrm>
           <a:prstGeom prst="ellipse">
             <a:avLst/>
@@ -8213,6 +7876,11 @@
             <a:noAutofit/>
           </a:bodyPr>
           <a:p>
+            <a:pPr>
+              <a:lnSpc>
+                <a:spcPct val="100000"/>
+              </a:lnSpc>
+            </a:pPr>
             <a:endParaRPr b="0" lang="en-US" sz="1800" spc="-1" strike="noStrike">
               <a:solidFill>
                 <a:srgbClr val="ffffff"/>
@@ -8235,7 +7903,7 @@
         <p:spPr>
           <a:xfrm>
             <a:off x="7467840" y="1857960"/>
-            <a:ext cx="306720" cy="306720"/>
+            <a:ext cx="306000" cy="306000"/>
           </a:xfrm>
           <a:prstGeom prst="rect">
             <a:avLst/>
@@ -8254,7 +7922,7 @@
         <p:spPr>
           <a:xfrm>
             <a:off x="6373440" y="2468880"/>
-            <a:ext cx="2495880" cy="365400"/>
+            <a:ext cx="2495160" cy="364680"/>
           </a:xfrm>
           <a:prstGeom prst="rect">
             <a:avLst/>
@@ -8311,7 +7979,7 @@
         <p:spPr>
           <a:xfrm>
             <a:off x="6373440" y="2853000"/>
-            <a:ext cx="2495880" cy="319680"/>
+            <a:ext cx="2495160" cy="318960"/>
           </a:xfrm>
           <a:prstGeom prst="rect">
             <a:avLst/>
@@ -8368,7 +8036,7 @@
         <p:spPr>
           <a:xfrm>
             <a:off x="6419160" y="3246120"/>
-            <a:ext cx="2404440" cy="456840"/>
+            <a:ext cx="2403720" cy="456120"/>
           </a:xfrm>
           <a:prstGeom prst="rect">
             <a:avLst/>
@@ -8435,7 +8103,7 @@
         <p:spPr>
           <a:xfrm>
             <a:off x="548640" y="3977640"/>
-            <a:ext cx="8046360" cy="566640"/>
+            <a:ext cx="8045640" cy="565920"/>
           </a:xfrm>
           <a:prstGeom prst="roundRect">
             <a:avLst>
@@ -8460,6 +8128,11 @@
             <a:noAutofit/>
           </a:bodyPr>
           <a:p>
+            <a:pPr>
+              <a:lnSpc>
+                <a:spcPct val="100000"/>
+              </a:lnSpc>
+            </a:pPr>
             <a:endParaRPr b="0" lang="en-US" sz="1800" spc="-1" strike="noStrike">
               <a:solidFill>
                 <a:srgbClr val="ffffff"/>
@@ -8478,7 +8151,7 @@
         <p:spPr>
           <a:xfrm>
             <a:off x="777240" y="3977640"/>
-            <a:ext cx="7680600" cy="566640"/>
+            <a:ext cx="7679880" cy="565920"/>
           </a:xfrm>
           <a:prstGeom prst="rect">
             <a:avLst/>
@@ -8582,7 +8255,7 @@
         <p:spPr>
           <a:xfrm>
             <a:off x="457200" y="384120"/>
-            <a:ext cx="566640" cy="566640"/>
+            <a:ext cx="565920" cy="565920"/>
           </a:xfrm>
           <a:prstGeom prst="ellipse">
             <a:avLst/>
@@ -8605,6 +8278,11 @@
             <a:noAutofit/>
           </a:bodyPr>
           <a:p>
+            <a:pPr>
+              <a:lnSpc>
+                <a:spcPct val="100000"/>
+              </a:lnSpc>
+            </a:pPr>
             <a:endParaRPr b="0" lang="en-US" sz="1800" spc="-1" strike="noStrike">
               <a:solidFill>
                 <a:srgbClr val="ffffff"/>
@@ -8627,7 +8305,7 @@
         <p:spPr>
           <a:xfrm>
             <a:off x="589680" y="516600"/>
-            <a:ext cx="301320" cy="301320"/>
+            <a:ext cx="300600" cy="300600"/>
           </a:xfrm>
           <a:prstGeom prst="rect">
             <a:avLst/>
@@ -8646,7 +8324,7 @@
         <p:spPr>
           <a:xfrm>
             <a:off x="1188720" y="402480"/>
-            <a:ext cx="7314840" cy="219240"/>
+            <a:ext cx="7314120" cy="218520"/>
           </a:xfrm>
           <a:prstGeom prst="rect">
             <a:avLst/>
@@ -8676,7 +8354,7 @@
               </a:tabLst>
             </a:pPr>
             <a:r>
-              <a:rPr b="1" lang="en-US" sz="1100" spc="199" strike="noStrike">
+              <a:rPr b="1" lang="en-US" sz="1100" spc="194" strike="noStrike">
                 <a:solidFill>
                   <a:srgbClr val="0f9c92"/>
                 </a:solidFill>
@@ -8703,7 +8381,7 @@
         <p:spPr>
           <a:xfrm>
             <a:off x="1170360" y="603360"/>
-            <a:ext cx="7497720" cy="456840"/>
+            <a:ext cx="7497000" cy="456120"/>
           </a:xfrm>
           <a:prstGeom prst="rect">
             <a:avLst/>
@@ -8760,7 +8438,7 @@
         <p:spPr>
           <a:xfrm>
             <a:off x="548640" y="1417320"/>
-            <a:ext cx="3017160" cy="3062880"/>
+            <a:ext cx="3016440" cy="3062160"/>
           </a:xfrm>
           <a:prstGeom prst="roundRect">
             <a:avLst>
@@ -8792,6 +8470,11 @@
             <a:noAutofit/>
           </a:bodyPr>
           <a:p>
+            <a:pPr>
+              <a:lnSpc>
+                <a:spcPct val="100000"/>
+              </a:lnSpc>
+            </a:pPr>
             <a:endParaRPr b="0" lang="en-US" sz="1800" spc="-1" strike="noStrike">
               <a:solidFill>
                 <a:srgbClr val="000000"/>
@@ -8810,7 +8493,7 @@
         <p:spPr>
           <a:xfrm>
             <a:off x="777240" y="1600200"/>
-            <a:ext cx="2651400" cy="273960"/>
+            <a:ext cx="2650680" cy="273240"/>
           </a:xfrm>
           <a:prstGeom prst="rect">
             <a:avLst/>
@@ -8867,7 +8550,7 @@
         <p:spPr>
           <a:xfrm>
             <a:off x="777240" y="2011680"/>
-            <a:ext cx="2559960" cy="639720"/>
+            <a:ext cx="2559240" cy="639000"/>
           </a:xfrm>
           <a:prstGeom prst="rect">
             <a:avLst/>
@@ -8924,7 +8607,7 @@
         <p:spPr>
           <a:xfrm>
             <a:off x="777240" y="2743200"/>
-            <a:ext cx="2605680" cy="1554120"/>
+            <a:ext cx="2604960" cy="1553400"/>
           </a:xfrm>
           <a:prstGeom prst="rect">
             <a:avLst/>
@@ -8981,7 +8664,7 @@
         <p:spPr>
           <a:xfrm>
             <a:off x="3840480" y="1463040"/>
-            <a:ext cx="4754520" cy="273960"/>
+            <a:ext cx="4753800" cy="273240"/>
           </a:xfrm>
           <a:prstGeom prst="rect">
             <a:avLst/>
@@ -9038,7 +8721,7 @@
         <p:spPr>
           <a:xfrm>
             <a:off x="3886200" y="1847160"/>
-            <a:ext cx="273960" cy="273960"/>
+            <a:ext cx="273240" cy="273240"/>
           </a:xfrm>
           <a:prstGeom prst="ellipse">
             <a:avLst/>
@@ -9061,6 +8744,11 @@
             <a:noAutofit/>
           </a:bodyPr>
           <a:p>
+            <a:pPr>
+              <a:lnSpc>
+                <a:spcPct val="100000"/>
+              </a:lnSpc>
+            </a:pPr>
             <a:endParaRPr b="0" lang="en-US" sz="1800" spc="-1" strike="noStrike">
               <a:solidFill>
                 <a:srgbClr val="ffffff"/>
@@ -9083,7 +8771,7 @@
         <p:spPr>
           <a:xfrm>
             <a:off x="3931920" y="1892880"/>
-            <a:ext cx="182520" cy="182520"/>
+            <a:ext cx="181800" cy="181800"/>
           </a:xfrm>
           <a:prstGeom prst="rect">
             <a:avLst/>
@@ -9102,7 +8790,7 @@
         <p:spPr>
           <a:xfrm>
             <a:off x="4297680" y="1792080"/>
-            <a:ext cx="4297320" cy="365400"/>
+            <a:ext cx="4296600" cy="364680"/>
           </a:xfrm>
           <a:prstGeom prst="rect">
             <a:avLst/>
@@ -9159,7 +8847,7 @@
         <p:spPr>
           <a:xfrm>
             <a:off x="3886200" y="2295000"/>
-            <a:ext cx="273960" cy="273960"/>
+            <a:ext cx="273240" cy="273240"/>
           </a:xfrm>
           <a:prstGeom prst="ellipse">
             <a:avLst/>
@@ -9182,6 +8870,11 @@
             <a:noAutofit/>
           </a:bodyPr>
           <a:p>
+            <a:pPr>
+              <a:lnSpc>
+                <a:spcPct val="100000"/>
+              </a:lnSpc>
+            </a:pPr>
             <a:endParaRPr b="0" lang="en-US" sz="1800" spc="-1" strike="noStrike">
               <a:solidFill>
                 <a:srgbClr val="ffffff"/>
@@ -9204,7 +8897,7 @@
         <p:spPr>
           <a:xfrm>
             <a:off x="3931920" y="2340720"/>
-            <a:ext cx="182520" cy="182520"/>
+            <a:ext cx="181800" cy="181800"/>
           </a:xfrm>
           <a:prstGeom prst="rect">
             <a:avLst/>
@@ -9223,7 +8916,7 @@
         <p:spPr>
           <a:xfrm>
             <a:off x="4297680" y="2240280"/>
-            <a:ext cx="4297320" cy="365400"/>
+            <a:ext cx="4296600" cy="364680"/>
           </a:xfrm>
           <a:prstGeom prst="rect">
             <a:avLst/>
@@ -9280,7 +8973,7 @@
         <p:spPr>
           <a:xfrm>
             <a:off x="3886200" y="2743200"/>
-            <a:ext cx="273960" cy="273960"/>
+            <a:ext cx="273240" cy="273240"/>
           </a:xfrm>
           <a:prstGeom prst="ellipse">
             <a:avLst/>
@@ -9303,6 +8996,11 @@
             <a:noAutofit/>
           </a:bodyPr>
           <a:p>
+            <a:pPr>
+              <a:lnSpc>
+                <a:spcPct val="100000"/>
+              </a:lnSpc>
+            </a:pPr>
             <a:endParaRPr b="0" lang="en-US" sz="1800" spc="-1" strike="noStrike">
               <a:solidFill>
                 <a:srgbClr val="ffffff"/>
@@ -9325,7 +9023,7 @@
         <p:spPr>
           <a:xfrm>
             <a:off x="3931920" y="2788920"/>
-            <a:ext cx="182520" cy="182520"/>
+            <a:ext cx="181800" cy="181800"/>
           </a:xfrm>
           <a:prstGeom prst="rect">
             <a:avLst/>
@@ -9344,7 +9042,7 @@
         <p:spPr>
           <a:xfrm>
             <a:off x="4297680" y="2688480"/>
-            <a:ext cx="4297320" cy="365400"/>
+            <a:ext cx="4296600" cy="364680"/>
           </a:xfrm>
           <a:prstGeom prst="rect">
             <a:avLst/>
@@ -9401,7 +9099,7 @@
         <p:spPr>
           <a:xfrm>
             <a:off x="3886200" y="3191400"/>
-            <a:ext cx="273960" cy="273960"/>
+            <a:ext cx="273240" cy="273240"/>
           </a:xfrm>
           <a:prstGeom prst="ellipse">
             <a:avLst/>
@@ -9424,6 +9122,11 @@
             <a:noAutofit/>
           </a:bodyPr>
           <a:p>
+            <a:pPr>
+              <a:lnSpc>
+                <a:spcPct val="100000"/>
+              </a:lnSpc>
+            </a:pPr>
             <a:endParaRPr b="0" lang="en-US" sz="1800" spc="-1" strike="noStrike">
               <a:solidFill>
                 <a:srgbClr val="ffffff"/>
@@ -9446,7 +9149,7 @@
         <p:spPr>
           <a:xfrm>
             <a:off x="3931920" y="3237120"/>
-            <a:ext cx="182520" cy="182520"/>
+            <a:ext cx="181800" cy="181800"/>
           </a:xfrm>
           <a:prstGeom prst="rect">
             <a:avLst/>
@@ -9465,7 +9168,7 @@
         <p:spPr>
           <a:xfrm>
             <a:off x="4297680" y="3136320"/>
-            <a:ext cx="4297320" cy="365400"/>
+            <a:ext cx="4296600" cy="364680"/>
           </a:xfrm>
           <a:prstGeom prst="rect">
             <a:avLst/>
@@ -9522,7 +9225,7 @@
         <p:spPr>
           <a:xfrm>
             <a:off x="3886200" y="3639240"/>
-            <a:ext cx="273960" cy="273960"/>
+            <a:ext cx="273240" cy="273240"/>
           </a:xfrm>
           <a:prstGeom prst="ellipse">
             <a:avLst/>
@@ -9545,6 +9248,11 @@
             <a:noAutofit/>
           </a:bodyPr>
           <a:p>
+            <a:pPr>
+              <a:lnSpc>
+                <a:spcPct val="100000"/>
+              </a:lnSpc>
+            </a:pPr>
             <a:endParaRPr b="0" lang="en-US" sz="1800" spc="-1" strike="noStrike">
               <a:solidFill>
                 <a:srgbClr val="ffffff"/>
@@ -9567,7 +9275,7 @@
         <p:spPr>
           <a:xfrm>
             <a:off x="3931920" y="3684960"/>
-            <a:ext cx="182520" cy="182520"/>
+            <a:ext cx="181800" cy="181800"/>
           </a:xfrm>
           <a:prstGeom prst="rect">
             <a:avLst/>
@@ -9586,7 +9294,7 @@
         <p:spPr>
           <a:xfrm>
             <a:off x="4297680" y="3584520"/>
-            <a:ext cx="4297320" cy="365400"/>
+            <a:ext cx="4296600" cy="364680"/>
           </a:xfrm>
           <a:prstGeom prst="rect">
             <a:avLst/>
@@ -9643,7 +9351,7 @@
         <p:spPr>
           <a:xfrm>
             <a:off x="3886200" y="4087440"/>
-            <a:ext cx="273960" cy="273960"/>
+            <a:ext cx="273240" cy="273240"/>
           </a:xfrm>
           <a:prstGeom prst="ellipse">
             <a:avLst/>
@@ -9666,6 +9374,11 @@
             <a:noAutofit/>
           </a:bodyPr>
           <a:p>
+            <a:pPr>
+              <a:lnSpc>
+                <a:spcPct val="100000"/>
+              </a:lnSpc>
+            </a:pPr>
             <a:endParaRPr b="0" lang="en-US" sz="1800" spc="-1" strike="noStrike">
               <a:solidFill>
                 <a:srgbClr val="ffffff"/>
@@ -9688,7 +9401,7 @@
         <p:spPr>
           <a:xfrm>
             <a:off x="3931920" y="4133160"/>
-            <a:ext cx="182520" cy="182520"/>
+            <a:ext cx="181800" cy="181800"/>
           </a:xfrm>
           <a:prstGeom prst="rect">
             <a:avLst/>
@@ -9707,7 +9420,7 @@
         <p:spPr>
           <a:xfrm>
             <a:off x="4297680" y="4032360"/>
-            <a:ext cx="4297320" cy="365400"/>
+            <a:ext cx="4296600" cy="364680"/>
           </a:xfrm>
           <a:prstGeom prst="rect">
             <a:avLst/>
@@ -9764,7 +9477,7 @@
         <p:spPr>
           <a:xfrm>
             <a:off x="457200" y="4855320"/>
-            <a:ext cx="5486040" cy="228240"/>
+            <a:ext cx="5485320" cy="227520"/>
           </a:xfrm>
           <a:prstGeom prst="rect">
             <a:avLst/>
@@ -9821,7 +9534,7 @@
         <p:spPr>
           <a:xfrm>
             <a:off x="8229600" y="4855320"/>
-            <a:ext cx="456840" cy="228240"/>
+            <a:ext cx="456120" cy="227520"/>
           </a:xfrm>
           <a:prstGeom prst="rect">
             <a:avLst/>
@@ -9915,7 +9628,7 @@
         <p:spPr>
           <a:xfrm>
             <a:off x="457200" y="384120"/>
-            <a:ext cx="566640" cy="566640"/>
+            <a:ext cx="565920" cy="565920"/>
           </a:xfrm>
           <a:prstGeom prst="ellipse">
             <a:avLst/>
@@ -9938,6 +9651,11 @@
             <a:noAutofit/>
           </a:bodyPr>
           <a:p>
+            <a:pPr>
+              <a:lnSpc>
+                <a:spcPct val="100000"/>
+              </a:lnSpc>
+            </a:pPr>
             <a:endParaRPr b="0" lang="en-US" sz="1800" spc="-1" strike="noStrike">
               <a:solidFill>
                 <a:srgbClr val="ffffff"/>
@@ -9960,7 +9678,7 @@
         <p:spPr>
           <a:xfrm>
             <a:off x="589680" y="516600"/>
-            <a:ext cx="301320" cy="301320"/>
+            <a:ext cx="300600" cy="300600"/>
           </a:xfrm>
           <a:prstGeom prst="rect">
             <a:avLst/>
@@ -9979,7 +9697,7 @@
         <p:spPr>
           <a:xfrm>
             <a:off x="1188720" y="402480"/>
-            <a:ext cx="7314840" cy="219240"/>
+            <a:ext cx="7314120" cy="218520"/>
           </a:xfrm>
           <a:prstGeom prst="rect">
             <a:avLst/>
@@ -10009,7 +9727,7 @@
               </a:tabLst>
             </a:pPr>
             <a:r>
-              <a:rPr b="1" lang="en-US" sz="1100" spc="199" strike="noStrike">
+              <a:rPr b="1" lang="en-US" sz="1100" spc="194" strike="noStrike">
                 <a:solidFill>
                   <a:srgbClr val="0f9c92"/>
                 </a:solidFill>
@@ -10036,7 +9754,7 @@
         <p:spPr>
           <a:xfrm>
             <a:off x="1170360" y="603360"/>
-            <a:ext cx="7497720" cy="456840"/>
+            <a:ext cx="7497000" cy="456120"/>
           </a:xfrm>
           <a:prstGeom prst="rect">
             <a:avLst/>
@@ -10086,28 +9804,142 @@
       </p:sp>
       <p:sp>
         <p:nvSpPr>
-          <p:cNvPr id="295" name="Shape 3"/>
+          <p:cNvPr id="295" name="Text 23"/>
+          <p:cNvSpPr/>
+          <p:nvPr/>
+        </p:nvSpPr>
+        <p:spPr>
+          <a:xfrm>
+            <a:off x="457200" y="4855320"/>
+            <a:ext cx="5485320" cy="227520"/>
+          </a:xfrm>
+          <a:prstGeom prst="rect">
+            <a:avLst/>
+          </a:prstGeom>
+          <a:noFill/>
+          <a:ln w="0">
+            <a:noFill/>
+          </a:ln>
+        </p:spPr>
+        <p:style>
+          <a:lnRef idx="0"/>
+          <a:fillRef idx="0"/>
+          <a:effectRef idx="0"/>
+          <a:fontRef idx="minor"/>
+        </p:style>
+        <p:txBody>
+          <a:bodyPr lIns="0" rIns="0" tIns="0" bIns="0" anchor="ctr">
+            <a:noAutofit/>
+          </a:bodyPr>
+          <a:p>
+            <a:pPr defTabSz="914400">
+              <a:lnSpc>
+                <a:spcPct val="100000"/>
+              </a:lnSpc>
+              <a:tabLst>
+                <a:tab algn="l" pos="0"/>
+              </a:tabLst>
+            </a:pPr>
+            <a:r>
+              <a:rPr b="0" lang="en-US" sz="800" spc="-1" strike="noStrike">
+                <a:solidFill>
+                  <a:srgbClr val="5e7484"/>
+                </a:solidFill>
+                <a:latin typeface="Calibri"/>
+                <a:ea typeface="Calibri"/>
+              </a:rPr>
+              <a:t>Certificate Authority Chain &amp; Mutual TLS</a:t>
+            </a:r>
+            <a:endParaRPr b="0" lang="en-US" sz="800" spc="-1" strike="noStrike">
+              <a:solidFill>
+                <a:srgbClr val="000000"/>
+              </a:solidFill>
+              <a:latin typeface="Arial"/>
+            </a:endParaRPr>
+          </a:p>
+        </p:txBody>
+      </p:sp>
+      <p:sp>
+        <p:nvSpPr>
+          <p:cNvPr id="296" name="Text 24"/>
+          <p:cNvSpPr/>
+          <p:nvPr/>
+        </p:nvSpPr>
+        <p:spPr>
+          <a:xfrm>
+            <a:off x="8229600" y="4855320"/>
+            <a:ext cx="456120" cy="227520"/>
+          </a:xfrm>
+          <a:prstGeom prst="rect">
+            <a:avLst/>
+          </a:prstGeom>
+          <a:noFill/>
+          <a:ln w="0">
+            <a:noFill/>
+          </a:ln>
+        </p:spPr>
+        <p:style>
+          <a:lnRef idx="0"/>
+          <a:fillRef idx="0"/>
+          <a:effectRef idx="0"/>
+          <a:fontRef idx="minor"/>
+        </p:style>
+        <p:txBody>
+          <a:bodyPr lIns="0" rIns="0" tIns="0" bIns="0" anchor="ctr">
+            <a:noAutofit/>
+          </a:bodyPr>
+          <a:p>
+            <a:pPr algn="r" defTabSz="914400">
+              <a:lnSpc>
+                <a:spcPct val="100000"/>
+              </a:lnSpc>
+              <a:tabLst>
+                <a:tab algn="l" pos="0"/>
+              </a:tabLst>
+            </a:pPr>
+            <a:r>
+              <a:rPr b="0" lang="en-US" sz="800" spc="-1" strike="noStrike">
+                <a:solidFill>
+                  <a:srgbClr val="5e7484"/>
+                </a:solidFill>
+                <a:latin typeface="Calibri"/>
+                <a:ea typeface="Calibri"/>
+              </a:rPr>
+              <a:t>14</a:t>
+            </a:r>
+            <a:endParaRPr b="0" lang="en-US" sz="800" spc="-1" strike="noStrike">
+              <a:solidFill>
+                <a:srgbClr val="000000"/>
+              </a:solidFill>
+              <a:latin typeface="Arial"/>
+            </a:endParaRPr>
+          </a:p>
+        </p:txBody>
+      </p:sp>
+      <p:sp>
+        <p:nvSpPr>
+          <p:cNvPr id="297" name="Rounded Rectangle 316"/>
           <p:cNvSpPr/>
           <p:nvPr/>
         </p:nvSpPr>
         <p:spPr>
           <a:xfrm>
             <a:off x="548640" y="1417320"/>
-            <a:ext cx="3931560" cy="1416960"/>
+            <a:ext cx="3885840" cy="914040"/>
           </a:xfrm>
           <a:prstGeom prst="roundRect">
             <a:avLst>
-              <a:gd name="adj" fmla="val 5161"/>
+              <a:gd name="adj" fmla="val 8000"/>
             </a:avLst>
           </a:prstGeom>
           <a:solidFill>
             <a:srgbClr val="ffffff"/>
           </a:solidFill>
-          <a:ln w="0">
+          <a:ln>
             <a:noFill/>
           </a:ln>
           <a:effectLst>
-            <a:outerShdw algn="bl" blurRad="88920" dir="5400000" dist="38160" kx="0" ky="0" rotWithShape="0" sx="100000" sy="100000">
+            <a:outerShdw blurRad="88920" dir="5400000" dist="38160" rotWithShape="0">
               <a:srgbClr val="0c2233">
                 <a:alpha val="12000"/>
               </a:srgbClr>
@@ -10115,35 +9947,46 @@
           </a:effectLst>
         </p:spPr>
         <p:style>
-          <a:lnRef idx="0"/>
-          <a:fillRef idx="0"/>
-          <a:effectRef idx="0"/>
-          <a:fontRef idx="minor"/>
-        </p:style>
-        <p:txBody>
-          <a:bodyPr lIns="90000" rIns="90000" tIns="45000" bIns="45000" anchor="t">
-            <a:noAutofit/>
-          </a:bodyPr>
-          <a:p>
+          <a:lnRef idx="1">
+            <a:schemeClr val="accent1"/>
+          </a:lnRef>
+          <a:fillRef idx="3">
+            <a:schemeClr val="accent1"/>
+          </a:fillRef>
+          <a:effectRef idx="2">
+            <a:schemeClr val="accent1"/>
+          </a:effectRef>
+          <a:fontRef idx="minor"/>
+        </p:style>
+        <p:txBody>
+          <a:bodyPr lIns="90000" rIns="90000" tIns="45000" bIns="45000" anchor="ctr">
+            <a:noAutofit/>
+          </a:bodyPr>
+          <a:p>
+            <a:pPr algn="ctr">
+              <a:lnSpc>
+                <a:spcPct val="100000"/>
+              </a:lnSpc>
+            </a:pPr>
             <a:endParaRPr b="0" lang="en-US" sz="1800" spc="-1" strike="noStrike">
               <a:solidFill>
-                <a:srgbClr val="000000"/>
-              </a:solidFill>
-              <a:latin typeface="Arial"/>
-            </a:endParaRPr>
-          </a:p>
-        </p:txBody>
-      </p:sp>
-      <p:sp>
-        <p:nvSpPr>
-          <p:cNvPr id="296" name="Text 4"/>
-          <p:cNvSpPr/>
-          <p:nvPr/>
-        </p:nvSpPr>
-        <p:spPr>
-          <a:xfrm>
-            <a:off x="777240" y="1536120"/>
-            <a:ext cx="2742840" cy="319680"/>
+                <a:schemeClr val="lt1"/>
+              </a:solidFill>
+              <a:latin typeface="Calibri"/>
+            </a:endParaRPr>
+          </a:p>
+        </p:txBody>
+      </p:sp>
+      <p:sp>
+        <p:nvSpPr>
+          <p:cNvPr id="298" name="TextBox 317"/>
+          <p:cNvSpPr/>
+          <p:nvPr/>
+        </p:nvSpPr>
+        <p:spPr>
+          <a:xfrm>
+            <a:off x="749880" y="1508760"/>
+            <a:ext cx="2468520" cy="205920"/>
           </a:xfrm>
           <a:prstGeom prst="rect">
             <a:avLst/>
@@ -10160,47 +10003,43 @@
           <a:fontRef idx="minor"/>
         </p:style>
         <p:txBody>
-          <a:bodyPr lIns="0" rIns="0" tIns="0" bIns="0" anchor="ctr">
-            <a:noAutofit/>
-          </a:bodyPr>
-          <a:p>
-            <a:pPr defTabSz="914400">
-              <a:lnSpc>
-                <a:spcPct val="100000"/>
-              </a:lnSpc>
-              <a:tabLst>
-                <a:tab algn="l" pos="0"/>
-              </a:tabLst>
-            </a:pPr>
-            <a:r>
-              <a:rPr b="1" lang="en-US" sz="1500" spc="-1" strike="noStrike">
+          <a:bodyPr lIns="0" rIns="0" tIns="0" bIns="0" anchor="t">
+            <a:spAutoFit/>
+          </a:bodyPr>
+          <a:p>
+            <a:pPr>
+              <a:lnSpc>
+                <a:spcPct val="100000"/>
+              </a:lnSpc>
+            </a:pPr>
+            <a:r>
+              <a:rPr b="1" lang="en-US" sz="1350" spc="-1" strike="noStrike">
                 <a:solidFill>
                   <a:srgbClr val="16242f"/>
                 </a:solidFill>
                 <a:latin typeface="Calibri"/>
-                <a:ea typeface="Calibri"/>
               </a:rPr>
               <a:t>DigiNotar</a:t>
             </a:r>
-            <a:endParaRPr b="0" lang="en-US" sz="1500" spc="-1" strike="noStrike">
-              <a:solidFill>
-                <a:srgbClr val="000000"/>
-              </a:solidFill>
-              <a:latin typeface="Arial"/>
-            </a:endParaRPr>
-          </a:p>
-        </p:txBody>
-      </p:sp>
-      <p:sp>
-        <p:nvSpPr>
-          <p:cNvPr id="297" name="Text 5"/>
-          <p:cNvSpPr/>
-          <p:nvPr/>
-        </p:nvSpPr>
-        <p:spPr>
-          <a:xfrm>
-            <a:off x="3383280" y="1536120"/>
-            <a:ext cx="914040" cy="319680"/>
+            <a:endParaRPr b="0" lang="en-US" sz="1350" spc="-1" strike="noStrike">
+              <a:solidFill>
+                <a:srgbClr val="000000"/>
+              </a:solidFill>
+              <a:latin typeface="Arial"/>
+            </a:endParaRPr>
+          </a:p>
+        </p:txBody>
+      </p:sp>
+      <p:sp>
+        <p:nvSpPr>
+          <p:cNvPr id="299" name="TextBox 318"/>
+          <p:cNvSpPr/>
+          <p:nvPr/>
+        </p:nvSpPr>
+        <p:spPr>
+          <a:xfrm>
+            <a:off x="3291840" y="1517760"/>
+            <a:ext cx="941400" cy="175680"/>
           </a:xfrm>
           <a:prstGeom prst="rect">
             <a:avLst/>
@@ -10217,47 +10056,43 @@
           <a:fontRef idx="minor"/>
         </p:style>
         <p:txBody>
-          <a:bodyPr lIns="0" rIns="0" tIns="0" bIns="0" anchor="ctr">
-            <a:noAutofit/>
-          </a:bodyPr>
-          <a:p>
-            <a:pPr algn="r" defTabSz="914400">
-              <a:lnSpc>
-                <a:spcPct val="100000"/>
-              </a:lnSpc>
-              <a:tabLst>
-                <a:tab algn="l" pos="0"/>
-              </a:tabLst>
-            </a:pPr>
-            <a:r>
-              <a:rPr b="1" lang="en-US" sz="1200" spc="-1" strike="noStrike">
+          <a:bodyPr lIns="0" rIns="0" tIns="0" bIns="0" anchor="t">
+            <a:spAutoFit/>
+          </a:bodyPr>
+          <a:p>
+            <a:pPr algn="r">
+              <a:lnSpc>
+                <a:spcPct val="100000"/>
+              </a:lnSpc>
+            </a:pPr>
+            <a:r>
+              <a:rPr b="1" lang="en-US" sz="1150" spc="-1" strike="noStrike">
                 <a:solidFill>
                   <a:srgbClr val="d24b4b"/>
                 </a:solidFill>
                 <a:latin typeface="Calibri"/>
-                <a:ea typeface="Calibri"/>
               </a:rPr>
               <a:t>2011</a:t>
             </a:r>
-            <a:endParaRPr b="0" lang="en-US" sz="1200" spc="-1" strike="noStrike">
-              <a:solidFill>
-                <a:srgbClr val="000000"/>
-              </a:solidFill>
-              <a:latin typeface="Arial"/>
-            </a:endParaRPr>
-          </a:p>
-        </p:txBody>
-      </p:sp>
-      <p:sp>
-        <p:nvSpPr>
-          <p:cNvPr id="298" name="Text 6"/>
-          <p:cNvSpPr/>
-          <p:nvPr/>
-        </p:nvSpPr>
-        <p:spPr>
-          <a:xfrm>
-            <a:off x="777240" y="1874520"/>
-            <a:ext cx="3520080" cy="594000"/>
+            <a:endParaRPr b="0" lang="en-US" sz="1150" spc="-1" strike="noStrike">
+              <a:solidFill>
+                <a:srgbClr val="000000"/>
+              </a:solidFill>
+              <a:latin typeface="Arial"/>
+            </a:endParaRPr>
+          </a:p>
+        </p:txBody>
+      </p:sp>
+      <p:sp>
+        <p:nvSpPr>
+          <p:cNvPr id="300" name="TextBox 319"/>
+          <p:cNvSpPr/>
+          <p:nvPr/>
+        </p:nvSpPr>
+        <p:spPr>
+          <a:xfrm>
+            <a:off x="749880" y="1783080"/>
+            <a:ext cx="3520080" cy="145080"/>
           </a:xfrm>
           <a:prstGeom prst="rect">
             <a:avLst/>
@@ -10274,47 +10109,43 @@
           <a:fontRef idx="minor"/>
         </p:style>
         <p:txBody>
-          <a:bodyPr lIns="0" rIns="0" tIns="0" bIns="0" anchor="ctr">
-            <a:noAutofit/>
-          </a:bodyPr>
-          <a:p>
-            <a:pPr defTabSz="914400">
-              <a:lnSpc>
-                <a:spcPct val="100000"/>
-              </a:lnSpc>
-              <a:tabLst>
-                <a:tab algn="l" pos="0"/>
-              </a:tabLst>
-            </a:pPr>
-            <a:r>
-              <a:rPr b="0" lang="en-US" sz="1050" spc="-1" strike="noStrike">
+          <a:bodyPr lIns="0" rIns="0" tIns="0" bIns="0" anchor="t">
+            <a:spAutoFit/>
+          </a:bodyPr>
+          <a:p>
+            <a:pPr>
+              <a:lnSpc>
+                <a:spcPct val="100000"/>
+              </a:lnSpc>
+            </a:pPr>
+            <a:r>
+              <a:rPr b="0" lang="en-US" sz="950" spc="-1" strike="noStrike">
                 <a:solidFill>
                   <a:srgbClr val="5e7484"/>
                 </a:solidFill>
                 <a:latin typeface="Calibri"/>
-                <a:ea typeface="Calibri"/>
-              </a:rPr>
-              <a:t>CA breached → 531 fake certs, *.google.com used to spy on 300k users.</a:t>
-            </a:r>
-            <a:endParaRPr b="0" lang="en-US" sz="1050" spc="-1" strike="noStrike">
-              <a:solidFill>
-                <a:srgbClr val="000000"/>
-              </a:solidFill>
-              <a:latin typeface="Arial"/>
-            </a:endParaRPr>
-          </a:p>
-        </p:txBody>
-      </p:sp>
-      <p:sp>
-        <p:nvSpPr>
-          <p:cNvPr id="299" name="Text 7"/>
-          <p:cNvSpPr/>
-          <p:nvPr/>
-        </p:nvSpPr>
-        <p:spPr>
-          <a:xfrm>
-            <a:off x="777240" y="2477880"/>
-            <a:ext cx="3520080" cy="273960"/>
+              </a:rPr>
+              <a:t>CA breach → 531 fake certs; *.google.com spied on 300k.</a:t>
+            </a:r>
+            <a:endParaRPr b="0" lang="en-US" sz="950" spc="-1" strike="noStrike">
+              <a:solidFill>
+                <a:srgbClr val="000000"/>
+              </a:solidFill>
+              <a:latin typeface="Arial"/>
+            </a:endParaRPr>
+          </a:p>
+        </p:txBody>
+      </p:sp>
+      <p:sp>
+        <p:nvSpPr>
+          <p:cNvPr id="301" name="TextBox 320"/>
+          <p:cNvSpPr/>
+          <p:nvPr/>
+        </p:nvSpPr>
+        <p:spPr>
+          <a:xfrm>
+            <a:off x="749880" y="2112120"/>
+            <a:ext cx="3520080" cy="145080"/>
           </a:xfrm>
           <a:prstGeom prst="rect">
             <a:avLst/>
@@ -10331,71 +10162,66 @@
           <a:fontRef idx="minor"/>
         </p:style>
         <p:txBody>
-          <a:bodyPr lIns="0" rIns="0" tIns="0" bIns="0" anchor="ctr">
-            <a:noAutofit/>
-          </a:bodyPr>
-          <a:p>
-            <a:pPr defTabSz="914400">
-              <a:lnSpc>
-                <a:spcPct val="100000"/>
-              </a:lnSpc>
-              <a:tabLst>
-                <a:tab algn="l" pos="0"/>
-              </a:tabLst>
-            </a:pPr>
-            <a:r>
-              <a:rPr b="1" lang="en-US" sz="1050" spc="-1" strike="noStrike">
+          <a:bodyPr lIns="0" rIns="0" tIns="0" bIns="0" anchor="t">
+            <a:spAutoFit/>
+          </a:bodyPr>
+          <a:p>
+            <a:pPr>
+              <a:lnSpc>
+                <a:spcPct val="100000"/>
+              </a:lnSpc>
+            </a:pPr>
+            <a:r>
+              <a:rPr b="1" lang="en-US" sz="950" spc="-1" strike="noStrike">
                 <a:solidFill>
                   <a:srgbClr val="0f9c92"/>
                 </a:solidFill>
                 <a:latin typeface="Calibri"/>
-                <a:ea typeface="Calibri"/>
               </a:rPr>
               <a:t>→ </a:t>
             </a:r>
             <a:r>
-              <a:rPr b="1" lang="en-US" sz="1050" spc="-1" strike="noStrike">
+              <a:rPr b="1" lang="en-US" sz="950" spc="-1" strike="noStrike">
                 <a:solidFill>
                   <a:srgbClr val="0f9c92"/>
                 </a:solidFill>
                 <a:latin typeface="Calibri"/>
-                <a:ea typeface="Calibri"/>
               </a:rPr>
               <a:t>keep the Root offline</a:t>
             </a:r>
-            <a:endParaRPr b="0" lang="en-US" sz="1050" spc="-1" strike="noStrike">
-              <a:solidFill>
-                <a:srgbClr val="000000"/>
-              </a:solidFill>
-              <a:latin typeface="Arial"/>
-            </a:endParaRPr>
-          </a:p>
-        </p:txBody>
-      </p:sp>
-      <p:sp>
-        <p:nvSpPr>
-          <p:cNvPr id="300" name="Shape 8"/>
-          <p:cNvSpPr/>
-          <p:nvPr/>
-        </p:nvSpPr>
-        <p:spPr>
-          <a:xfrm>
-            <a:off x="4663440" y="1417320"/>
-            <a:ext cx="3931560" cy="1416960"/>
+            <a:endParaRPr b="0" lang="en-US" sz="950" spc="-1" strike="noStrike">
+              <a:solidFill>
+                <a:srgbClr val="000000"/>
+              </a:solidFill>
+              <a:latin typeface="Arial"/>
+            </a:endParaRPr>
+          </a:p>
+        </p:txBody>
+      </p:sp>
+      <p:sp>
+        <p:nvSpPr>
+          <p:cNvPr id="302" name="Rounded Rectangle 321"/>
+          <p:cNvSpPr/>
+          <p:nvPr/>
+        </p:nvSpPr>
+        <p:spPr>
+          <a:xfrm>
+            <a:off x="4709160" y="1417320"/>
+            <a:ext cx="3885840" cy="914040"/>
           </a:xfrm>
           <a:prstGeom prst="roundRect">
             <a:avLst>
-              <a:gd name="adj" fmla="val 5161"/>
+              <a:gd name="adj" fmla="val 8000"/>
             </a:avLst>
           </a:prstGeom>
           <a:solidFill>
             <a:srgbClr val="ffffff"/>
           </a:solidFill>
-          <a:ln w="0">
+          <a:ln>
             <a:noFill/>
           </a:ln>
           <a:effectLst>
-            <a:outerShdw algn="bl" blurRad="88920" dir="5400000" dist="38160" kx="0" ky="0" rotWithShape="0" sx="100000" sy="100000">
+            <a:outerShdw blurRad="88920" dir="5400000" dist="38160" rotWithShape="0">
               <a:srgbClr val="0c2233">
                 <a:alpha val="12000"/>
               </a:srgbClr>
@@ -10403,35 +10229,46 @@
           </a:effectLst>
         </p:spPr>
         <p:style>
-          <a:lnRef idx="0"/>
-          <a:fillRef idx="0"/>
-          <a:effectRef idx="0"/>
-          <a:fontRef idx="minor"/>
-        </p:style>
-        <p:txBody>
-          <a:bodyPr lIns="90000" rIns="90000" tIns="45000" bIns="45000" anchor="t">
-            <a:noAutofit/>
-          </a:bodyPr>
-          <a:p>
+          <a:lnRef idx="1">
+            <a:schemeClr val="accent1"/>
+          </a:lnRef>
+          <a:fillRef idx="3">
+            <a:schemeClr val="accent1"/>
+          </a:fillRef>
+          <a:effectRef idx="2">
+            <a:schemeClr val="accent1"/>
+          </a:effectRef>
+          <a:fontRef idx="minor"/>
+        </p:style>
+        <p:txBody>
+          <a:bodyPr lIns="90000" rIns="90000" tIns="45000" bIns="45000" anchor="ctr">
+            <a:noAutofit/>
+          </a:bodyPr>
+          <a:p>
+            <a:pPr algn="ctr">
+              <a:lnSpc>
+                <a:spcPct val="100000"/>
+              </a:lnSpc>
+            </a:pPr>
             <a:endParaRPr b="0" lang="en-US" sz="1800" spc="-1" strike="noStrike">
               <a:solidFill>
-                <a:srgbClr val="000000"/>
-              </a:solidFill>
-              <a:latin typeface="Arial"/>
-            </a:endParaRPr>
-          </a:p>
-        </p:txBody>
-      </p:sp>
-      <p:sp>
-        <p:nvSpPr>
-          <p:cNvPr id="301" name="Text 9"/>
-          <p:cNvSpPr/>
-          <p:nvPr/>
-        </p:nvSpPr>
-        <p:spPr>
-          <a:xfrm>
-            <a:off x="4892040" y="1536120"/>
-            <a:ext cx="2742840" cy="319680"/>
+                <a:schemeClr val="lt1"/>
+              </a:solidFill>
+              <a:latin typeface="Calibri"/>
+            </a:endParaRPr>
+          </a:p>
+        </p:txBody>
+      </p:sp>
+      <p:sp>
+        <p:nvSpPr>
+          <p:cNvPr id="303" name="TextBox 322"/>
+          <p:cNvSpPr/>
+          <p:nvPr/>
+        </p:nvSpPr>
+        <p:spPr>
+          <a:xfrm>
+            <a:off x="4910400" y="1508760"/>
+            <a:ext cx="2468520" cy="205920"/>
           </a:xfrm>
           <a:prstGeom prst="rect">
             <a:avLst/>
@@ -10448,47 +10285,43 @@
           <a:fontRef idx="minor"/>
         </p:style>
         <p:txBody>
-          <a:bodyPr lIns="0" rIns="0" tIns="0" bIns="0" anchor="ctr">
-            <a:noAutofit/>
-          </a:bodyPr>
-          <a:p>
-            <a:pPr defTabSz="914400">
-              <a:lnSpc>
-                <a:spcPct val="100000"/>
-              </a:lnSpc>
-              <a:tabLst>
-                <a:tab algn="l" pos="0"/>
-              </a:tabLst>
-            </a:pPr>
-            <a:r>
-              <a:rPr b="1" lang="en-US" sz="1500" spc="-1" strike="noStrike">
+          <a:bodyPr lIns="0" rIns="0" tIns="0" bIns="0" anchor="t">
+            <a:spAutoFit/>
+          </a:bodyPr>
+          <a:p>
+            <a:pPr>
+              <a:lnSpc>
+                <a:spcPct val="100000"/>
+              </a:lnSpc>
+            </a:pPr>
+            <a:r>
+              <a:rPr b="1" lang="en-US" sz="1350" spc="-1" strike="noStrike">
                 <a:solidFill>
                   <a:srgbClr val="16242f"/>
                 </a:solidFill>
                 <a:latin typeface="Calibri"/>
-                <a:ea typeface="Calibri"/>
-              </a:rPr>
-              <a:t>Symantec</a:t>
-            </a:r>
-            <a:endParaRPr b="0" lang="en-US" sz="1500" spc="-1" strike="noStrike">
-              <a:solidFill>
-                <a:srgbClr val="000000"/>
-              </a:solidFill>
-              <a:latin typeface="Arial"/>
-            </a:endParaRPr>
-          </a:p>
-        </p:txBody>
-      </p:sp>
-      <p:sp>
-        <p:nvSpPr>
-          <p:cNvPr id="302" name="Text 10"/>
-          <p:cNvSpPr/>
-          <p:nvPr/>
-        </p:nvSpPr>
-        <p:spPr>
-          <a:xfrm>
-            <a:off x="7498080" y="1536120"/>
-            <a:ext cx="914040" cy="319680"/>
+              </a:rPr>
+              <a:t>Symantec distrust</a:t>
+            </a:r>
+            <a:endParaRPr b="0" lang="en-US" sz="1350" spc="-1" strike="noStrike">
+              <a:solidFill>
+                <a:srgbClr val="000000"/>
+              </a:solidFill>
+              <a:latin typeface="Arial"/>
+            </a:endParaRPr>
+          </a:p>
+        </p:txBody>
+      </p:sp>
+      <p:sp>
+        <p:nvSpPr>
+          <p:cNvPr id="304" name="TextBox 323"/>
+          <p:cNvSpPr/>
+          <p:nvPr/>
+        </p:nvSpPr>
+        <p:spPr>
+          <a:xfrm>
+            <a:off x="7452360" y="1517760"/>
+            <a:ext cx="941400" cy="175680"/>
           </a:xfrm>
           <a:prstGeom prst="rect">
             <a:avLst/>
@@ -10505,47 +10338,43 @@
           <a:fontRef idx="minor"/>
         </p:style>
         <p:txBody>
-          <a:bodyPr lIns="0" rIns="0" tIns="0" bIns="0" anchor="ctr">
-            <a:noAutofit/>
-          </a:bodyPr>
-          <a:p>
-            <a:pPr algn="r" defTabSz="914400">
-              <a:lnSpc>
-                <a:spcPct val="100000"/>
-              </a:lnSpc>
-              <a:tabLst>
-                <a:tab algn="l" pos="0"/>
-              </a:tabLst>
-            </a:pPr>
-            <a:r>
-              <a:rPr b="1" lang="en-US" sz="1200" spc="-1" strike="noStrike">
+          <a:bodyPr lIns="0" rIns="0" tIns="0" bIns="0" anchor="t">
+            <a:spAutoFit/>
+          </a:bodyPr>
+          <a:p>
+            <a:pPr algn="r">
+              <a:lnSpc>
+                <a:spcPct val="100000"/>
+              </a:lnSpc>
+            </a:pPr>
+            <a:r>
+              <a:rPr b="1" lang="en-US" sz="1150" spc="-1" strike="noStrike">
                 <a:solidFill>
                   <a:srgbClr val="d24b4b"/>
                 </a:solidFill>
                 <a:latin typeface="Calibri"/>
-                <a:ea typeface="Calibri"/>
-              </a:rPr>
-              <a:t>2017</a:t>
-            </a:r>
-            <a:endParaRPr b="0" lang="en-US" sz="1200" spc="-1" strike="noStrike">
-              <a:solidFill>
-                <a:srgbClr val="000000"/>
-              </a:solidFill>
-              <a:latin typeface="Arial"/>
-            </a:endParaRPr>
-          </a:p>
-        </p:txBody>
-      </p:sp>
-      <p:sp>
-        <p:nvSpPr>
-          <p:cNvPr id="303" name="Text 11"/>
-          <p:cNvSpPr/>
-          <p:nvPr/>
-        </p:nvSpPr>
-        <p:spPr>
-          <a:xfrm>
-            <a:off x="4892040" y="1874520"/>
-            <a:ext cx="3520080" cy="594000"/>
+              </a:rPr>
+              <a:t>2017-2018</a:t>
+            </a:r>
+            <a:endParaRPr b="0" lang="en-US" sz="1150" spc="-1" strike="noStrike">
+              <a:solidFill>
+                <a:srgbClr val="000000"/>
+              </a:solidFill>
+              <a:latin typeface="Arial"/>
+            </a:endParaRPr>
+          </a:p>
+        </p:txBody>
+      </p:sp>
+      <p:sp>
+        <p:nvSpPr>
+          <p:cNvPr id="305" name="TextBox 324"/>
+          <p:cNvSpPr/>
+          <p:nvPr/>
+        </p:nvSpPr>
+        <p:spPr>
+          <a:xfrm>
+            <a:off x="4910400" y="1783080"/>
+            <a:ext cx="3520080" cy="145080"/>
           </a:xfrm>
           <a:prstGeom prst="rect">
             <a:avLst/>
@@ -10562,47 +10391,43 @@
           <a:fontRef idx="minor"/>
         </p:style>
         <p:txBody>
-          <a:bodyPr lIns="0" rIns="0" tIns="0" bIns="0" anchor="ctr">
-            <a:noAutofit/>
-          </a:bodyPr>
-          <a:p>
-            <a:pPr defTabSz="914400">
-              <a:lnSpc>
-                <a:spcPct val="100000"/>
-              </a:lnSpc>
-              <a:tabLst>
-                <a:tab algn="l" pos="0"/>
-              </a:tabLst>
-            </a:pPr>
-            <a:r>
-              <a:rPr b="0" lang="en-US" sz="1050" spc="-1" strike="noStrike">
+          <a:bodyPr lIns="0" rIns="0" tIns="0" bIns="0" anchor="t">
+            <a:spAutoFit/>
+          </a:bodyPr>
+          <a:p>
+            <a:pPr>
+              <a:lnSpc>
+                <a:spcPct val="100000"/>
+              </a:lnSpc>
+            </a:pPr>
+            <a:r>
+              <a:rPr b="0" lang="en-US" sz="950" spc="-1" strike="noStrike">
                 <a:solidFill>
                   <a:srgbClr val="5e7484"/>
                 </a:solidFill>
                 <a:latin typeface="Calibri"/>
-                <a:ea typeface="Calibri"/>
-              </a:rPr>
-              <a:t>30,000+ misissued certs via unsupervised resellers → distrusted by Chrome.</a:t>
-            </a:r>
-            <a:endParaRPr b="0" lang="en-US" sz="1050" spc="-1" strike="noStrike">
-              <a:solidFill>
-                <a:srgbClr val="000000"/>
-              </a:solidFill>
-              <a:latin typeface="Arial"/>
-            </a:endParaRPr>
-          </a:p>
-        </p:txBody>
-      </p:sp>
-      <p:sp>
-        <p:nvSpPr>
-          <p:cNvPr id="304" name="Text 12"/>
-          <p:cNvSpPr/>
-          <p:nvPr/>
-        </p:nvSpPr>
-        <p:spPr>
-          <a:xfrm>
-            <a:off x="4892040" y="2477880"/>
-            <a:ext cx="3520080" cy="273960"/>
+              </a:rPr>
+              <a:t>30,000+ misissued via lax resellers → Chrome distrust.</a:t>
+            </a:r>
+            <a:endParaRPr b="0" lang="en-US" sz="950" spc="-1" strike="noStrike">
+              <a:solidFill>
+                <a:srgbClr val="000000"/>
+              </a:solidFill>
+              <a:latin typeface="Arial"/>
+            </a:endParaRPr>
+          </a:p>
+        </p:txBody>
+      </p:sp>
+      <p:sp>
+        <p:nvSpPr>
+          <p:cNvPr id="306" name="TextBox 325"/>
+          <p:cNvSpPr/>
+          <p:nvPr/>
+        </p:nvSpPr>
+        <p:spPr>
+          <a:xfrm>
+            <a:off x="4910400" y="2112120"/>
+            <a:ext cx="3520080" cy="145080"/>
           </a:xfrm>
           <a:prstGeom prst="rect">
             <a:avLst/>
@@ -10619,71 +10444,66 @@
           <a:fontRef idx="minor"/>
         </p:style>
         <p:txBody>
-          <a:bodyPr lIns="0" rIns="0" tIns="0" bIns="0" anchor="ctr">
-            <a:noAutofit/>
-          </a:bodyPr>
-          <a:p>
-            <a:pPr defTabSz="914400">
-              <a:lnSpc>
-                <a:spcPct val="100000"/>
-              </a:lnSpc>
-              <a:tabLst>
-                <a:tab algn="l" pos="0"/>
-              </a:tabLst>
-            </a:pPr>
-            <a:r>
-              <a:rPr b="1" lang="en-US" sz="1050" spc="-1" strike="noStrike">
+          <a:bodyPr lIns="0" rIns="0" tIns="0" bIns="0" anchor="t">
+            <a:spAutoFit/>
+          </a:bodyPr>
+          <a:p>
+            <a:pPr>
+              <a:lnSpc>
+                <a:spcPct val="100000"/>
+              </a:lnSpc>
+            </a:pPr>
+            <a:r>
+              <a:rPr b="1" lang="en-US" sz="950" spc="-1" strike="noStrike">
                 <a:solidFill>
                   <a:srgbClr val="0f9c92"/>
                 </a:solidFill>
                 <a:latin typeface="Calibri"/>
-                <a:ea typeface="Calibri"/>
               </a:rPr>
               <a:t>→ </a:t>
             </a:r>
             <a:r>
-              <a:rPr b="1" lang="en-US" sz="1050" spc="-1" strike="noStrike">
+              <a:rPr b="1" lang="en-US" sz="950" spc="-1" strike="noStrike">
                 <a:solidFill>
                   <a:srgbClr val="0f9c92"/>
                 </a:solidFill>
                 <a:latin typeface="Calibri"/>
-                <a:ea typeface="Calibri"/>
               </a:rPr>
               <a:t>governance &amp; oversight</a:t>
             </a:r>
-            <a:endParaRPr b="0" lang="en-US" sz="1050" spc="-1" strike="noStrike">
-              <a:solidFill>
-                <a:srgbClr val="000000"/>
-              </a:solidFill>
-              <a:latin typeface="Arial"/>
-            </a:endParaRPr>
-          </a:p>
-        </p:txBody>
-      </p:sp>
-      <p:sp>
-        <p:nvSpPr>
-          <p:cNvPr id="305" name="Shape 13"/>
-          <p:cNvSpPr/>
-          <p:nvPr/>
-        </p:nvSpPr>
-        <p:spPr>
-          <a:xfrm>
-            <a:off x="548640" y="2990160"/>
-            <a:ext cx="3931560" cy="1416960"/>
+            <a:endParaRPr b="0" lang="en-US" sz="950" spc="-1" strike="noStrike">
+              <a:solidFill>
+                <a:srgbClr val="000000"/>
+              </a:solidFill>
+              <a:latin typeface="Arial"/>
+            </a:endParaRPr>
+          </a:p>
+        </p:txBody>
+      </p:sp>
+      <p:sp>
+        <p:nvSpPr>
+          <p:cNvPr id="307" name="Rounded Rectangle 326"/>
+          <p:cNvSpPr/>
+          <p:nvPr/>
+        </p:nvSpPr>
+        <p:spPr>
+          <a:xfrm>
+            <a:off x="548640" y="2514600"/>
+            <a:ext cx="3885840" cy="914040"/>
           </a:xfrm>
           <a:prstGeom prst="roundRect">
             <a:avLst>
-              <a:gd name="adj" fmla="val 5161"/>
+              <a:gd name="adj" fmla="val 8000"/>
             </a:avLst>
           </a:prstGeom>
           <a:solidFill>
             <a:srgbClr val="ffffff"/>
           </a:solidFill>
-          <a:ln w="0">
+          <a:ln>
             <a:noFill/>
           </a:ln>
           <a:effectLst>
-            <a:outerShdw algn="bl" blurRad="88920" dir="5400000" dist="38160" kx="0" ky="0" rotWithShape="0" sx="100000" sy="100000">
+            <a:outerShdw blurRad="88920" dir="5400000" dist="38160" rotWithShape="0">
               <a:srgbClr val="0c2233">
                 <a:alpha val="12000"/>
               </a:srgbClr>
@@ -10691,35 +10511,46 @@
           </a:effectLst>
         </p:spPr>
         <p:style>
-          <a:lnRef idx="0"/>
-          <a:fillRef idx="0"/>
-          <a:effectRef idx="0"/>
-          <a:fontRef idx="minor"/>
-        </p:style>
-        <p:txBody>
-          <a:bodyPr lIns="90000" rIns="90000" tIns="45000" bIns="45000" anchor="t">
-            <a:noAutofit/>
-          </a:bodyPr>
-          <a:p>
+          <a:lnRef idx="1">
+            <a:schemeClr val="accent1"/>
+          </a:lnRef>
+          <a:fillRef idx="3">
+            <a:schemeClr val="accent1"/>
+          </a:fillRef>
+          <a:effectRef idx="2">
+            <a:schemeClr val="accent1"/>
+          </a:effectRef>
+          <a:fontRef idx="minor"/>
+        </p:style>
+        <p:txBody>
+          <a:bodyPr lIns="90000" rIns="90000" tIns="45000" bIns="45000" anchor="ctr">
+            <a:noAutofit/>
+          </a:bodyPr>
+          <a:p>
+            <a:pPr algn="ctr">
+              <a:lnSpc>
+                <a:spcPct val="100000"/>
+              </a:lnSpc>
+            </a:pPr>
             <a:endParaRPr b="0" lang="en-US" sz="1800" spc="-1" strike="noStrike">
               <a:solidFill>
-                <a:srgbClr val="000000"/>
-              </a:solidFill>
-              <a:latin typeface="Arial"/>
-            </a:endParaRPr>
-          </a:p>
-        </p:txBody>
-      </p:sp>
-      <p:sp>
-        <p:nvSpPr>
-          <p:cNvPr id="306" name="Text 14"/>
-          <p:cNvSpPr/>
-          <p:nvPr/>
-        </p:nvSpPr>
-        <p:spPr>
-          <a:xfrm>
-            <a:off x="777240" y="3108960"/>
-            <a:ext cx="2742840" cy="319680"/>
+                <a:schemeClr val="lt1"/>
+              </a:solidFill>
+              <a:latin typeface="Calibri"/>
+            </a:endParaRPr>
+          </a:p>
+        </p:txBody>
+      </p:sp>
+      <p:sp>
+        <p:nvSpPr>
+          <p:cNvPr id="308" name="TextBox 327"/>
+          <p:cNvSpPr/>
+          <p:nvPr/>
+        </p:nvSpPr>
+        <p:spPr>
+          <a:xfrm>
+            <a:off x="749880" y="2606040"/>
+            <a:ext cx="2468520" cy="205920"/>
           </a:xfrm>
           <a:prstGeom prst="rect">
             <a:avLst/>
@@ -10736,47 +10567,43 @@
           <a:fontRef idx="minor"/>
         </p:style>
         <p:txBody>
-          <a:bodyPr lIns="0" rIns="0" tIns="0" bIns="0" anchor="ctr">
-            <a:noAutofit/>
-          </a:bodyPr>
-          <a:p>
-            <a:pPr defTabSz="914400">
-              <a:lnSpc>
-                <a:spcPct val="100000"/>
-              </a:lnSpc>
-              <a:tabLst>
-                <a:tab algn="l" pos="0"/>
-              </a:tabLst>
-            </a:pPr>
-            <a:r>
-              <a:rPr b="1" lang="en-US" sz="1500" spc="-1" strike="noStrike">
+          <a:bodyPr lIns="0" rIns="0" tIns="0" bIns="0" anchor="t">
+            <a:spAutoFit/>
+          </a:bodyPr>
+          <a:p>
+            <a:pPr>
+              <a:lnSpc>
+                <a:spcPct val="100000"/>
+              </a:lnSpc>
+            </a:pPr>
+            <a:r>
+              <a:rPr b="1" lang="en-US" sz="1350" spc="-1" strike="noStrike">
                 <a:solidFill>
                   <a:srgbClr val="16242f"/>
                 </a:solidFill>
                 <a:latin typeface="Calibri"/>
-                <a:ea typeface="Calibri"/>
               </a:rPr>
               <a:t>Heartbleed</a:t>
             </a:r>
-            <a:endParaRPr b="0" lang="en-US" sz="1500" spc="-1" strike="noStrike">
-              <a:solidFill>
-                <a:srgbClr val="000000"/>
-              </a:solidFill>
-              <a:latin typeface="Arial"/>
-            </a:endParaRPr>
-          </a:p>
-        </p:txBody>
-      </p:sp>
-      <p:sp>
-        <p:nvSpPr>
-          <p:cNvPr id="307" name="Text 15"/>
-          <p:cNvSpPr/>
-          <p:nvPr/>
-        </p:nvSpPr>
-        <p:spPr>
-          <a:xfrm>
-            <a:off x="3383280" y="3108960"/>
-            <a:ext cx="914040" cy="319680"/>
+            <a:endParaRPr b="0" lang="en-US" sz="1350" spc="-1" strike="noStrike">
+              <a:solidFill>
+                <a:srgbClr val="000000"/>
+              </a:solidFill>
+              <a:latin typeface="Arial"/>
+            </a:endParaRPr>
+          </a:p>
+        </p:txBody>
+      </p:sp>
+      <p:sp>
+        <p:nvSpPr>
+          <p:cNvPr id="309" name="TextBox 328"/>
+          <p:cNvSpPr/>
+          <p:nvPr/>
+        </p:nvSpPr>
+        <p:spPr>
+          <a:xfrm>
+            <a:off x="3291840" y="2615040"/>
+            <a:ext cx="941400" cy="175680"/>
           </a:xfrm>
           <a:prstGeom prst="rect">
             <a:avLst/>
@@ -10793,47 +10620,43 @@
           <a:fontRef idx="minor"/>
         </p:style>
         <p:txBody>
-          <a:bodyPr lIns="0" rIns="0" tIns="0" bIns="0" anchor="ctr">
-            <a:noAutofit/>
-          </a:bodyPr>
-          <a:p>
-            <a:pPr algn="r" defTabSz="914400">
-              <a:lnSpc>
-                <a:spcPct val="100000"/>
-              </a:lnSpc>
-              <a:tabLst>
-                <a:tab algn="l" pos="0"/>
-              </a:tabLst>
-            </a:pPr>
-            <a:r>
-              <a:rPr b="1" lang="en-US" sz="1200" spc="-1" strike="noStrike">
+          <a:bodyPr lIns="0" rIns="0" tIns="0" bIns="0" anchor="t">
+            <a:spAutoFit/>
+          </a:bodyPr>
+          <a:p>
+            <a:pPr algn="r">
+              <a:lnSpc>
+                <a:spcPct val="100000"/>
+              </a:lnSpc>
+            </a:pPr>
+            <a:r>
+              <a:rPr b="1" lang="en-US" sz="1150" spc="-1" strike="noStrike">
                 <a:solidFill>
                   <a:srgbClr val="d24b4b"/>
                 </a:solidFill>
                 <a:latin typeface="Calibri"/>
-                <a:ea typeface="Calibri"/>
               </a:rPr>
               <a:t>2014</a:t>
             </a:r>
-            <a:endParaRPr b="0" lang="en-US" sz="1200" spc="-1" strike="noStrike">
-              <a:solidFill>
-                <a:srgbClr val="000000"/>
-              </a:solidFill>
-              <a:latin typeface="Arial"/>
-            </a:endParaRPr>
-          </a:p>
-        </p:txBody>
-      </p:sp>
-      <p:sp>
-        <p:nvSpPr>
-          <p:cNvPr id="308" name="Text 16"/>
-          <p:cNvSpPr/>
-          <p:nvPr/>
-        </p:nvSpPr>
-        <p:spPr>
-          <a:xfrm>
-            <a:off x="777240" y="3447360"/>
-            <a:ext cx="3520080" cy="594000"/>
+            <a:endParaRPr b="0" lang="en-US" sz="1150" spc="-1" strike="noStrike">
+              <a:solidFill>
+                <a:srgbClr val="000000"/>
+              </a:solidFill>
+              <a:latin typeface="Arial"/>
+            </a:endParaRPr>
+          </a:p>
+        </p:txBody>
+      </p:sp>
+      <p:sp>
+        <p:nvSpPr>
+          <p:cNvPr id="310" name="TextBox 329"/>
+          <p:cNvSpPr/>
+          <p:nvPr/>
+        </p:nvSpPr>
+        <p:spPr>
+          <a:xfrm>
+            <a:off x="749880" y="2880360"/>
+            <a:ext cx="3520080" cy="145080"/>
           </a:xfrm>
           <a:prstGeom prst="rect">
             <a:avLst/>
@@ -10850,47 +10673,43 @@
           <a:fontRef idx="minor"/>
         </p:style>
         <p:txBody>
-          <a:bodyPr lIns="0" rIns="0" tIns="0" bIns="0" anchor="ctr">
-            <a:noAutofit/>
-          </a:bodyPr>
-          <a:p>
-            <a:pPr defTabSz="914400">
-              <a:lnSpc>
-                <a:spcPct val="100000"/>
-              </a:lnSpc>
-              <a:tabLst>
-                <a:tab algn="l" pos="0"/>
-              </a:tabLst>
-            </a:pPr>
-            <a:r>
-              <a:rPr b="0" lang="en-US" sz="1050" spc="-1" strike="noStrike">
+          <a:bodyPr lIns="0" rIns="0" tIns="0" bIns="0" anchor="t">
+            <a:spAutoFit/>
+          </a:bodyPr>
+          <a:p>
+            <a:pPr>
+              <a:lnSpc>
+                <a:spcPct val="100000"/>
+              </a:lnSpc>
+            </a:pPr>
+            <a:r>
+              <a:rPr b="0" lang="en-US" sz="950" spc="-1" strike="noStrike">
                 <a:solidFill>
                   <a:srgbClr val="5e7484"/>
                 </a:solidFill>
                 <a:latin typeface="Calibri"/>
-                <a:ea typeface="Calibri"/>
-              </a:rPr>
-              <a:t>Keys leaked on ~17% of servers; ~98% of revocations were ignored.</a:t>
-            </a:r>
-            <a:endParaRPr b="0" lang="en-US" sz="1050" spc="-1" strike="noStrike">
-              <a:solidFill>
-                <a:srgbClr val="000000"/>
-              </a:solidFill>
-              <a:latin typeface="Arial"/>
-            </a:endParaRPr>
-          </a:p>
-        </p:txBody>
-      </p:sp>
-      <p:sp>
-        <p:nvSpPr>
-          <p:cNvPr id="309" name="Text 17"/>
-          <p:cNvSpPr/>
-          <p:nvPr/>
-        </p:nvSpPr>
-        <p:spPr>
-          <a:xfrm>
-            <a:off x="777240" y="4050720"/>
-            <a:ext cx="3520080" cy="273960"/>
+              </a:rPr>
+              <a:t>Keys leaked on ~17% of servers; ~98% of revocations ignored.</a:t>
+            </a:r>
+            <a:endParaRPr b="0" lang="en-US" sz="950" spc="-1" strike="noStrike">
+              <a:solidFill>
+                <a:srgbClr val="000000"/>
+              </a:solidFill>
+              <a:latin typeface="Arial"/>
+            </a:endParaRPr>
+          </a:p>
+        </p:txBody>
+      </p:sp>
+      <p:sp>
+        <p:nvSpPr>
+          <p:cNvPr id="311" name="TextBox 330"/>
+          <p:cNvSpPr/>
+          <p:nvPr/>
+        </p:nvSpPr>
+        <p:spPr>
+          <a:xfrm>
+            <a:off x="749880" y="3209400"/>
+            <a:ext cx="3520080" cy="145080"/>
           </a:xfrm>
           <a:prstGeom prst="rect">
             <a:avLst/>
@@ -10907,71 +10726,66 @@
           <a:fontRef idx="minor"/>
         </p:style>
         <p:txBody>
-          <a:bodyPr lIns="0" rIns="0" tIns="0" bIns="0" anchor="ctr">
-            <a:noAutofit/>
-          </a:bodyPr>
-          <a:p>
-            <a:pPr defTabSz="914400">
-              <a:lnSpc>
-                <a:spcPct val="100000"/>
-              </a:lnSpc>
-              <a:tabLst>
-                <a:tab algn="l" pos="0"/>
-              </a:tabLst>
-            </a:pPr>
-            <a:r>
-              <a:rPr b="1" lang="en-US" sz="1050" spc="-1" strike="noStrike">
+          <a:bodyPr lIns="0" rIns="0" tIns="0" bIns="0" anchor="t">
+            <a:spAutoFit/>
+          </a:bodyPr>
+          <a:p>
+            <a:pPr>
+              <a:lnSpc>
+                <a:spcPct val="100000"/>
+              </a:lnSpc>
+            </a:pPr>
+            <a:r>
+              <a:rPr b="1" lang="en-US" sz="950" spc="-1" strike="noStrike">
                 <a:solidFill>
                   <a:srgbClr val="0f9c92"/>
                 </a:solidFill>
                 <a:latin typeface="Calibri"/>
-                <a:ea typeface="Calibri"/>
               </a:rPr>
               <a:t>→ </a:t>
             </a:r>
             <a:r>
-              <a:rPr b="1" lang="en-US" sz="1050" spc="-1" strike="noStrike">
+              <a:rPr b="1" lang="en-US" sz="950" spc="-1" strike="noStrike">
                 <a:solidFill>
                   <a:srgbClr val="0f9c92"/>
                 </a:solidFill>
                 <a:latin typeface="Calibri"/>
-                <a:ea typeface="Calibri"/>
               </a:rPr>
               <a:t>short-lived certs</a:t>
             </a:r>
-            <a:endParaRPr b="0" lang="en-US" sz="1050" spc="-1" strike="noStrike">
-              <a:solidFill>
-                <a:srgbClr val="000000"/>
-              </a:solidFill>
-              <a:latin typeface="Arial"/>
-            </a:endParaRPr>
-          </a:p>
-        </p:txBody>
-      </p:sp>
-      <p:sp>
-        <p:nvSpPr>
-          <p:cNvPr id="310" name="Shape 18"/>
-          <p:cNvSpPr/>
-          <p:nvPr/>
-        </p:nvSpPr>
-        <p:spPr>
-          <a:xfrm>
-            <a:off x="4663440" y="2990160"/>
-            <a:ext cx="3931560" cy="1416960"/>
+            <a:endParaRPr b="0" lang="en-US" sz="950" spc="-1" strike="noStrike">
+              <a:solidFill>
+                <a:srgbClr val="000000"/>
+              </a:solidFill>
+              <a:latin typeface="Arial"/>
+            </a:endParaRPr>
+          </a:p>
+        </p:txBody>
+      </p:sp>
+      <p:sp>
+        <p:nvSpPr>
+          <p:cNvPr id="312" name="Rounded Rectangle 331"/>
+          <p:cNvSpPr/>
+          <p:nvPr/>
+        </p:nvSpPr>
+        <p:spPr>
+          <a:xfrm>
+            <a:off x="4709160" y="2514600"/>
+            <a:ext cx="3885840" cy="914040"/>
           </a:xfrm>
           <a:prstGeom prst="roundRect">
             <a:avLst>
-              <a:gd name="adj" fmla="val 5161"/>
+              <a:gd name="adj" fmla="val 8000"/>
             </a:avLst>
           </a:prstGeom>
           <a:solidFill>
             <a:srgbClr val="ffffff"/>
           </a:solidFill>
-          <a:ln w="0">
+          <a:ln>
             <a:noFill/>
           </a:ln>
           <a:effectLst>
-            <a:outerShdw algn="bl" blurRad="88920" dir="5400000" dist="38160" kx="0" ky="0" rotWithShape="0" sx="100000" sy="100000">
+            <a:outerShdw blurRad="88920" dir="5400000" dist="38160" rotWithShape="0">
               <a:srgbClr val="0c2233">
                 <a:alpha val="12000"/>
               </a:srgbClr>
@@ -10979,35 +10793,46 @@
           </a:effectLst>
         </p:spPr>
         <p:style>
-          <a:lnRef idx="0"/>
-          <a:fillRef idx="0"/>
-          <a:effectRef idx="0"/>
-          <a:fontRef idx="minor"/>
-        </p:style>
-        <p:txBody>
-          <a:bodyPr lIns="90000" rIns="90000" tIns="45000" bIns="45000" anchor="t">
-            <a:noAutofit/>
-          </a:bodyPr>
-          <a:p>
+          <a:lnRef idx="1">
+            <a:schemeClr val="accent1"/>
+          </a:lnRef>
+          <a:fillRef idx="3">
+            <a:schemeClr val="accent1"/>
+          </a:fillRef>
+          <a:effectRef idx="2">
+            <a:schemeClr val="accent1"/>
+          </a:effectRef>
+          <a:fontRef idx="minor"/>
+        </p:style>
+        <p:txBody>
+          <a:bodyPr lIns="90000" rIns="90000" tIns="45000" bIns="45000" anchor="ctr">
+            <a:noAutofit/>
+          </a:bodyPr>
+          <a:p>
+            <a:pPr algn="ctr">
+              <a:lnSpc>
+                <a:spcPct val="100000"/>
+              </a:lnSpc>
+            </a:pPr>
             <a:endParaRPr b="0" lang="en-US" sz="1800" spc="-1" strike="noStrike">
               <a:solidFill>
-                <a:srgbClr val="000000"/>
-              </a:solidFill>
-              <a:latin typeface="Arial"/>
-            </a:endParaRPr>
-          </a:p>
-        </p:txBody>
-      </p:sp>
-      <p:sp>
-        <p:nvSpPr>
-          <p:cNvPr id="311" name="Text 19"/>
-          <p:cNvSpPr/>
-          <p:nvPr/>
-        </p:nvSpPr>
-        <p:spPr>
-          <a:xfrm>
-            <a:off x="4892040" y="3108960"/>
-            <a:ext cx="2742840" cy="319680"/>
+                <a:schemeClr val="lt1"/>
+              </a:solidFill>
+              <a:latin typeface="Calibri"/>
+            </a:endParaRPr>
+          </a:p>
+        </p:txBody>
+      </p:sp>
+      <p:sp>
+        <p:nvSpPr>
+          <p:cNvPr id="313" name="TextBox 332"/>
+          <p:cNvSpPr/>
+          <p:nvPr/>
+        </p:nvSpPr>
+        <p:spPr>
+          <a:xfrm>
+            <a:off x="4910400" y="2606040"/>
+            <a:ext cx="2468520" cy="205920"/>
           </a:xfrm>
           <a:prstGeom prst="rect">
             <a:avLst/>
@@ -11024,47 +10849,607 @@
           <a:fontRef idx="minor"/>
         </p:style>
         <p:txBody>
-          <a:bodyPr lIns="0" rIns="0" tIns="0" bIns="0" anchor="ctr">
-            <a:noAutofit/>
-          </a:bodyPr>
-          <a:p>
-            <a:pPr defTabSz="914400">
-              <a:lnSpc>
-                <a:spcPct val="100000"/>
-              </a:lnSpc>
-              <a:tabLst>
-                <a:tab algn="l" pos="0"/>
-              </a:tabLst>
-            </a:pPr>
-            <a:r>
-              <a:rPr b="1" lang="en-US" sz="1500" spc="-1" strike="noStrike">
+          <a:bodyPr lIns="0" rIns="0" tIns="0" bIns="0" anchor="t">
+            <a:spAutoFit/>
+          </a:bodyPr>
+          <a:p>
+            <a:pPr>
+              <a:lnSpc>
+                <a:spcPct val="100000"/>
+              </a:lnSpc>
+            </a:pPr>
+            <a:r>
+              <a:rPr b="1" lang="en-US" sz="1350" spc="-1" strike="noStrike">
                 <a:solidFill>
                   <a:srgbClr val="16242f"/>
                 </a:solidFill>
                 <a:latin typeface="Calibri"/>
-                <a:ea typeface="Calibri"/>
+              </a:rPr>
+              <a:t>CNNIC / MCS Holdings</a:t>
+            </a:r>
+            <a:endParaRPr b="0" lang="en-US" sz="1350" spc="-1" strike="noStrike">
+              <a:solidFill>
+                <a:srgbClr val="000000"/>
+              </a:solidFill>
+              <a:latin typeface="Arial"/>
+            </a:endParaRPr>
+          </a:p>
+        </p:txBody>
+      </p:sp>
+      <p:sp>
+        <p:nvSpPr>
+          <p:cNvPr id="314" name="TextBox 333"/>
+          <p:cNvSpPr/>
+          <p:nvPr/>
+        </p:nvSpPr>
+        <p:spPr>
+          <a:xfrm>
+            <a:off x="7452360" y="2615040"/>
+            <a:ext cx="941400" cy="175680"/>
+          </a:xfrm>
+          <a:prstGeom prst="rect">
+            <a:avLst/>
+          </a:prstGeom>
+          <a:noFill/>
+          <a:ln w="0">
+            <a:noFill/>
+          </a:ln>
+        </p:spPr>
+        <p:style>
+          <a:lnRef idx="0"/>
+          <a:fillRef idx="0"/>
+          <a:effectRef idx="0"/>
+          <a:fontRef idx="minor"/>
+        </p:style>
+        <p:txBody>
+          <a:bodyPr lIns="0" rIns="0" tIns="0" bIns="0" anchor="t">
+            <a:spAutoFit/>
+          </a:bodyPr>
+          <a:p>
+            <a:pPr algn="r">
+              <a:lnSpc>
+                <a:spcPct val="100000"/>
+              </a:lnSpc>
+            </a:pPr>
+            <a:r>
+              <a:rPr b="1" lang="en-US" sz="1150" spc="-1" strike="noStrike">
+                <a:solidFill>
+                  <a:srgbClr val="d24b4b"/>
+                </a:solidFill>
+                <a:latin typeface="Calibri"/>
+              </a:rPr>
+              <a:t>2015</a:t>
+            </a:r>
+            <a:endParaRPr b="0" lang="en-US" sz="1150" spc="-1" strike="noStrike">
+              <a:solidFill>
+                <a:srgbClr val="000000"/>
+              </a:solidFill>
+              <a:latin typeface="Arial"/>
+            </a:endParaRPr>
+          </a:p>
+        </p:txBody>
+      </p:sp>
+      <p:sp>
+        <p:nvSpPr>
+          <p:cNvPr id="315" name="TextBox 334"/>
+          <p:cNvSpPr/>
+          <p:nvPr/>
+        </p:nvSpPr>
+        <p:spPr>
+          <a:xfrm>
+            <a:off x="4910400" y="2880360"/>
+            <a:ext cx="3520080" cy="145080"/>
+          </a:xfrm>
+          <a:prstGeom prst="rect">
+            <a:avLst/>
+          </a:prstGeom>
+          <a:noFill/>
+          <a:ln w="0">
+            <a:noFill/>
+          </a:ln>
+        </p:spPr>
+        <p:style>
+          <a:lnRef idx="0"/>
+          <a:fillRef idx="0"/>
+          <a:effectRef idx="0"/>
+          <a:fontRef idx="minor"/>
+        </p:style>
+        <p:txBody>
+          <a:bodyPr lIns="0" rIns="0" tIns="0" bIns="0" anchor="t">
+            <a:spAutoFit/>
+          </a:bodyPr>
+          <a:p>
+            <a:pPr>
+              <a:lnSpc>
+                <a:spcPct val="100000"/>
+              </a:lnSpc>
+            </a:pPr>
+            <a:r>
+              <a:rPr b="0" lang="en-US" sz="950" spc="-1" strike="noStrike">
+                <a:solidFill>
+                  <a:srgbClr val="5e7484"/>
+                </a:solidFill>
+                <a:latin typeface="Calibri"/>
+              </a:rPr>
+              <a:t>Sub-CA with no name constraint → forged Google certs.</a:t>
+            </a:r>
+            <a:endParaRPr b="0" lang="en-US" sz="950" spc="-1" strike="noStrike">
+              <a:solidFill>
+                <a:srgbClr val="000000"/>
+              </a:solidFill>
+              <a:latin typeface="Arial"/>
+            </a:endParaRPr>
+          </a:p>
+        </p:txBody>
+      </p:sp>
+      <p:sp>
+        <p:nvSpPr>
+          <p:cNvPr id="316" name="TextBox 335"/>
+          <p:cNvSpPr/>
+          <p:nvPr/>
+        </p:nvSpPr>
+        <p:spPr>
+          <a:xfrm>
+            <a:off x="4910400" y="3209400"/>
+            <a:ext cx="3520080" cy="145080"/>
+          </a:xfrm>
+          <a:prstGeom prst="rect">
+            <a:avLst/>
+          </a:prstGeom>
+          <a:noFill/>
+          <a:ln w="0">
+            <a:noFill/>
+          </a:ln>
+        </p:spPr>
+        <p:style>
+          <a:lnRef idx="0"/>
+          <a:fillRef idx="0"/>
+          <a:effectRef idx="0"/>
+          <a:fontRef idx="minor"/>
+        </p:style>
+        <p:txBody>
+          <a:bodyPr lIns="0" rIns="0" tIns="0" bIns="0" anchor="t">
+            <a:spAutoFit/>
+          </a:bodyPr>
+          <a:p>
+            <a:pPr>
+              <a:lnSpc>
+                <a:spcPct val="100000"/>
+              </a:lnSpc>
+            </a:pPr>
+            <a:r>
+              <a:rPr b="1" lang="en-US" sz="950" spc="-1" strike="noStrike">
+                <a:solidFill>
+                  <a:srgbClr val="0f9c92"/>
+                </a:solidFill>
+                <a:latin typeface="Calibri"/>
+              </a:rPr>
+              <a:t>→ </a:t>
+            </a:r>
+            <a:r>
+              <a:rPr b="1" lang="en-US" sz="950" spc="-1" strike="noStrike">
+                <a:solidFill>
+                  <a:srgbClr val="0f9c92"/>
+                </a:solidFill>
+                <a:latin typeface="Calibri"/>
+              </a:rPr>
+              <a:t>Certificate Transparency</a:t>
+            </a:r>
+            <a:endParaRPr b="0" lang="en-US" sz="950" spc="-1" strike="noStrike">
+              <a:solidFill>
+                <a:srgbClr val="000000"/>
+              </a:solidFill>
+              <a:latin typeface="Arial"/>
+            </a:endParaRPr>
+          </a:p>
+        </p:txBody>
+      </p:sp>
+      <p:sp>
+        <p:nvSpPr>
+          <p:cNvPr id="317" name="Rounded Rectangle 336"/>
+          <p:cNvSpPr/>
+          <p:nvPr/>
+        </p:nvSpPr>
+        <p:spPr>
+          <a:xfrm>
+            <a:off x="548640" y="3611880"/>
+            <a:ext cx="3885840" cy="914040"/>
+          </a:xfrm>
+          <a:prstGeom prst="roundRect">
+            <a:avLst>
+              <a:gd name="adj" fmla="val 8000"/>
+            </a:avLst>
+          </a:prstGeom>
+          <a:solidFill>
+            <a:srgbClr val="ffffff"/>
+          </a:solidFill>
+          <a:ln>
+            <a:noFill/>
+          </a:ln>
+          <a:effectLst>
+            <a:outerShdw blurRad="88920" dir="5400000" dist="38160" rotWithShape="0">
+              <a:srgbClr val="0c2233">
+                <a:alpha val="12000"/>
+              </a:srgbClr>
+            </a:outerShdw>
+          </a:effectLst>
+        </p:spPr>
+        <p:style>
+          <a:lnRef idx="1">
+            <a:schemeClr val="accent1"/>
+          </a:lnRef>
+          <a:fillRef idx="3">
+            <a:schemeClr val="accent1"/>
+          </a:fillRef>
+          <a:effectRef idx="2">
+            <a:schemeClr val="accent1"/>
+          </a:effectRef>
+          <a:fontRef idx="minor"/>
+        </p:style>
+        <p:txBody>
+          <a:bodyPr lIns="90000" rIns="90000" tIns="45000" bIns="45000" anchor="ctr">
+            <a:noAutofit/>
+          </a:bodyPr>
+          <a:p>
+            <a:pPr algn="ctr">
+              <a:lnSpc>
+                <a:spcPct val="100000"/>
+              </a:lnSpc>
+            </a:pPr>
+            <a:endParaRPr b="0" lang="en-US" sz="1800" spc="-1" strike="noStrike">
+              <a:solidFill>
+                <a:schemeClr val="lt1"/>
+              </a:solidFill>
+              <a:latin typeface="Calibri"/>
+            </a:endParaRPr>
+          </a:p>
+        </p:txBody>
+      </p:sp>
+      <p:sp>
+        <p:nvSpPr>
+          <p:cNvPr id="318" name="TextBox 337"/>
+          <p:cNvSpPr/>
+          <p:nvPr/>
+        </p:nvSpPr>
+        <p:spPr>
+          <a:xfrm>
+            <a:off x="749880" y="3703320"/>
+            <a:ext cx="2468520" cy="205920"/>
+          </a:xfrm>
+          <a:prstGeom prst="rect">
+            <a:avLst/>
+          </a:prstGeom>
+          <a:noFill/>
+          <a:ln w="0">
+            <a:noFill/>
+          </a:ln>
+        </p:spPr>
+        <p:style>
+          <a:lnRef idx="0"/>
+          <a:fillRef idx="0"/>
+          <a:effectRef idx="0"/>
+          <a:fontRef idx="minor"/>
+        </p:style>
+        <p:txBody>
+          <a:bodyPr lIns="0" rIns="0" tIns="0" bIns="0" anchor="t">
+            <a:spAutoFit/>
+          </a:bodyPr>
+          <a:p>
+            <a:pPr>
+              <a:lnSpc>
+                <a:spcPct val="100000"/>
+              </a:lnSpc>
+            </a:pPr>
+            <a:r>
+              <a:rPr b="1" lang="en-US" sz="1350" spc="-1" strike="noStrike">
+                <a:solidFill>
+                  <a:srgbClr val="16242f"/>
+                </a:solidFill>
+                <a:latin typeface="Calibri"/>
+              </a:rPr>
+              <a:t>ComodoHacker</a:t>
+            </a:r>
+            <a:endParaRPr b="0" lang="en-US" sz="1350" spc="-1" strike="noStrike">
+              <a:solidFill>
+                <a:srgbClr val="000000"/>
+              </a:solidFill>
+              <a:latin typeface="Arial"/>
+            </a:endParaRPr>
+          </a:p>
+        </p:txBody>
+      </p:sp>
+      <p:sp>
+        <p:nvSpPr>
+          <p:cNvPr id="319" name="TextBox 338"/>
+          <p:cNvSpPr/>
+          <p:nvPr/>
+        </p:nvSpPr>
+        <p:spPr>
+          <a:xfrm>
+            <a:off x="3291840" y="3712320"/>
+            <a:ext cx="941400" cy="175680"/>
+          </a:xfrm>
+          <a:prstGeom prst="rect">
+            <a:avLst/>
+          </a:prstGeom>
+          <a:noFill/>
+          <a:ln w="0">
+            <a:noFill/>
+          </a:ln>
+        </p:spPr>
+        <p:style>
+          <a:lnRef idx="0"/>
+          <a:fillRef idx="0"/>
+          <a:effectRef idx="0"/>
+          <a:fontRef idx="minor"/>
+        </p:style>
+        <p:txBody>
+          <a:bodyPr lIns="0" rIns="0" tIns="0" bIns="0" anchor="t">
+            <a:spAutoFit/>
+          </a:bodyPr>
+          <a:p>
+            <a:pPr algn="r">
+              <a:lnSpc>
+                <a:spcPct val="100000"/>
+              </a:lnSpc>
+            </a:pPr>
+            <a:r>
+              <a:rPr b="1" lang="en-US" sz="1150" spc="-1" strike="noStrike">
+                <a:solidFill>
+                  <a:srgbClr val="d24b4b"/>
+                </a:solidFill>
+                <a:latin typeface="Calibri"/>
+              </a:rPr>
+              <a:t>2011</a:t>
+            </a:r>
+            <a:endParaRPr b="0" lang="en-US" sz="1150" spc="-1" strike="noStrike">
+              <a:solidFill>
+                <a:srgbClr val="000000"/>
+              </a:solidFill>
+              <a:latin typeface="Arial"/>
+            </a:endParaRPr>
+          </a:p>
+        </p:txBody>
+      </p:sp>
+      <p:sp>
+        <p:nvSpPr>
+          <p:cNvPr id="320" name="TextBox 339"/>
+          <p:cNvSpPr/>
+          <p:nvPr/>
+        </p:nvSpPr>
+        <p:spPr>
+          <a:xfrm>
+            <a:off x="749880" y="3977640"/>
+            <a:ext cx="3520080" cy="145080"/>
+          </a:xfrm>
+          <a:prstGeom prst="rect">
+            <a:avLst/>
+          </a:prstGeom>
+          <a:noFill/>
+          <a:ln w="0">
+            <a:noFill/>
+          </a:ln>
+        </p:spPr>
+        <p:style>
+          <a:lnRef idx="0"/>
+          <a:fillRef idx="0"/>
+          <a:effectRef idx="0"/>
+          <a:fontRef idx="minor"/>
+        </p:style>
+        <p:txBody>
+          <a:bodyPr lIns="0" rIns="0" tIns="0" bIns="0" anchor="t">
+            <a:spAutoFit/>
+          </a:bodyPr>
+          <a:p>
+            <a:pPr>
+              <a:lnSpc>
+                <a:spcPct val="100000"/>
+              </a:lnSpc>
+            </a:pPr>
+            <a:r>
+              <a:rPr b="0" lang="en-US" sz="950" spc="-1" strike="noStrike">
+                <a:solidFill>
+                  <a:srgbClr val="5e7484"/>
+                </a:solidFill>
+                <a:latin typeface="Calibri"/>
+              </a:rPr>
+              <a:t>Stolen reseller login → 9 fake certs (Google, Skype…).</a:t>
+            </a:r>
+            <a:endParaRPr b="0" lang="en-US" sz="950" spc="-1" strike="noStrike">
+              <a:solidFill>
+                <a:srgbClr val="000000"/>
+              </a:solidFill>
+              <a:latin typeface="Arial"/>
+            </a:endParaRPr>
+          </a:p>
+        </p:txBody>
+      </p:sp>
+      <p:sp>
+        <p:nvSpPr>
+          <p:cNvPr id="321" name="TextBox 340"/>
+          <p:cNvSpPr/>
+          <p:nvPr/>
+        </p:nvSpPr>
+        <p:spPr>
+          <a:xfrm>
+            <a:off x="749880" y="4306680"/>
+            <a:ext cx="3520080" cy="145080"/>
+          </a:xfrm>
+          <a:prstGeom prst="rect">
+            <a:avLst/>
+          </a:prstGeom>
+          <a:noFill/>
+          <a:ln w="0">
+            <a:noFill/>
+          </a:ln>
+        </p:spPr>
+        <p:style>
+          <a:lnRef idx="0"/>
+          <a:fillRef idx="0"/>
+          <a:effectRef idx="0"/>
+          <a:fontRef idx="minor"/>
+        </p:style>
+        <p:txBody>
+          <a:bodyPr lIns="0" rIns="0" tIns="0" bIns="0" anchor="t">
+            <a:spAutoFit/>
+          </a:bodyPr>
+          <a:p>
+            <a:pPr>
+              <a:lnSpc>
+                <a:spcPct val="100000"/>
+              </a:lnSpc>
+            </a:pPr>
+            <a:r>
+              <a:rPr b="1" lang="en-US" sz="950" spc="-1" strike="noStrike">
+                <a:solidFill>
+                  <a:srgbClr val="0f9c92"/>
+                </a:solidFill>
+                <a:latin typeface="Calibri"/>
+              </a:rPr>
+              <a:t>→ </a:t>
+            </a:r>
+            <a:r>
+              <a:rPr b="1" lang="en-US" sz="950" spc="-1" strike="noStrike">
+                <a:solidFill>
+                  <a:srgbClr val="0f9c92"/>
+                </a:solidFill>
+                <a:latin typeface="Calibri"/>
+              </a:rPr>
+              <a:t>MFA &amp; reseller audits</a:t>
+            </a:r>
+            <a:endParaRPr b="0" lang="en-US" sz="950" spc="-1" strike="noStrike">
+              <a:solidFill>
+                <a:srgbClr val="000000"/>
+              </a:solidFill>
+              <a:latin typeface="Arial"/>
+            </a:endParaRPr>
+          </a:p>
+        </p:txBody>
+      </p:sp>
+      <p:sp>
+        <p:nvSpPr>
+          <p:cNvPr id="322" name="Rounded Rectangle 341"/>
+          <p:cNvSpPr/>
+          <p:nvPr/>
+        </p:nvSpPr>
+        <p:spPr>
+          <a:xfrm>
+            <a:off x="4709160" y="3611880"/>
+            <a:ext cx="3885840" cy="914040"/>
+          </a:xfrm>
+          <a:prstGeom prst="roundRect">
+            <a:avLst>
+              <a:gd name="adj" fmla="val 8000"/>
+            </a:avLst>
+          </a:prstGeom>
+          <a:solidFill>
+            <a:srgbClr val="ffffff"/>
+          </a:solidFill>
+          <a:ln>
+            <a:noFill/>
+          </a:ln>
+          <a:effectLst>
+            <a:outerShdw blurRad="88920" dir="5400000" dist="38160" rotWithShape="0">
+              <a:srgbClr val="0c2233">
+                <a:alpha val="12000"/>
+              </a:srgbClr>
+            </a:outerShdw>
+          </a:effectLst>
+        </p:spPr>
+        <p:style>
+          <a:lnRef idx="1">
+            <a:schemeClr val="accent1"/>
+          </a:lnRef>
+          <a:fillRef idx="3">
+            <a:schemeClr val="accent1"/>
+          </a:fillRef>
+          <a:effectRef idx="2">
+            <a:schemeClr val="accent1"/>
+          </a:effectRef>
+          <a:fontRef idx="minor"/>
+        </p:style>
+        <p:txBody>
+          <a:bodyPr lIns="90000" rIns="90000" tIns="45000" bIns="45000" anchor="ctr">
+            <a:noAutofit/>
+          </a:bodyPr>
+          <a:p>
+            <a:pPr algn="ctr">
+              <a:lnSpc>
+                <a:spcPct val="100000"/>
+              </a:lnSpc>
+            </a:pPr>
+            <a:endParaRPr b="0" lang="en-US" sz="1800" spc="-1" strike="noStrike">
+              <a:solidFill>
+                <a:schemeClr val="lt1"/>
+              </a:solidFill>
+              <a:latin typeface="Calibri"/>
+            </a:endParaRPr>
+          </a:p>
+        </p:txBody>
+      </p:sp>
+      <p:sp>
+        <p:nvSpPr>
+          <p:cNvPr id="323" name="TextBox 342"/>
+          <p:cNvSpPr/>
+          <p:nvPr/>
+        </p:nvSpPr>
+        <p:spPr>
+          <a:xfrm>
+            <a:off x="4910400" y="3703320"/>
+            <a:ext cx="2468520" cy="205920"/>
+          </a:xfrm>
+          <a:prstGeom prst="rect">
+            <a:avLst/>
+          </a:prstGeom>
+          <a:noFill/>
+          <a:ln w="0">
+            <a:noFill/>
+          </a:ln>
+        </p:spPr>
+        <p:style>
+          <a:lnRef idx="0"/>
+          <a:fillRef idx="0"/>
+          <a:effectRef idx="0"/>
+          <a:fontRef idx="minor"/>
+        </p:style>
+        <p:txBody>
+          <a:bodyPr lIns="0" rIns="0" tIns="0" bIns="0" anchor="t">
+            <a:spAutoFit/>
+          </a:bodyPr>
+          <a:p>
+            <a:pPr>
+              <a:lnSpc>
+                <a:spcPct val="100000"/>
+              </a:lnSpc>
+            </a:pPr>
+            <a:r>
+              <a:rPr b="1" lang="en-US" sz="1350" spc="-1" strike="noStrike">
+                <a:solidFill>
+                  <a:srgbClr val="16242f"/>
+                </a:solidFill>
+                <a:latin typeface="Calibri"/>
               </a:rPr>
               <a:t>Equifax</a:t>
             </a:r>
-            <a:endParaRPr b="0" lang="en-US" sz="1500" spc="-1" strike="noStrike">
-              <a:solidFill>
-                <a:srgbClr val="000000"/>
-              </a:solidFill>
-              <a:latin typeface="Arial"/>
-            </a:endParaRPr>
-          </a:p>
-        </p:txBody>
-      </p:sp>
-      <p:sp>
-        <p:nvSpPr>
-          <p:cNvPr id="312" name="Text 20"/>
-          <p:cNvSpPr/>
-          <p:nvPr/>
-        </p:nvSpPr>
-        <p:spPr>
-          <a:xfrm>
-            <a:off x="7498080" y="3108960"/>
-            <a:ext cx="914040" cy="319680"/>
+            <a:endParaRPr b="0" lang="en-US" sz="1350" spc="-1" strike="noStrike">
+              <a:solidFill>
+                <a:srgbClr val="000000"/>
+              </a:solidFill>
+              <a:latin typeface="Arial"/>
+            </a:endParaRPr>
+          </a:p>
+        </p:txBody>
+      </p:sp>
+      <p:sp>
+        <p:nvSpPr>
+          <p:cNvPr id="324" name="TextBox 343"/>
+          <p:cNvSpPr/>
+          <p:nvPr/>
+        </p:nvSpPr>
+        <p:spPr>
+          <a:xfrm>
+            <a:off x="7452360" y="3712320"/>
+            <a:ext cx="941400" cy="175680"/>
           </a:xfrm>
           <a:prstGeom prst="rect">
             <a:avLst/>
@@ -11081,47 +11466,43 @@
           <a:fontRef idx="minor"/>
         </p:style>
         <p:txBody>
-          <a:bodyPr lIns="0" rIns="0" tIns="0" bIns="0" anchor="ctr">
-            <a:noAutofit/>
-          </a:bodyPr>
-          <a:p>
-            <a:pPr algn="r" defTabSz="914400">
-              <a:lnSpc>
-                <a:spcPct val="100000"/>
-              </a:lnSpc>
-              <a:tabLst>
-                <a:tab algn="l" pos="0"/>
-              </a:tabLst>
-            </a:pPr>
-            <a:r>
-              <a:rPr b="1" lang="en-US" sz="1200" spc="-1" strike="noStrike">
+          <a:bodyPr lIns="0" rIns="0" tIns="0" bIns="0" anchor="t">
+            <a:spAutoFit/>
+          </a:bodyPr>
+          <a:p>
+            <a:pPr algn="r">
+              <a:lnSpc>
+                <a:spcPct val="100000"/>
+              </a:lnSpc>
+            </a:pPr>
+            <a:r>
+              <a:rPr b="1" lang="en-US" sz="1150" spc="-1" strike="noStrike">
                 <a:solidFill>
                   <a:srgbClr val="d24b4b"/>
                 </a:solidFill>
                 <a:latin typeface="Calibri"/>
-                <a:ea typeface="Calibri"/>
               </a:rPr>
               <a:t>2017</a:t>
             </a:r>
-            <a:endParaRPr b="0" lang="en-US" sz="1200" spc="-1" strike="noStrike">
-              <a:solidFill>
-                <a:srgbClr val="000000"/>
-              </a:solidFill>
-              <a:latin typeface="Arial"/>
-            </a:endParaRPr>
-          </a:p>
-        </p:txBody>
-      </p:sp>
-      <p:sp>
-        <p:nvSpPr>
-          <p:cNvPr id="313" name="Text 21"/>
-          <p:cNvSpPr/>
-          <p:nvPr/>
-        </p:nvSpPr>
-        <p:spPr>
-          <a:xfrm>
-            <a:off x="4892040" y="3447360"/>
-            <a:ext cx="3520080" cy="594000"/>
+            <a:endParaRPr b="0" lang="en-US" sz="1150" spc="-1" strike="noStrike">
+              <a:solidFill>
+                <a:srgbClr val="000000"/>
+              </a:solidFill>
+              <a:latin typeface="Arial"/>
+            </a:endParaRPr>
+          </a:p>
+        </p:txBody>
+      </p:sp>
+      <p:sp>
+        <p:nvSpPr>
+          <p:cNvPr id="325" name="TextBox 344"/>
+          <p:cNvSpPr/>
+          <p:nvPr/>
+        </p:nvSpPr>
+        <p:spPr>
+          <a:xfrm>
+            <a:off x="4910400" y="3977640"/>
+            <a:ext cx="3520080" cy="145080"/>
           </a:xfrm>
           <a:prstGeom prst="rect">
             <a:avLst/>
@@ -11138,47 +11519,43 @@
           <a:fontRef idx="minor"/>
         </p:style>
         <p:txBody>
-          <a:bodyPr lIns="0" rIns="0" tIns="0" bIns="0" anchor="ctr">
-            <a:noAutofit/>
-          </a:bodyPr>
-          <a:p>
-            <a:pPr defTabSz="914400">
-              <a:lnSpc>
-                <a:spcPct val="100000"/>
-              </a:lnSpc>
-              <a:tabLst>
-                <a:tab algn="l" pos="0"/>
-              </a:tabLst>
-            </a:pPr>
-            <a:r>
-              <a:rPr b="0" lang="en-US" sz="1050" spc="-1" strike="noStrike">
+          <a:bodyPr lIns="0" rIns="0" tIns="0" bIns="0" anchor="t">
+            <a:spAutoFit/>
+          </a:bodyPr>
+          <a:p>
+            <a:pPr>
+              <a:lnSpc>
+                <a:spcPct val="100000"/>
+              </a:lnSpc>
+            </a:pPr>
+            <a:r>
+              <a:rPr b="0" lang="en-US" sz="950" spc="-1" strike="noStrike">
                 <a:solidFill>
                   <a:srgbClr val="5e7484"/>
                 </a:solidFill>
                 <a:latin typeface="Calibri"/>
-                <a:ea typeface="Calibri"/>
-              </a:rPr>
-              <a:t>One internal cert expired for 10 months → 145M records exfiltrated.</a:t>
-            </a:r>
-            <a:endParaRPr b="0" lang="en-US" sz="1050" spc="-1" strike="noStrike">
-              <a:solidFill>
-                <a:srgbClr val="000000"/>
-              </a:solidFill>
-              <a:latin typeface="Arial"/>
-            </a:endParaRPr>
-          </a:p>
-        </p:txBody>
-      </p:sp>
-      <p:sp>
-        <p:nvSpPr>
-          <p:cNvPr id="314" name="Text 22"/>
-          <p:cNvSpPr/>
-          <p:nvPr/>
-        </p:nvSpPr>
-        <p:spPr>
-          <a:xfrm>
-            <a:off x="4892040" y="4050720"/>
-            <a:ext cx="3520080" cy="273960"/>
+              </a:rPr>
+              <a:t>One internal cert expired 10 months → 147M records stolen.</a:t>
+            </a:r>
+            <a:endParaRPr b="0" lang="en-US" sz="950" spc="-1" strike="noStrike">
+              <a:solidFill>
+                <a:srgbClr val="000000"/>
+              </a:solidFill>
+              <a:latin typeface="Arial"/>
+            </a:endParaRPr>
+          </a:p>
+        </p:txBody>
+      </p:sp>
+      <p:sp>
+        <p:nvSpPr>
+          <p:cNvPr id="326" name="TextBox 345"/>
+          <p:cNvSpPr/>
+          <p:nvPr/>
+        </p:nvSpPr>
+        <p:spPr>
+          <a:xfrm>
+            <a:off x="4910400" y="4306680"/>
+            <a:ext cx="3520080" cy="145080"/>
           </a:xfrm>
           <a:prstGeom prst="rect">
             <a:avLst/>
@@ -11195,153 +11572,34 @@
           <a:fontRef idx="minor"/>
         </p:style>
         <p:txBody>
-          <a:bodyPr lIns="0" rIns="0" tIns="0" bIns="0" anchor="ctr">
-            <a:noAutofit/>
-          </a:bodyPr>
-          <a:p>
-            <a:pPr defTabSz="914400">
-              <a:lnSpc>
-                <a:spcPct val="100000"/>
-              </a:lnSpc>
-              <a:tabLst>
-                <a:tab algn="l" pos="0"/>
-              </a:tabLst>
-            </a:pPr>
-            <a:r>
-              <a:rPr b="1" lang="en-US" sz="1050" spc="-1" strike="noStrike">
+          <a:bodyPr lIns="0" rIns="0" tIns="0" bIns="0" anchor="t">
+            <a:spAutoFit/>
+          </a:bodyPr>
+          <a:p>
+            <a:pPr>
+              <a:lnSpc>
+                <a:spcPct val="100000"/>
+              </a:lnSpc>
+            </a:pPr>
+            <a:r>
+              <a:rPr b="1" lang="en-US" sz="950" spc="-1" strike="noStrike">
                 <a:solidFill>
                   <a:srgbClr val="0f9c92"/>
                 </a:solidFill>
                 <a:latin typeface="Calibri"/>
-                <a:ea typeface="Calibri"/>
               </a:rPr>
               <a:t>→ </a:t>
             </a:r>
             <a:r>
-              <a:rPr b="1" lang="en-US" sz="1050" spc="-1" strike="noStrike">
+              <a:rPr b="1" lang="en-US" sz="950" spc="-1" strike="noStrike">
                 <a:solidFill>
                   <a:srgbClr val="0f9c92"/>
                 </a:solidFill>
                 <a:latin typeface="Calibri"/>
-                <a:ea typeface="Calibri"/>
               </a:rPr>
               <a:t>automate renewal</a:t>
             </a:r>
-            <a:endParaRPr b="0" lang="en-US" sz="1050" spc="-1" strike="noStrike">
-              <a:solidFill>
-                <a:srgbClr val="000000"/>
-              </a:solidFill>
-              <a:latin typeface="Arial"/>
-            </a:endParaRPr>
-          </a:p>
-        </p:txBody>
-      </p:sp>
-      <p:sp>
-        <p:nvSpPr>
-          <p:cNvPr id="315" name="Text 23"/>
-          <p:cNvSpPr/>
-          <p:nvPr/>
-        </p:nvSpPr>
-        <p:spPr>
-          <a:xfrm>
-            <a:off x="457200" y="4855320"/>
-            <a:ext cx="5486040" cy="228240"/>
-          </a:xfrm>
-          <a:prstGeom prst="rect">
-            <a:avLst/>
-          </a:prstGeom>
-          <a:noFill/>
-          <a:ln w="0">
-            <a:noFill/>
-          </a:ln>
-        </p:spPr>
-        <p:style>
-          <a:lnRef idx="0"/>
-          <a:fillRef idx="0"/>
-          <a:effectRef idx="0"/>
-          <a:fontRef idx="minor"/>
-        </p:style>
-        <p:txBody>
-          <a:bodyPr lIns="0" rIns="0" tIns="0" bIns="0" anchor="ctr">
-            <a:noAutofit/>
-          </a:bodyPr>
-          <a:p>
-            <a:pPr defTabSz="914400">
-              <a:lnSpc>
-                <a:spcPct val="100000"/>
-              </a:lnSpc>
-              <a:tabLst>
-                <a:tab algn="l" pos="0"/>
-              </a:tabLst>
-            </a:pPr>
-            <a:r>
-              <a:rPr b="0" lang="en-US" sz="800" spc="-1" strike="noStrike">
-                <a:solidFill>
-                  <a:srgbClr val="5e7484"/>
-                </a:solidFill>
-                <a:latin typeface="Calibri"/>
-                <a:ea typeface="Calibri"/>
-              </a:rPr>
-              <a:t>Certificate Authority Chain &amp; Mutual TLS</a:t>
-            </a:r>
-            <a:endParaRPr b="0" lang="en-US" sz="800" spc="-1" strike="noStrike">
-              <a:solidFill>
-                <a:srgbClr val="000000"/>
-              </a:solidFill>
-              <a:latin typeface="Arial"/>
-            </a:endParaRPr>
-          </a:p>
-        </p:txBody>
-      </p:sp>
-      <p:sp>
-        <p:nvSpPr>
-          <p:cNvPr id="316" name="Text 24"/>
-          <p:cNvSpPr/>
-          <p:nvPr/>
-        </p:nvSpPr>
-        <p:spPr>
-          <a:xfrm>
-            <a:off x="8229600" y="4855320"/>
-            <a:ext cx="456840" cy="228240"/>
-          </a:xfrm>
-          <a:prstGeom prst="rect">
-            <a:avLst/>
-          </a:prstGeom>
-          <a:noFill/>
-          <a:ln w="0">
-            <a:noFill/>
-          </a:ln>
-        </p:spPr>
-        <p:style>
-          <a:lnRef idx="0"/>
-          <a:fillRef idx="0"/>
-          <a:effectRef idx="0"/>
-          <a:fontRef idx="minor"/>
-        </p:style>
-        <p:txBody>
-          <a:bodyPr lIns="0" rIns="0" tIns="0" bIns="0" anchor="ctr">
-            <a:noAutofit/>
-          </a:bodyPr>
-          <a:p>
-            <a:pPr algn="r" defTabSz="914400">
-              <a:lnSpc>
-                <a:spcPct val="100000"/>
-              </a:lnSpc>
-              <a:tabLst>
-                <a:tab algn="l" pos="0"/>
-              </a:tabLst>
-            </a:pPr>
-            <a:r>
-              <a:rPr b="0" lang="en-US" sz="800" spc="-1" strike="noStrike">
-                <a:solidFill>
-                  <a:srgbClr val="5e7484"/>
-                </a:solidFill>
-                <a:latin typeface="Calibri"/>
-                <a:ea typeface="Calibri"/>
-              </a:rPr>
-              <a:t>14</a:t>
-            </a:r>
-            <a:endParaRPr b="0" lang="en-US" sz="800" spc="-1" strike="noStrike">
+            <a:endParaRPr b="0" lang="en-US" sz="950" spc="-1" strike="noStrike">
               <a:solidFill>
                 <a:srgbClr val="000000"/>
               </a:solidFill>
@@ -11389,14 +11647,14 @@
       </p:grpSpPr>
       <p:sp>
         <p:nvSpPr>
-          <p:cNvPr id="317" name="Shape 0"/>
+          <p:cNvPr id="327" name="Shape 0"/>
           <p:cNvSpPr/>
           <p:nvPr/>
         </p:nvSpPr>
         <p:spPr>
           <a:xfrm>
             <a:off x="457200" y="384120"/>
-            <a:ext cx="566640" cy="566640"/>
+            <a:ext cx="565920" cy="565920"/>
           </a:xfrm>
           <a:prstGeom prst="ellipse">
             <a:avLst/>
@@ -11419,6 +11677,11 @@
             <a:noAutofit/>
           </a:bodyPr>
           <a:p>
+            <a:pPr>
+              <a:lnSpc>
+                <a:spcPct val="100000"/>
+              </a:lnSpc>
+            </a:pPr>
             <a:endParaRPr b="0" lang="en-US" sz="1800" spc="-1" strike="noStrike">
               <a:solidFill>
                 <a:srgbClr val="ffffff"/>
@@ -11430,7 +11693,7 @@
       </p:sp>
       <p:pic>
         <p:nvPicPr>
-          <p:cNvPr id="318" name="Image 0" descr="preencoded.png"/>
+          <p:cNvPr id="328" name="Image 0" descr="preencoded.png"/>
           <p:cNvPicPr/>
           <p:nvPr/>
         </p:nvPicPr>
@@ -11441,7 +11704,7 @@
         <p:spPr>
           <a:xfrm>
             <a:off x="589680" y="516600"/>
-            <a:ext cx="301320" cy="301320"/>
+            <a:ext cx="300600" cy="300600"/>
           </a:xfrm>
           <a:prstGeom prst="rect">
             <a:avLst/>
@@ -11453,14 +11716,14 @@
       </p:pic>
       <p:sp>
         <p:nvSpPr>
-          <p:cNvPr id="319" name="Text 1"/>
+          <p:cNvPr id="329" name="Text 1"/>
           <p:cNvSpPr/>
           <p:nvPr/>
         </p:nvSpPr>
         <p:spPr>
           <a:xfrm>
             <a:off x="1188720" y="402480"/>
-            <a:ext cx="7314840" cy="219240"/>
+            <a:ext cx="7314120" cy="218520"/>
           </a:xfrm>
           <a:prstGeom prst="rect">
             <a:avLst/>
@@ -11490,7 +11753,7 @@
               </a:tabLst>
             </a:pPr>
             <a:r>
-              <a:rPr b="1" lang="en-US" sz="1100" spc="199" strike="noStrike">
+              <a:rPr b="1" lang="en-US" sz="1100" spc="194" strike="noStrike">
                 <a:solidFill>
                   <a:srgbClr val="0f9c92"/>
                 </a:solidFill>
@@ -11510,14 +11773,14 @@
       </p:sp>
       <p:sp>
         <p:nvSpPr>
-          <p:cNvPr id="320" name="Text 2"/>
+          <p:cNvPr id="330" name="Text 2"/>
           <p:cNvSpPr/>
           <p:nvPr/>
         </p:nvSpPr>
         <p:spPr>
           <a:xfrm>
             <a:off x="1170360" y="603360"/>
-            <a:ext cx="7497720" cy="456840"/>
+            <a:ext cx="7497000" cy="456120"/>
           </a:xfrm>
           <a:prstGeom prst="rect">
             <a:avLst/>
@@ -11567,14 +11830,14 @@
       </p:sp>
       <p:sp>
         <p:nvSpPr>
-          <p:cNvPr id="321" name="Shape 3"/>
+          <p:cNvPr id="331" name="Shape 3"/>
           <p:cNvSpPr/>
           <p:nvPr/>
         </p:nvSpPr>
         <p:spPr>
           <a:xfrm>
             <a:off x="548640" y="1463040"/>
-            <a:ext cx="3931560" cy="895680"/>
+            <a:ext cx="3930840" cy="894960"/>
           </a:xfrm>
           <a:prstGeom prst="roundRect">
             <a:avLst>
@@ -11606,6 +11869,11 @@
             <a:noAutofit/>
           </a:bodyPr>
           <a:p>
+            <a:pPr>
+              <a:lnSpc>
+                <a:spcPct val="100000"/>
+              </a:lnSpc>
+            </a:pPr>
             <a:endParaRPr b="0" lang="en-US" sz="1800" spc="-1" strike="noStrike">
               <a:solidFill>
                 <a:srgbClr val="000000"/>
@@ -11617,14 +11885,14 @@
       </p:sp>
       <p:sp>
         <p:nvSpPr>
-          <p:cNvPr id="322" name="Shape 4"/>
+          <p:cNvPr id="332" name="Shape 4"/>
           <p:cNvSpPr/>
           <p:nvPr/>
         </p:nvSpPr>
         <p:spPr>
           <a:xfrm>
             <a:off x="731520" y="1682640"/>
-            <a:ext cx="456840" cy="456840"/>
+            <a:ext cx="456120" cy="456120"/>
           </a:xfrm>
           <a:prstGeom prst="ellipse">
             <a:avLst/>
@@ -11647,6 +11915,11 @@
             <a:noAutofit/>
           </a:bodyPr>
           <a:p>
+            <a:pPr>
+              <a:lnSpc>
+                <a:spcPct val="100000"/>
+              </a:lnSpc>
+            </a:pPr>
             <a:endParaRPr b="0" lang="en-US" sz="1800" spc="-1" strike="noStrike">
               <a:solidFill>
                 <a:srgbClr val="000000"/>
@@ -11658,7 +11931,7 @@
       </p:sp>
       <p:pic>
         <p:nvPicPr>
-          <p:cNvPr id="323" name="Image 1" descr="preencoded.png"/>
+          <p:cNvPr id="333" name="Image 1" descr="preencoded.png"/>
           <p:cNvPicPr/>
           <p:nvPr/>
         </p:nvPicPr>
@@ -11669,7 +11942,7 @@
         <p:spPr>
           <a:xfrm>
             <a:off x="850320" y="1801440"/>
-            <a:ext cx="219240" cy="219240"/>
+            <a:ext cx="218520" cy="218520"/>
           </a:xfrm>
           <a:prstGeom prst="rect">
             <a:avLst/>
@@ -11681,14 +11954,14 @@
       </p:pic>
       <p:sp>
         <p:nvSpPr>
-          <p:cNvPr id="324" name="Text 5"/>
+          <p:cNvPr id="334" name="Text 5"/>
           <p:cNvSpPr/>
           <p:nvPr/>
         </p:nvSpPr>
         <p:spPr>
           <a:xfrm>
             <a:off x="1325880" y="1463040"/>
-            <a:ext cx="3017160" cy="895680"/>
+            <a:ext cx="3016440" cy="894960"/>
           </a:xfrm>
           <a:prstGeom prst="rect">
             <a:avLst/>
@@ -11764,14 +12037,14 @@
       </p:sp>
       <p:sp>
         <p:nvSpPr>
-          <p:cNvPr id="325" name="Shape 6"/>
+          <p:cNvPr id="335" name="Shape 6"/>
           <p:cNvSpPr/>
           <p:nvPr/>
         </p:nvSpPr>
         <p:spPr>
           <a:xfrm>
             <a:off x="4663440" y="1463040"/>
-            <a:ext cx="3931560" cy="895680"/>
+            <a:ext cx="3930840" cy="894960"/>
           </a:xfrm>
           <a:prstGeom prst="roundRect">
             <a:avLst>
@@ -11803,6 +12076,11 @@
             <a:noAutofit/>
           </a:bodyPr>
           <a:p>
+            <a:pPr>
+              <a:lnSpc>
+                <a:spcPct val="100000"/>
+              </a:lnSpc>
+            </a:pPr>
             <a:endParaRPr b="0" lang="en-US" sz="1800" spc="-1" strike="noStrike">
               <a:solidFill>
                 <a:srgbClr val="000000"/>
@@ -11814,14 +12092,14 @@
       </p:sp>
       <p:sp>
         <p:nvSpPr>
-          <p:cNvPr id="326" name="Shape 7"/>
+          <p:cNvPr id="336" name="Shape 7"/>
           <p:cNvSpPr/>
           <p:nvPr/>
         </p:nvSpPr>
         <p:spPr>
           <a:xfrm>
             <a:off x="4846320" y="1682640"/>
-            <a:ext cx="456840" cy="456840"/>
+            <a:ext cx="456120" cy="456120"/>
           </a:xfrm>
           <a:prstGeom prst="ellipse">
             <a:avLst/>
@@ -11844,6 +12122,11 @@
             <a:noAutofit/>
           </a:bodyPr>
           <a:p>
+            <a:pPr>
+              <a:lnSpc>
+                <a:spcPct val="100000"/>
+              </a:lnSpc>
+            </a:pPr>
             <a:endParaRPr b="0" lang="en-US" sz="1800" spc="-1" strike="noStrike">
               <a:solidFill>
                 <a:srgbClr val="000000"/>
@@ -11855,7 +12138,7 @@
       </p:sp>
       <p:pic>
         <p:nvPicPr>
-          <p:cNvPr id="327" name="Image 2" descr="preencoded.png"/>
+          <p:cNvPr id="337" name="Image 2" descr="preencoded.png"/>
           <p:cNvPicPr/>
           <p:nvPr/>
         </p:nvPicPr>
@@ -11866,7 +12149,7 @@
         <p:spPr>
           <a:xfrm>
             <a:off x="4965120" y="1801440"/>
-            <a:ext cx="219240" cy="219240"/>
+            <a:ext cx="218520" cy="218520"/>
           </a:xfrm>
           <a:prstGeom prst="rect">
             <a:avLst/>
@@ -11878,14 +12161,14 @@
       </p:pic>
       <p:sp>
         <p:nvSpPr>
-          <p:cNvPr id="328" name="Text 8"/>
+          <p:cNvPr id="338" name="Text 8"/>
           <p:cNvSpPr/>
           <p:nvPr/>
         </p:nvSpPr>
         <p:spPr>
           <a:xfrm>
             <a:off x="5440680" y="1463040"/>
-            <a:ext cx="3017160" cy="895680"/>
+            <a:ext cx="3016440" cy="894960"/>
           </a:xfrm>
           <a:prstGeom prst="rect">
             <a:avLst/>
@@ -11961,14 +12244,14 @@
       </p:sp>
       <p:sp>
         <p:nvSpPr>
-          <p:cNvPr id="329" name="Shape 9"/>
+          <p:cNvPr id="339" name="Shape 9"/>
           <p:cNvSpPr/>
           <p:nvPr/>
         </p:nvSpPr>
         <p:spPr>
           <a:xfrm>
             <a:off x="548640" y="2496240"/>
-            <a:ext cx="3931560" cy="895680"/>
+            <a:ext cx="3930840" cy="894960"/>
           </a:xfrm>
           <a:prstGeom prst="roundRect">
             <a:avLst>
@@ -12000,6 +12283,11 @@
             <a:noAutofit/>
           </a:bodyPr>
           <a:p>
+            <a:pPr>
+              <a:lnSpc>
+                <a:spcPct val="100000"/>
+              </a:lnSpc>
+            </a:pPr>
             <a:endParaRPr b="0" lang="en-US" sz="1800" spc="-1" strike="noStrike">
               <a:solidFill>
                 <a:srgbClr val="000000"/>
@@ -12011,14 +12299,14 @@
       </p:sp>
       <p:sp>
         <p:nvSpPr>
-          <p:cNvPr id="330" name="Shape 10"/>
+          <p:cNvPr id="340" name="Shape 10"/>
           <p:cNvSpPr/>
           <p:nvPr/>
         </p:nvSpPr>
         <p:spPr>
           <a:xfrm>
             <a:off x="731520" y="2715840"/>
-            <a:ext cx="456840" cy="456840"/>
+            <a:ext cx="456120" cy="456120"/>
           </a:xfrm>
           <a:prstGeom prst="ellipse">
             <a:avLst/>
@@ -12041,6 +12329,11 @@
             <a:noAutofit/>
           </a:bodyPr>
           <a:p>
+            <a:pPr>
+              <a:lnSpc>
+                <a:spcPct val="100000"/>
+              </a:lnSpc>
+            </a:pPr>
             <a:endParaRPr b="0" lang="en-US" sz="1800" spc="-1" strike="noStrike">
               <a:solidFill>
                 <a:srgbClr val="000000"/>
@@ -12052,7 +12345,7 @@
       </p:sp>
       <p:pic>
         <p:nvPicPr>
-          <p:cNvPr id="331" name="Image 3" descr="preencoded.png"/>
+          <p:cNvPr id="341" name="Image 3" descr="preencoded.png"/>
           <p:cNvPicPr/>
           <p:nvPr/>
         </p:nvPicPr>
@@ -12063,7 +12356,7 @@
         <p:spPr>
           <a:xfrm>
             <a:off x="850320" y="2834640"/>
-            <a:ext cx="219240" cy="219240"/>
+            <a:ext cx="218520" cy="218520"/>
           </a:xfrm>
           <a:prstGeom prst="rect">
             <a:avLst/>
@@ -12075,14 +12368,14 @@
       </p:pic>
       <p:sp>
         <p:nvSpPr>
-          <p:cNvPr id="332" name="Text 11"/>
+          <p:cNvPr id="342" name="Text 11"/>
           <p:cNvSpPr/>
           <p:nvPr/>
         </p:nvSpPr>
         <p:spPr>
           <a:xfrm>
             <a:off x="1325880" y="2496240"/>
-            <a:ext cx="3017160" cy="895680"/>
+            <a:ext cx="3016440" cy="894960"/>
           </a:xfrm>
           <a:prstGeom prst="rect">
             <a:avLst/>
@@ -12158,14 +12451,14 @@
       </p:sp>
       <p:sp>
         <p:nvSpPr>
-          <p:cNvPr id="333" name="Shape 12"/>
+          <p:cNvPr id="343" name="Shape 12"/>
           <p:cNvSpPr/>
           <p:nvPr/>
         </p:nvSpPr>
         <p:spPr>
           <a:xfrm>
             <a:off x="4663440" y="2496240"/>
-            <a:ext cx="3931560" cy="895680"/>
+            <a:ext cx="3930840" cy="894960"/>
           </a:xfrm>
           <a:prstGeom prst="roundRect">
             <a:avLst>
@@ -12197,6 +12490,11 @@
             <a:noAutofit/>
           </a:bodyPr>
           <a:p>
+            <a:pPr>
+              <a:lnSpc>
+                <a:spcPct val="100000"/>
+              </a:lnSpc>
+            </a:pPr>
             <a:endParaRPr b="0" lang="en-US" sz="1800" spc="-1" strike="noStrike">
               <a:solidFill>
                 <a:srgbClr val="000000"/>
@@ -12208,14 +12506,14 @@
       </p:sp>
       <p:sp>
         <p:nvSpPr>
-          <p:cNvPr id="334" name="Shape 13"/>
+          <p:cNvPr id="344" name="Shape 13"/>
           <p:cNvSpPr/>
           <p:nvPr/>
         </p:nvSpPr>
         <p:spPr>
           <a:xfrm>
             <a:off x="4846320" y="2715840"/>
-            <a:ext cx="456840" cy="456840"/>
+            <a:ext cx="456120" cy="456120"/>
           </a:xfrm>
           <a:prstGeom prst="ellipse">
             <a:avLst/>
@@ -12238,6 +12536,11 @@
             <a:noAutofit/>
           </a:bodyPr>
           <a:p>
+            <a:pPr>
+              <a:lnSpc>
+                <a:spcPct val="100000"/>
+              </a:lnSpc>
+            </a:pPr>
             <a:endParaRPr b="0" lang="en-US" sz="1800" spc="-1" strike="noStrike">
               <a:solidFill>
                 <a:srgbClr val="000000"/>
@@ -12249,7 +12552,7 @@
       </p:sp>
       <p:pic>
         <p:nvPicPr>
-          <p:cNvPr id="335" name="Image 4" descr="preencoded.png"/>
+          <p:cNvPr id="345" name="Image 4" descr="preencoded.png"/>
           <p:cNvPicPr/>
           <p:nvPr/>
         </p:nvPicPr>
@@ -12260,7 +12563,7 @@
         <p:spPr>
           <a:xfrm>
             <a:off x="4965120" y="2834640"/>
-            <a:ext cx="219240" cy="219240"/>
+            <a:ext cx="218520" cy="218520"/>
           </a:xfrm>
           <a:prstGeom prst="rect">
             <a:avLst/>
@@ -12272,14 +12575,14 @@
       </p:pic>
       <p:sp>
         <p:nvSpPr>
-          <p:cNvPr id="336" name="Text 14"/>
+          <p:cNvPr id="346" name="Text 14"/>
           <p:cNvSpPr/>
           <p:nvPr/>
         </p:nvSpPr>
         <p:spPr>
           <a:xfrm>
             <a:off x="5440680" y="2496240"/>
-            <a:ext cx="3017160" cy="895680"/>
+            <a:ext cx="3016440" cy="894960"/>
           </a:xfrm>
           <a:prstGeom prst="rect">
             <a:avLst/>
@@ -12355,14 +12658,14 @@
       </p:sp>
       <p:sp>
         <p:nvSpPr>
-          <p:cNvPr id="337" name="Shape 15"/>
+          <p:cNvPr id="347" name="Shape 15"/>
           <p:cNvSpPr/>
           <p:nvPr/>
         </p:nvSpPr>
         <p:spPr>
           <a:xfrm>
             <a:off x="548640" y="3529440"/>
-            <a:ext cx="3931560" cy="895680"/>
+            <a:ext cx="3930840" cy="894960"/>
           </a:xfrm>
           <a:prstGeom prst="roundRect">
             <a:avLst>
@@ -12394,6 +12697,11 @@
             <a:noAutofit/>
           </a:bodyPr>
           <a:p>
+            <a:pPr>
+              <a:lnSpc>
+                <a:spcPct val="100000"/>
+              </a:lnSpc>
+            </a:pPr>
             <a:endParaRPr b="0" lang="en-US" sz="1800" spc="-1" strike="noStrike">
               <a:solidFill>
                 <a:srgbClr val="000000"/>
@@ -12405,14 +12713,14 @@
       </p:sp>
       <p:sp>
         <p:nvSpPr>
-          <p:cNvPr id="338" name="Shape 16"/>
+          <p:cNvPr id="348" name="Shape 16"/>
           <p:cNvSpPr/>
           <p:nvPr/>
         </p:nvSpPr>
         <p:spPr>
           <a:xfrm>
             <a:off x="731520" y="3749040"/>
-            <a:ext cx="456840" cy="456840"/>
+            <a:ext cx="456120" cy="456120"/>
           </a:xfrm>
           <a:prstGeom prst="ellipse">
             <a:avLst/>
@@ -12435,6 +12743,11 @@
             <a:noAutofit/>
           </a:bodyPr>
           <a:p>
+            <a:pPr>
+              <a:lnSpc>
+                <a:spcPct val="100000"/>
+              </a:lnSpc>
+            </a:pPr>
             <a:endParaRPr b="0" lang="en-US" sz="1800" spc="-1" strike="noStrike">
               <a:solidFill>
                 <a:srgbClr val="000000"/>
@@ -12446,7 +12759,7 @@
       </p:sp>
       <p:pic>
         <p:nvPicPr>
-          <p:cNvPr id="339" name="Image 5" descr="preencoded.png"/>
+          <p:cNvPr id="349" name="Image 5" descr="preencoded.png"/>
           <p:cNvPicPr/>
           <p:nvPr/>
         </p:nvPicPr>
@@ -12457,7 +12770,7 @@
         <p:spPr>
           <a:xfrm>
             <a:off x="850320" y="3867840"/>
-            <a:ext cx="219240" cy="219240"/>
+            <a:ext cx="218520" cy="218520"/>
           </a:xfrm>
           <a:prstGeom prst="rect">
             <a:avLst/>
@@ -12469,14 +12782,14 @@
       </p:pic>
       <p:sp>
         <p:nvSpPr>
-          <p:cNvPr id="340" name="Text 17"/>
+          <p:cNvPr id="350" name="Text 17"/>
           <p:cNvSpPr/>
           <p:nvPr/>
         </p:nvSpPr>
         <p:spPr>
           <a:xfrm>
             <a:off x="1325880" y="3529440"/>
-            <a:ext cx="3017160" cy="895680"/>
+            <a:ext cx="3016440" cy="894960"/>
           </a:xfrm>
           <a:prstGeom prst="rect">
             <a:avLst/>
@@ -12552,14 +12865,14 @@
       </p:sp>
       <p:sp>
         <p:nvSpPr>
-          <p:cNvPr id="341" name="Shape 18"/>
+          <p:cNvPr id="351" name="Shape 18"/>
           <p:cNvSpPr/>
           <p:nvPr/>
         </p:nvSpPr>
         <p:spPr>
           <a:xfrm>
             <a:off x="4663440" y="3529440"/>
-            <a:ext cx="3931560" cy="895680"/>
+            <a:ext cx="3930840" cy="894960"/>
           </a:xfrm>
           <a:prstGeom prst="roundRect">
             <a:avLst>
@@ -12591,6 +12904,11 @@
             <a:noAutofit/>
           </a:bodyPr>
           <a:p>
+            <a:pPr>
+              <a:lnSpc>
+                <a:spcPct val="100000"/>
+              </a:lnSpc>
+            </a:pPr>
             <a:endParaRPr b="0" lang="en-US" sz="1800" spc="-1" strike="noStrike">
               <a:solidFill>
                 <a:srgbClr val="000000"/>
@@ -12602,14 +12920,14 @@
       </p:sp>
       <p:sp>
         <p:nvSpPr>
-          <p:cNvPr id="342" name="Shape 19"/>
+          <p:cNvPr id="352" name="Shape 19"/>
           <p:cNvSpPr/>
           <p:nvPr/>
         </p:nvSpPr>
         <p:spPr>
           <a:xfrm>
             <a:off x="4846320" y="3749040"/>
-            <a:ext cx="456840" cy="456840"/>
+            <a:ext cx="456120" cy="456120"/>
           </a:xfrm>
           <a:prstGeom prst="ellipse">
             <a:avLst/>
@@ -12632,6 +12950,11 @@
             <a:noAutofit/>
           </a:bodyPr>
           <a:p>
+            <a:pPr>
+              <a:lnSpc>
+                <a:spcPct val="100000"/>
+              </a:lnSpc>
+            </a:pPr>
             <a:endParaRPr b="0" lang="en-US" sz="1800" spc="-1" strike="noStrike">
               <a:solidFill>
                 <a:srgbClr val="000000"/>
@@ -12643,7 +12966,7 @@
       </p:sp>
       <p:pic>
         <p:nvPicPr>
-          <p:cNvPr id="343" name="Image 6" descr="preencoded.png"/>
+          <p:cNvPr id="353" name="Image 6" descr="preencoded.png"/>
           <p:cNvPicPr/>
           <p:nvPr/>
         </p:nvPicPr>
@@ -12654,7 +12977,7 @@
         <p:spPr>
           <a:xfrm>
             <a:off x="4965120" y="3867840"/>
-            <a:ext cx="219240" cy="219240"/>
+            <a:ext cx="218520" cy="218520"/>
           </a:xfrm>
           <a:prstGeom prst="rect">
             <a:avLst/>
@@ -12666,14 +12989,14 @@
       </p:pic>
       <p:sp>
         <p:nvSpPr>
-          <p:cNvPr id="344" name="Text 20"/>
+          <p:cNvPr id="354" name="Text 20"/>
           <p:cNvSpPr/>
           <p:nvPr/>
         </p:nvSpPr>
         <p:spPr>
           <a:xfrm>
             <a:off x="5440680" y="3529440"/>
-            <a:ext cx="3017160" cy="895680"/>
+            <a:ext cx="3016440" cy="894960"/>
           </a:xfrm>
           <a:prstGeom prst="rect">
             <a:avLst/>
@@ -12749,14 +13072,14 @@
       </p:sp>
       <p:sp>
         <p:nvSpPr>
-          <p:cNvPr id="345" name="Text 21"/>
+          <p:cNvPr id="355" name="Text 21"/>
           <p:cNvSpPr/>
           <p:nvPr/>
         </p:nvSpPr>
         <p:spPr>
           <a:xfrm>
             <a:off x="457200" y="4855320"/>
-            <a:ext cx="5486040" cy="228240"/>
+            <a:ext cx="5485320" cy="227520"/>
           </a:xfrm>
           <a:prstGeom prst="rect">
             <a:avLst/>
@@ -12806,14 +13129,14 @@
       </p:sp>
       <p:sp>
         <p:nvSpPr>
-          <p:cNvPr id="346" name="Text 22"/>
+          <p:cNvPr id="356" name="Text 22"/>
           <p:cNvSpPr/>
           <p:nvPr/>
         </p:nvSpPr>
         <p:spPr>
           <a:xfrm>
             <a:off x="8229600" y="4855320"/>
-            <a:ext cx="456840" cy="228240"/>
+            <a:ext cx="456120" cy="227520"/>
           </a:xfrm>
           <a:prstGeom prst="rect">
             <a:avLst/>
@@ -12907,7 +13230,7 @@
         <p:spPr>
           <a:xfrm>
             <a:off x="457200" y="384120"/>
-            <a:ext cx="566640" cy="566640"/>
+            <a:ext cx="565920" cy="565920"/>
           </a:xfrm>
           <a:prstGeom prst="ellipse">
             <a:avLst/>
@@ -12930,6 +13253,11 @@
             <a:noAutofit/>
           </a:bodyPr>
           <a:p>
+            <a:pPr>
+              <a:lnSpc>
+                <a:spcPct val="100000"/>
+              </a:lnSpc>
+            </a:pPr>
             <a:endParaRPr b="0" lang="en-US" sz="1800" spc="-1" strike="noStrike">
               <a:solidFill>
                 <a:srgbClr val="ffffff"/>
@@ -12952,7 +13280,7 @@
         <p:spPr>
           <a:xfrm>
             <a:off x="589680" y="516600"/>
-            <a:ext cx="301320" cy="301320"/>
+            <a:ext cx="300600" cy="300600"/>
           </a:xfrm>
           <a:prstGeom prst="rect">
             <a:avLst/>
@@ -12971,7 +13299,7 @@
         <p:spPr>
           <a:xfrm>
             <a:off x="1188720" y="402480"/>
-            <a:ext cx="7314840" cy="219240"/>
+            <a:ext cx="7314120" cy="218520"/>
           </a:xfrm>
           <a:prstGeom prst="rect">
             <a:avLst/>
@@ -13001,7 +13329,7 @@
               </a:tabLst>
             </a:pPr>
             <a:r>
-              <a:rPr b="1" lang="en-US" sz="1100" spc="199" strike="noStrike">
+              <a:rPr b="1" lang="en-US" sz="1100" spc="194" strike="noStrike">
                 <a:solidFill>
                   <a:srgbClr val="0f9c92"/>
                 </a:solidFill>
@@ -13028,7 +13356,7 @@
         <p:spPr>
           <a:xfrm>
             <a:off x="1170360" y="603360"/>
-            <a:ext cx="7497720" cy="456840"/>
+            <a:ext cx="7497000" cy="456120"/>
           </a:xfrm>
           <a:prstGeom prst="rect">
             <a:avLst/>
@@ -13085,7 +13413,7 @@
         <p:spPr>
           <a:xfrm>
             <a:off x="640080" y="1417320"/>
-            <a:ext cx="7863480" cy="566640"/>
+            <a:ext cx="7862760" cy="565920"/>
           </a:xfrm>
           <a:prstGeom prst="roundRect">
             <a:avLst>
@@ -13117,6 +13445,11 @@
             <a:noAutofit/>
           </a:bodyPr>
           <a:p>
+            <a:pPr>
+              <a:lnSpc>
+                <a:spcPct val="100000"/>
+              </a:lnSpc>
+            </a:pPr>
             <a:endParaRPr b="0" lang="en-US" sz="1800" spc="-1" strike="noStrike">
               <a:solidFill>
                 <a:srgbClr val="000000"/>
@@ -13135,7 +13468,7 @@
         <p:spPr>
           <a:xfrm>
             <a:off x="841320" y="1517760"/>
-            <a:ext cx="365400" cy="365400"/>
+            <a:ext cx="364680" cy="364680"/>
           </a:xfrm>
           <a:prstGeom prst="ellipse">
             <a:avLst/>
@@ -13158,6 +13491,11 @@
             <a:noAutofit/>
           </a:bodyPr>
           <a:p>
+            <a:pPr>
+              <a:lnSpc>
+                <a:spcPct val="100000"/>
+              </a:lnSpc>
+            </a:pPr>
             <a:endParaRPr b="0" lang="en-US" sz="1800" spc="-1" strike="noStrike">
               <a:solidFill>
                 <a:srgbClr val="ffffff"/>
@@ -13176,7 +13514,7 @@
         <p:spPr>
           <a:xfrm>
             <a:off x="841320" y="1517760"/>
-            <a:ext cx="365400" cy="365400"/>
+            <a:ext cx="364680" cy="364680"/>
           </a:xfrm>
           <a:prstGeom prst="rect">
             <a:avLst/>
@@ -13233,7 +13571,7 @@
         <p:spPr>
           <a:xfrm>
             <a:off x="1417320" y="1417320"/>
-            <a:ext cx="5120280" cy="566640"/>
+            <a:ext cx="5119560" cy="565920"/>
           </a:xfrm>
           <a:prstGeom prst="rect">
             <a:avLst/>
@@ -13290,7 +13628,7 @@
         <p:spPr>
           <a:xfrm>
             <a:off x="6400800" y="1417320"/>
-            <a:ext cx="1919880" cy="566640"/>
+            <a:ext cx="1919160" cy="565920"/>
           </a:xfrm>
           <a:prstGeom prst="rect">
             <a:avLst/>
@@ -13337,7 +13675,7 @@
         <p:spPr>
           <a:xfrm>
             <a:off x="640080" y="2084760"/>
-            <a:ext cx="7863480" cy="566640"/>
+            <a:ext cx="7862760" cy="565920"/>
           </a:xfrm>
           <a:prstGeom prst="roundRect">
             <a:avLst>
@@ -13369,6 +13707,11 @@
             <a:noAutofit/>
           </a:bodyPr>
           <a:p>
+            <a:pPr>
+              <a:lnSpc>
+                <a:spcPct val="100000"/>
+              </a:lnSpc>
+            </a:pPr>
             <a:endParaRPr b="0" lang="en-US" sz="1800" spc="-1" strike="noStrike">
               <a:solidFill>
                 <a:srgbClr val="000000"/>
@@ -13387,7 +13730,7 @@
         <p:spPr>
           <a:xfrm>
             <a:off x="841320" y="2185560"/>
-            <a:ext cx="365400" cy="365400"/>
+            <a:ext cx="364680" cy="364680"/>
           </a:xfrm>
           <a:prstGeom prst="ellipse">
             <a:avLst/>
@@ -13410,6 +13753,11 @@
             <a:noAutofit/>
           </a:bodyPr>
           <a:p>
+            <a:pPr>
+              <a:lnSpc>
+                <a:spcPct val="100000"/>
+              </a:lnSpc>
+            </a:pPr>
             <a:endParaRPr b="0" lang="en-US" sz="1800" spc="-1" strike="noStrike">
               <a:solidFill>
                 <a:srgbClr val="ffffff"/>
@@ -13428,7 +13776,7 @@
         <p:spPr>
           <a:xfrm>
             <a:off x="841320" y="2185560"/>
-            <a:ext cx="365400" cy="365400"/>
+            <a:ext cx="364680" cy="364680"/>
           </a:xfrm>
           <a:prstGeom prst="rect">
             <a:avLst/>
@@ -13485,7 +13833,7 @@
         <p:spPr>
           <a:xfrm>
             <a:off x="1417320" y="2084760"/>
-            <a:ext cx="5120280" cy="566640"/>
+            <a:ext cx="5119560" cy="565920"/>
           </a:xfrm>
           <a:prstGeom prst="rect">
             <a:avLst/>
@@ -13542,7 +13890,7 @@
         <p:spPr>
           <a:xfrm>
             <a:off x="6400800" y="2084760"/>
-            <a:ext cx="1919880" cy="566640"/>
+            <a:ext cx="1919160" cy="565920"/>
           </a:xfrm>
           <a:prstGeom prst="rect">
             <a:avLst/>
@@ -13589,7 +13937,7 @@
         <p:spPr>
           <a:xfrm>
             <a:off x="640080" y="2752200"/>
-            <a:ext cx="7863480" cy="566640"/>
+            <a:ext cx="7862760" cy="565920"/>
           </a:xfrm>
           <a:prstGeom prst="roundRect">
             <a:avLst>
@@ -13621,6 +13969,11 @@
             <a:noAutofit/>
           </a:bodyPr>
           <a:p>
+            <a:pPr>
+              <a:lnSpc>
+                <a:spcPct val="100000"/>
+              </a:lnSpc>
+            </a:pPr>
             <a:endParaRPr b="0" lang="en-US" sz="1800" spc="-1" strike="noStrike">
               <a:solidFill>
                 <a:srgbClr val="000000"/>
@@ -13639,7 +13992,7 @@
         <p:spPr>
           <a:xfrm>
             <a:off x="841320" y="2853000"/>
-            <a:ext cx="365400" cy="365400"/>
+            <a:ext cx="364680" cy="364680"/>
           </a:xfrm>
           <a:prstGeom prst="ellipse">
             <a:avLst/>
@@ -13662,6 +14015,11 @@
             <a:noAutofit/>
           </a:bodyPr>
           <a:p>
+            <a:pPr>
+              <a:lnSpc>
+                <a:spcPct val="100000"/>
+              </a:lnSpc>
+            </a:pPr>
             <a:endParaRPr b="0" lang="en-US" sz="1800" spc="-1" strike="noStrike">
               <a:solidFill>
                 <a:srgbClr val="ffffff"/>
@@ -13680,7 +14038,7 @@
         <p:spPr>
           <a:xfrm>
             <a:off x="841320" y="2853000"/>
-            <a:ext cx="365400" cy="365400"/>
+            <a:ext cx="364680" cy="364680"/>
           </a:xfrm>
           <a:prstGeom prst="rect">
             <a:avLst/>
@@ -13737,7 +14095,7 @@
         <p:spPr>
           <a:xfrm>
             <a:off x="1417320" y="2752200"/>
-            <a:ext cx="5120280" cy="566640"/>
+            <a:ext cx="5119560" cy="565920"/>
           </a:xfrm>
           <a:prstGeom prst="rect">
             <a:avLst/>
@@ -13794,7 +14152,7 @@
         <p:spPr>
           <a:xfrm>
             <a:off x="6400800" y="2752200"/>
-            <a:ext cx="1919880" cy="566640"/>
+            <a:ext cx="1919160" cy="565920"/>
           </a:xfrm>
           <a:prstGeom prst="rect">
             <a:avLst/>
@@ -13841,7 +14199,7 @@
         <p:spPr>
           <a:xfrm>
             <a:off x="640080" y="3420000"/>
-            <a:ext cx="7863480" cy="566640"/>
+            <a:ext cx="7862760" cy="565920"/>
           </a:xfrm>
           <a:prstGeom prst="roundRect">
             <a:avLst>
@@ -13873,6 +14231,11 @@
             <a:noAutofit/>
           </a:bodyPr>
           <a:p>
+            <a:pPr>
+              <a:lnSpc>
+                <a:spcPct val="100000"/>
+              </a:lnSpc>
+            </a:pPr>
             <a:endParaRPr b="0" lang="en-US" sz="1800" spc="-1" strike="noStrike">
               <a:solidFill>
                 <a:srgbClr val="000000"/>
@@ -13891,7 +14254,7 @@
         <p:spPr>
           <a:xfrm>
             <a:off x="841320" y="3520440"/>
-            <a:ext cx="365400" cy="365400"/>
+            <a:ext cx="364680" cy="364680"/>
           </a:xfrm>
           <a:prstGeom prst="ellipse">
             <a:avLst/>
@@ -13914,6 +14277,11 @@
             <a:noAutofit/>
           </a:bodyPr>
           <a:p>
+            <a:pPr>
+              <a:lnSpc>
+                <a:spcPct val="100000"/>
+              </a:lnSpc>
+            </a:pPr>
             <a:endParaRPr b="0" lang="en-US" sz="1800" spc="-1" strike="noStrike">
               <a:solidFill>
                 <a:srgbClr val="ffffff"/>
@@ -13932,7 +14300,7 @@
         <p:spPr>
           <a:xfrm>
             <a:off x="841320" y="3520440"/>
-            <a:ext cx="365400" cy="365400"/>
+            <a:ext cx="364680" cy="364680"/>
           </a:xfrm>
           <a:prstGeom prst="rect">
             <a:avLst/>
@@ -13989,7 +14357,7 @@
         <p:spPr>
           <a:xfrm>
             <a:off x="1417320" y="3420000"/>
-            <a:ext cx="5120280" cy="566640"/>
+            <a:ext cx="5119560" cy="565920"/>
           </a:xfrm>
           <a:prstGeom prst="rect">
             <a:avLst/>
@@ -14046,7 +14414,7 @@
         <p:spPr>
           <a:xfrm>
             <a:off x="6400800" y="3420000"/>
-            <a:ext cx="1919880" cy="566640"/>
+            <a:ext cx="1919160" cy="565920"/>
           </a:xfrm>
           <a:prstGeom prst="rect">
             <a:avLst/>
@@ -14093,7 +14461,7 @@
         <p:spPr>
           <a:xfrm>
             <a:off x="640080" y="4087440"/>
-            <a:ext cx="7863480" cy="566640"/>
+            <a:ext cx="7862760" cy="565920"/>
           </a:xfrm>
           <a:prstGeom prst="roundRect">
             <a:avLst>
@@ -14125,6 +14493,11 @@
             <a:noAutofit/>
           </a:bodyPr>
           <a:p>
+            <a:pPr>
+              <a:lnSpc>
+                <a:spcPct val="100000"/>
+              </a:lnSpc>
+            </a:pPr>
             <a:endParaRPr b="0" lang="en-US" sz="1800" spc="-1" strike="noStrike">
               <a:solidFill>
                 <a:srgbClr val="000000"/>
@@ -14143,7 +14516,7 @@
         <p:spPr>
           <a:xfrm>
             <a:off x="841320" y="4187880"/>
-            <a:ext cx="365400" cy="365400"/>
+            <a:ext cx="364680" cy="364680"/>
           </a:xfrm>
           <a:prstGeom prst="ellipse">
             <a:avLst/>
@@ -14166,6 +14539,11 @@
             <a:noAutofit/>
           </a:bodyPr>
           <a:p>
+            <a:pPr>
+              <a:lnSpc>
+                <a:spcPct val="100000"/>
+              </a:lnSpc>
+            </a:pPr>
             <a:endParaRPr b="0" lang="en-US" sz="1800" spc="-1" strike="noStrike">
               <a:solidFill>
                 <a:srgbClr val="ffffff"/>
@@ -14184,7 +14562,7 @@
         <p:spPr>
           <a:xfrm>
             <a:off x="841320" y="4187880"/>
-            <a:ext cx="365400" cy="365400"/>
+            <a:ext cx="364680" cy="364680"/>
           </a:xfrm>
           <a:prstGeom prst="rect">
             <a:avLst/>
@@ -14241,7 +14619,7 @@
         <p:spPr>
           <a:xfrm>
             <a:off x="1417320" y="4087440"/>
-            <a:ext cx="5120280" cy="566640"/>
+            <a:ext cx="5119560" cy="565920"/>
           </a:xfrm>
           <a:prstGeom prst="rect">
             <a:avLst/>
@@ -14298,7 +14676,7 @@
         <p:spPr>
           <a:xfrm>
             <a:off x="6400800" y="4087440"/>
-            <a:ext cx="1919880" cy="566640"/>
+            <a:ext cx="1919160" cy="565920"/>
           </a:xfrm>
           <a:prstGeom prst="rect">
             <a:avLst/>
@@ -14345,7 +14723,7 @@
         <p:spPr>
           <a:xfrm>
             <a:off x="457200" y="4855320"/>
-            <a:ext cx="5486040" cy="228240"/>
+            <a:ext cx="5485320" cy="227520"/>
           </a:xfrm>
           <a:prstGeom prst="rect">
             <a:avLst/>
@@ -14402,7 +14780,7 @@
         <p:spPr>
           <a:xfrm>
             <a:off x="8229600" y="4855320"/>
-            <a:ext cx="456840" cy="228240"/>
+            <a:ext cx="456120" cy="227520"/>
           </a:xfrm>
           <a:prstGeom prst="rect">
             <a:avLst/>
@@ -14496,7 +14874,7 @@
         <p:spPr>
           <a:xfrm>
             <a:off x="457200" y="384120"/>
-            <a:ext cx="566640" cy="566640"/>
+            <a:ext cx="565920" cy="565920"/>
           </a:xfrm>
           <a:prstGeom prst="ellipse">
             <a:avLst/>
@@ -14519,6 +14897,11 @@
             <a:noAutofit/>
           </a:bodyPr>
           <a:p>
+            <a:pPr>
+              <a:lnSpc>
+                <a:spcPct val="100000"/>
+              </a:lnSpc>
+            </a:pPr>
             <a:endParaRPr b="0" lang="en-US" sz="1800" spc="-1" strike="noStrike">
               <a:solidFill>
                 <a:srgbClr val="ffffff"/>
@@ -14541,7 +14924,7 @@
         <p:spPr>
           <a:xfrm>
             <a:off x="589680" y="516600"/>
-            <a:ext cx="301320" cy="301320"/>
+            <a:ext cx="300600" cy="300600"/>
           </a:xfrm>
           <a:prstGeom prst="rect">
             <a:avLst/>
@@ -14560,7 +14943,7 @@
         <p:spPr>
           <a:xfrm>
             <a:off x="1188720" y="402480"/>
-            <a:ext cx="7314840" cy="219240"/>
+            <a:ext cx="7314120" cy="218520"/>
           </a:xfrm>
           <a:prstGeom prst="rect">
             <a:avLst/>
@@ -14590,7 +14973,7 @@
               </a:tabLst>
             </a:pPr>
             <a:r>
-              <a:rPr b="1" lang="en-US" sz="1100" spc="199" strike="noStrike">
+              <a:rPr b="1" lang="en-US" sz="1100" spc="194" strike="noStrike">
                 <a:solidFill>
                   <a:srgbClr val="0f9c92"/>
                 </a:solidFill>
@@ -14617,7 +15000,7 @@
         <p:spPr>
           <a:xfrm>
             <a:off x="1170360" y="603360"/>
-            <a:ext cx="7497720" cy="456840"/>
+            <a:ext cx="7497000" cy="456120"/>
           </a:xfrm>
           <a:prstGeom prst="rect">
             <a:avLst/>
@@ -14674,7 +15057,7 @@
         <p:spPr>
           <a:xfrm>
             <a:off x="548640" y="1417320"/>
-            <a:ext cx="4571640" cy="3017160"/>
+            <a:ext cx="4570920" cy="3016440"/>
           </a:xfrm>
           <a:prstGeom prst="rect">
             <a:avLst/>
@@ -14818,7 +15201,7 @@
         <p:spPr>
           <a:xfrm>
             <a:off x="5394960" y="1417320"/>
-            <a:ext cx="3200040" cy="868320"/>
+            <a:ext cx="3199320" cy="867600"/>
           </a:xfrm>
           <a:prstGeom prst="roundRect">
             <a:avLst>
@@ -14850,6 +15233,11 @@
             <a:noAutofit/>
           </a:bodyPr>
           <a:p>
+            <a:pPr>
+              <a:lnSpc>
+                <a:spcPct val="100000"/>
+              </a:lnSpc>
+            </a:pPr>
             <a:endParaRPr b="0" lang="en-US" sz="1800" spc="-1" strike="noStrike">
               <a:solidFill>
                 <a:srgbClr val="000000"/>
@@ -14868,7 +15256,7 @@
         <p:spPr>
           <a:xfrm>
             <a:off x="5577840" y="1636920"/>
-            <a:ext cx="420120" cy="420120"/>
+            <a:ext cx="419400" cy="419400"/>
           </a:xfrm>
           <a:prstGeom prst="ellipse">
             <a:avLst/>
@@ -14891,6 +15279,11 @@
             <a:noAutofit/>
           </a:bodyPr>
           <a:p>
+            <a:pPr>
+              <a:lnSpc>
+                <a:spcPct val="100000"/>
+              </a:lnSpc>
+            </a:pPr>
             <a:endParaRPr b="0" lang="en-US" sz="1800" spc="-1" strike="noStrike">
               <a:solidFill>
                 <a:srgbClr val="ffffff"/>
@@ -14913,7 +15306,7 @@
         <p:spPr>
           <a:xfrm>
             <a:off x="5687280" y="1746000"/>
-            <a:ext cx="201600" cy="201600"/>
+            <a:ext cx="200880" cy="200880"/>
           </a:xfrm>
           <a:prstGeom prst="rect">
             <a:avLst/>
@@ -14932,7 +15325,7 @@
         <p:spPr>
           <a:xfrm>
             <a:off x="6172200" y="1417320"/>
-            <a:ext cx="2331360" cy="868320"/>
+            <a:ext cx="2330640" cy="867600"/>
           </a:xfrm>
           <a:prstGeom prst="rect">
             <a:avLst/>
@@ -15015,7 +15408,7 @@
         <p:spPr>
           <a:xfrm>
             <a:off x="5394960" y="2423160"/>
-            <a:ext cx="3200040" cy="868320"/>
+            <a:ext cx="3199320" cy="867600"/>
           </a:xfrm>
           <a:prstGeom prst="roundRect">
             <a:avLst>
@@ -15047,6 +15440,11 @@
             <a:noAutofit/>
           </a:bodyPr>
           <a:p>
+            <a:pPr>
+              <a:lnSpc>
+                <a:spcPct val="100000"/>
+              </a:lnSpc>
+            </a:pPr>
             <a:endParaRPr b="0" lang="en-US" sz="1800" spc="-1" strike="noStrike">
               <a:solidFill>
                 <a:srgbClr val="000000"/>
@@ -15065,7 +15463,7 @@
         <p:spPr>
           <a:xfrm>
             <a:off x="5577840" y="2642760"/>
-            <a:ext cx="420120" cy="420120"/>
+            <a:ext cx="419400" cy="419400"/>
           </a:xfrm>
           <a:prstGeom prst="ellipse">
             <a:avLst/>
@@ -15088,6 +15486,11 @@
             <a:noAutofit/>
           </a:bodyPr>
           <a:p>
+            <a:pPr>
+              <a:lnSpc>
+                <a:spcPct val="100000"/>
+              </a:lnSpc>
+            </a:pPr>
             <a:endParaRPr b="0" lang="en-US" sz="1800" spc="-1" strike="noStrike">
               <a:solidFill>
                 <a:srgbClr val="ffffff"/>
@@ -15110,7 +15513,7 @@
         <p:spPr>
           <a:xfrm>
             <a:off x="5687280" y="2751840"/>
-            <a:ext cx="201600" cy="201600"/>
+            <a:ext cx="200880" cy="200880"/>
           </a:xfrm>
           <a:prstGeom prst="rect">
             <a:avLst/>
@@ -15129,7 +15532,7 @@
         <p:spPr>
           <a:xfrm>
             <a:off x="6172200" y="2423160"/>
-            <a:ext cx="2331360" cy="868320"/>
+            <a:ext cx="2330640" cy="867600"/>
           </a:xfrm>
           <a:prstGeom prst="rect">
             <a:avLst/>
@@ -15212,7 +15615,7 @@
         <p:spPr>
           <a:xfrm>
             <a:off x="5394960" y="3429000"/>
-            <a:ext cx="3200040" cy="868320"/>
+            <a:ext cx="3199320" cy="867600"/>
           </a:xfrm>
           <a:prstGeom prst="roundRect">
             <a:avLst>
@@ -15244,6 +15647,11 @@
             <a:noAutofit/>
           </a:bodyPr>
           <a:p>
+            <a:pPr>
+              <a:lnSpc>
+                <a:spcPct val="100000"/>
+              </a:lnSpc>
+            </a:pPr>
             <a:endParaRPr b="0" lang="en-US" sz="1800" spc="-1" strike="noStrike">
               <a:solidFill>
                 <a:srgbClr val="000000"/>
@@ -15262,7 +15670,7 @@
         <p:spPr>
           <a:xfrm>
             <a:off x="5577840" y="3648600"/>
-            <a:ext cx="420120" cy="420120"/>
+            <a:ext cx="419400" cy="419400"/>
           </a:xfrm>
           <a:prstGeom prst="ellipse">
             <a:avLst/>
@@ -15285,6 +15693,11 @@
             <a:noAutofit/>
           </a:bodyPr>
           <a:p>
+            <a:pPr>
+              <a:lnSpc>
+                <a:spcPct val="100000"/>
+              </a:lnSpc>
+            </a:pPr>
             <a:endParaRPr b="0" lang="en-US" sz="1800" spc="-1" strike="noStrike">
               <a:solidFill>
                 <a:srgbClr val="ffffff"/>
@@ -15307,7 +15720,7 @@
         <p:spPr>
           <a:xfrm>
             <a:off x="5687280" y="3757680"/>
-            <a:ext cx="201600" cy="201600"/>
+            <a:ext cx="200880" cy="200880"/>
           </a:xfrm>
           <a:prstGeom prst="rect">
             <a:avLst/>
@@ -15326,7 +15739,7 @@
         <p:spPr>
           <a:xfrm>
             <a:off x="6172200" y="3429000"/>
-            <a:ext cx="2331360" cy="868320"/>
+            <a:ext cx="2330640" cy="867600"/>
           </a:xfrm>
           <a:prstGeom prst="rect">
             <a:avLst/>
@@ -15409,7 +15822,7 @@
         <p:spPr>
           <a:xfrm>
             <a:off x="457200" y="4855320"/>
-            <a:ext cx="5486040" cy="228240"/>
+            <a:ext cx="5485320" cy="227520"/>
           </a:xfrm>
           <a:prstGeom prst="rect">
             <a:avLst/>
@@ -15466,7 +15879,7 @@
         <p:spPr>
           <a:xfrm>
             <a:off x="8229600" y="4855320"/>
-            <a:ext cx="456840" cy="228240"/>
+            <a:ext cx="456120" cy="227520"/>
           </a:xfrm>
           <a:prstGeom prst="rect">
             <a:avLst/>
@@ -15560,7 +15973,7 @@
         <p:spPr>
           <a:xfrm>
             <a:off x="457200" y="384120"/>
-            <a:ext cx="566640" cy="566640"/>
+            <a:ext cx="565920" cy="565920"/>
           </a:xfrm>
           <a:prstGeom prst="ellipse">
             <a:avLst/>
@@ -15583,6 +15996,11 @@
             <a:noAutofit/>
           </a:bodyPr>
           <a:p>
+            <a:pPr>
+              <a:lnSpc>
+                <a:spcPct val="100000"/>
+              </a:lnSpc>
+            </a:pPr>
             <a:endParaRPr b="0" lang="en-US" sz="1800" spc="-1" strike="noStrike">
               <a:solidFill>
                 <a:srgbClr val="ffffff"/>
@@ -15605,7 +16023,7 @@
         <p:spPr>
           <a:xfrm>
             <a:off x="589680" y="516600"/>
-            <a:ext cx="301320" cy="301320"/>
+            <a:ext cx="300600" cy="300600"/>
           </a:xfrm>
           <a:prstGeom prst="rect">
             <a:avLst/>
@@ -15624,7 +16042,7 @@
         <p:spPr>
           <a:xfrm>
             <a:off x="1188720" y="402480"/>
-            <a:ext cx="7314840" cy="219240"/>
+            <a:ext cx="7314120" cy="218520"/>
           </a:xfrm>
           <a:prstGeom prst="rect">
             <a:avLst/>
@@ -15654,7 +16072,7 @@
               </a:tabLst>
             </a:pPr>
             <a:r>
-              <a:rPr b="1" lang="en-US" sz="1100" spc="199" strike="noStrike">
+              <a:rPr b="1" lang="en-US" sz="1100" spc="194" strike="noStrike">
                 <a:solidFill>
                   <a:srgbClr val="0f9c92"/>
                 </a:solidFill>
@@ -15681,7 +16099,7 @@
         <p:spPr>
           <a:xfrm>
             <a:off x="1170360" y="603360"/>
-            <a:ext cx="7497720" cy="456840"/>
+            <a:ext cx="7497000" cy="456120"/>
           </a:xfrm>
           <a:prstGeom prst="rect">
             <a:avLst/>
@@ -15738,7 +16156,7 @@
         <p:spPr>
           <a:xfrm>
             <a:off x="548640" y="1417320"/>
-            <a:ext cx="3200040" cy="3154320"/>
+            <a:ext cx="3199320" cy="3153600"/>
           </a:xfrm>
           <a:prstGeom prst="roundRect">
             <a:avLst>
@@ -15770,6 +16188,11 @@
             <a:noAutofit/>
           </a:bodyPr>
           <a:p>
+            <a:pPr>
+              <a:lnSpc>
+                <a:spcPct val="100000"/>
+              </a:lnSpc>
+            </a:pPr>
             <a:endParaRPr b="0" lang="en-US" sz="1800" spc="-1" strike="noStrike">
               <a:solidFill>
                 <a:srgbClr val="000000"/>
@@ -15788,7 +16211,7 @@
         <p:spPr>
           <a:xfrm>
             <a:off x="777240" y="1554480"/>
-            <a:ext cx="2742840" cy="273960"/>
+            <a:ext cx="2742120" cy="273240"/>
           </a:xfrm>
           <a:prstGeom prst="rect">
             <a:avLst/>
@@ -15845,7 +16268,7 @@
         <p:spPr>
           <a:xfrm>
             <a:off x="822960" y="1920240"/>
-            <a:ext cx="2742840" cy="2559960"/>
+            <a:ext cx="2742120" cy="2559240"/>
           </a:xfrm>
           <a:prstGeom prst="rect">
             <a:avLst/>
@@ -16062,7 +16485,7 @@
         <p:spPr>
           <a:xfrm>
             <a:off x="3977640" y="1463040"/>
-            <a:ext cx="4663080" cy="273960"/>
+            <a:ext cx="4662360" cy="273240"/>
           </a:xfrm>
           <a:prstGeom prst="rect">
             <a:avLst/>
@@ -16119,7 +16542,7 @@
         <p:spPr>
           <a:xfrm>
             <a:off x="3977640" y="1810440"/>
-            <a:ext cx="4617360" cy="603000"/>
+            <a:ext cx="4616640" cy="602280"/>
           </a:xfrm>
           <a:prstGeom prst="roundRect">
             <a:avLst>
@@ -16151,6 +16574,11 @@
             <a:noAutofit/>
           </a:bodyPr>
           <a:p>
+            <a:pPr>
+              <a:lnSpc>
+                <a:spcPct val="100000"/>
+              </a:lnSpc>
+            </a:pPr>
             <a:endParaRPr b="0" lang="en-US" sz="1800" spc="-1" strike="noStrike">
               <a:solidFill>
                 <a:srgbClr val="000000"/>
@@ -16169,7 +16597,7 @@
         <p:spPr>
           <a:xfrm>
             <a:off x="4160520" y="1874520"/>
-            <a:ext cx="4297320" cy="255600"/>
+            <a:ext cx="4296600" cy="254880"/>
           </a:xfrm>
           <a:prstGeom prst="rect">
             <a:avLst/>
@@ -16226,7 +16654,7 @@
         <p:spPr>
           <a:xfrm>
             <a:off x="4160520" y="2121480"/>
-            <a:ext cx="4297320" cy="237240"/>
+            <a:ext cx="4296600" cy="236520"/>
           </a:xfrm>
           <a:prstGeom prst="rect">
             <a:avLst/>
@@ -16283,7 +16711,7 @@
         <p:spPr>
           <a:xfrm>
             <a:off x="3977640" y="2496240"/>
-            <a:ext cx="4617360" cy="603000"/>
+            <a:ext cx="4616640" cy="602280"/>
           </a:xfrm>
           <a:prstGeom prst="roundRect">
             <a:avLst>
@@ -16315,6 +16743,11 @@
             <a:noAutofit/>
           </a:bodyPr>
           <a:p>
+            <a:pPr>
+              <a:lnSpc>
+                <a:spcPct val="100000"/>
+              </a:lnSpc>
+            </a:pPr>
             <a:endParaRPr b="0" lang="en-US" sz="1800" spc="-1" strike="noStrike">
               <a:solidFill>
                 <a:srgbClr val="000000"/>
@@ -16333,7 +16766,7 @@
         <p:spPr>
           <a:xfrm>
             <a:off x="4160520" y="2560320"/>
-            <a:ext cx="4297320" cy="255600"/>
+            <a:ext cx="4296600" cy="254880"/>
           </a:xfrm>
           <a:prstGeom prst="rect">
             <a:avLst/>
@@ -16390,7 +16823,7 @@
         <p:spPr>
           <a:xfrm>
             <a:off x="4160520" y="2807280"/>
-            <a:ext cx="4297320" cy="237240"/>
+            <a:ext cx="4296600" cy="236520"/>
           </a:xfrm>
           <a:prstGeom prst="rect">
             <a:avLst/>
@@ -16447,7 +16880,7 @@
         <p:spPr>
           <a:xfrm>
             <a:off x="3977640" y="3182040"/>
-            <a:ext cx="4617360" cy="603000"/>
+            <a:ext cx="4616640" cy="602280"/>
           </a:xfrm>
           <a:prstGeom prst="roundRect">
             <a:avLst>
@@ -16479,6 +16912,11 @@
             <a:spAutoFit/>
           </a:bodyPr>
           <a:p>
+            <a:pPr>
+              <a:lnSpc>
+                <a:spcPct val="100000"/>
+              </a:lnSpc>
+            </a:pPr>
             <a:endParaRPr b="1" lang="en-US" sz="1250" spc="-1" strike="noStrike">
               <a:solidFill>
                 <a:srgbClr val="16242f"/>
@@ -16498,7 +16936,7 @@
         <p:spPr>
           <a:xfrm>
             <a:off x="4160520" y="3246120"/>
-            <a:ext cx="4297320" cy="255600"/>
+            <a:ext cx="4296600" cy="254880"/>
           </a:xfrm>
           <a:prstGeom prst="rect">
             <a:avLst/>
@@ -16542,7 +16980,6 @@
                 <a:srgbClr val="000000"/>
               </a:solidFill>
               <a:latin typeface="Arial"/>
-              <a:ea typeface="Noto Sans CJK SC"/>
             </a:endParaRPr>
           </a:p>
         </p:txBody>
@@ -16556,7 +16993,7 @@
         <p:spPr>
           <a:xfrm>
             <a:off x="4160520" y="3531240"/>
-            <a:ext cx="2226240" cy="161280"/>
+            <a:ext cx="2225520" cy="159840"/>
           </a:xfrm>
           <a:prstGeom prst="rect">
             <a:avLst/>
@@ -16596,10 +17033,9 @@
             </a:r>
             <a:endParaRPr b="0" lang="en-US" sz="1050" spc="-1" strike="noStrike">
               <a:solidFill>
-                <a:srgbClr val="5e7484"/>
-              </a:solidFill>
-              <a:latin typeface="Calibri"/>
-              <a:ea typeface="Calibri"/>
+                <a:srgbClr val="000000"/>
+              </a:solidFill>
+              <a:latin typeface="Arial"/>
             </a:endParaRPr>
           </a:p>
         </p:txBody>
@@ -16613,7 +17049,7 @@
         <p:spPr>
           <a:xfrm>
             <a:off x="3977640" y="3867840"/>
-            <a:ext cx="4617360" cy="603000"/>
+            <a:ext cx="4616640" cy="602280"/>
           </a:xfrm>
           <a:prstGeom prst="roundRect">
             <a:avLst>
@@ -16645,6 +17081,11 @@
             <a:noAutofit/>
           </a:bodyPr>
           <a:p>
+            <a:pPr>
+              <a:lnSpc>
+                <a:spcPct val="100000"/>
+              </a:lnSpc>
+            </a:pPr>
             <a:endParaRPr b="0" lang="en-US" sz="1800" spc="-1" strike="noStrike">
               <a:solidFill>
                 <a:srgbClr val="000000"/>
@@ -16663,7 +17104,7 @@
         <p:spPr>
           <a:xfrm>
             <a:off x="4160520" y="3931920"/>
-            <a:ext cx="4297320" cy="255600"/>
+            <a:ext cx="4296600" cy="254880"/>
           </a:xfrm>
           <a:prstGeom prst="rect">
             <a:avLst/>
@@ -16720,7 +17161,7 @@
         <p:spPr>
           <a:xfrm>
             <a:off x="4160520" y="4178880"/>
-            <a:ext cx="4297320" cy="237240"/>
+            <a:ext cx="4296600" cy="236520"/>
           </a:xfrm>
           <a:prstGeom prst="rect">
             <a:avLst/>
@@ -16777,7 +17218,7 @@
         <p:spPr>
           <a:xfrm>
             <a:off x="457200" y="4855320"/>
-            <a:ext cx="5486040" cy="228240"/>
+            <a:ext cx="5485320" cy="227520"/>
           </a:xfrm>
           <a:prstGeom prst="rect">
             <a:avLst/>
@@ -16834,7 +17275,7 @@
         <p:spPr>
           <a:xfrm>
             <a:off x="8229600" y="4855320"/>
-            <a:ext cx="456840" cy="228240"/>
+            <a:ext cx="456120" cy="227520"/>
           </a:xfrm>
           <a:prstGeom prst="rect">
             <a:avLst/>
@@ -16928,7 +17369,7 @@
         <p:spPr>
           <a:xfrm>
             <a:off x="457200" y="384120"/>
-            <a:ext cx="566640" cy="566640"/>
+            <a:ext cx="565920" cy="565920"/>
           </a:xfrm>
           <a:prstGeom prst="ellipse">
             <a:avLst/>
@@ -16951,6 +17392,11 @@
             <a:noAutofit/>
           </a:bodyPr>
           <a:p>
+            <a:pPr>
+              <a:lnSpc>
+                <a:spcPct val="100000"/>
+              </a:lnSpc>
+            </a:pPr>
             <a:endParaRPr b="0" lang="en-US" sz="1800" spc="-1" strike="noStrike">
               <a:solidFill>
                 <a:srgbClr val="ffffff"/>
@@ -16973,7 +17419,7 @@
         <p:spPr>
           <a:xfrm>
             <a:off x="589680" y="516600"/>
-            <a:ext cx="301320" cy="301320"/>
+            <a:ext cx="300600" cy="300600"/>
           </a:xfrm>
           <a:prstGeom prst="rect">
             <a:avLst/>
@@ -16992,7 +17438,7 @@
         <p:spPr>
           <a:xfrm>
             <a:off x="1188720" y="402480"/>
-            <a:ext cx="7314840" cy="219240"/>
+            <a:ext cx="7314120" cy="218520"/>
           </a:xfrm>
           <a:prstGeom prst="rect">
             <a:avLst/>
@@ -17022,7 +17468,7 @@
               </a:tabLst>
             </a:pPr>
             <a:r>
-              <a:rPr b="1" lang="en-US" sz="1100" spc="199" strike="noStrike">
+              <a:rPr b="1" lang="en-US" sz="1100" spc="194" strike="noStrike">
                 <a:solidFill>
                   <a:srgbClr val="0f9c92"/>
                 </a:solidFill>
@@ -17049,7 +17495,7 @@
         <p:spPr>
           <a:xfrm>
             <a:off x="1170360" y="603360"/>
-            <a:ext cx="7497720" cy="456840"/>
+            <a:ext cx="7497000" cy="456120"/>
           </a:xfrm>
           <a:prstGeom prst="rect">
             <a:avLst/>
@@ -17106,7 +17552,7 @@
         <p:spPr>
           <a:xfrm>
             <a:off x="2926080" y="1371600"/>
-            <a:ext cx="3291480" cy="712800"/>
+            <a:ext cx="3290760" cy="712080"/>
           </a:xfrm>
           <a:prstGeom prst="roundRect">
             <a:avLst>
@@ -17138,6 +17584,11 @@
             <a:noAutofit/>
           </a:bodyPr>
           <a:p>
+            <a:pPr>
+              <a:lnSpc>
+                <a:spcPct val="100000"/>
+              </a:lnSpc>
+            </a:pPr>
             <a:endParaRPr b="0" lang="en-US" sz="1800" spc="-1" strike="noStrike">
               <a:solidFill>
                 <a:srgbClr val="ffffff"/>
@@ -17156,7 +17607,7 @@
         <p:spPr>
           <a:xfrm>
             <a:off x="3017520" y="1371600"/>
-            <a:ext cx="3108600" cy="712800"/>
+            <a:ext cx="3107880" cy="712080"/>
           </a:xfrm>
           <a:prstGeom prst="rect">
             <a:avLst/>
@@ -17281,7 +17732,7 @@
         <p:spPr>
           <a:xfrm>
             <a:off x="4663440" y="2121480"/>
-            <a:ext cx="914040" cy="273960"/>
+            <a:ext cx="913320" cy="273240"/>
           </a:xfrm>
           <a:prstGeom prst="rect">
             <a:avLst/>
@@ -17338,7 +17789,7 @@
         <p:spPr>
           <a:xfrm>
             <a:off x="2926080" y="2450520"/>
-            <a:ext cx="3291480" cy="712800"/>
+            <a:ext cx="3290760" cy="712080"/>
           </a:xfrm>
           <a:prstGeom prst="roundRect">
             <a:avLst>
@@ -17370,6 +17821,11 @@
             <a:noAutofit/>
           </a:bodyPr>
           <a:p>
+            <a:pPr>
+              <a:lnSpc>
+                <a:spcPct val="100000"/>
+              </a:lnSpc>
+            </a:pPr>
             <a:endParaRPr b="0" lang="en-US" sz="1800" spc="-1" strike="noStrike">
               <a:solidFill>
                 <a:srgbClr val="ffffff"/>
@@ -17388,7 +17844,7 @@
         <p:spPr>
           <a:xfrm>
             <a:off x="3017520" y="2450520"/>
-            <a:ext cx="3108600" cy="712800"/>
+            <a:ext cx="3107880" cy="712080"/>
           </a:xfrm>
           <a:prstGeom prst="rect">
             <a:avLst/>
@@ -17555,7 +18011,7 @@
         <p:spPr>
           <a:xfrm>
             <a:off x="4069080" y="3200400"/>
-            <a:ext cx="1005480" cy="273960"/>
+            <a:ext cx="1004760" cy="273240"/>
           </a:xfrm>
           <a:prstGeom prst="rect">
             <a:avLst/>
@@ -17612,7 +18068,7 @@
         <p:spPr>
           <a:xfrm>
             <a:off x="1371600" y="3630240"/>
-            <a:ext cx="2742840" cy="712800"/>
+            <a:ext cx="2742120" cy="712080"/>
           </a:xfrm>
           <a:prstGeom prst="roundRect">
             <a:avLst>
@@ -17644,6 +18100,11 @@
             <a:noAutofit/>
           </a:bodyPr>
           <a:p>
+            <a:pPr>
+              <a:lnSpc>
+                <a:spcPct val="100000"/>
+              </a:lnSpc>
+            </a:pPr>
             <a:endParaRPr b="0" lang="en-US" sz="1800" spc="-1" strike="noStrike">
               <a:solidFill>
                 <a:srgbClr val="ffffff"/>
@@ -17662,7 +18123,7 @@
         <p:spPr>
           <a:xfrm>
             <a:off x="1463040" y="3630240"/>
-            <a:ext cx="2559960" cy="712800"/>
+            <a:ext cx="2559240" cy="712080"/>
           </a:xfrm>
           <a:prstGeom prst="rect">
             <a:avLst/>
@@ -17745,7 +18206,7 @@
         <p:spPr>
           <a:xfrm>
             <a:off x="5029200" y="3630240"/>
-            <a:ext cx="2742840" cy="712800"/>
+            <a:ext cx="2742120" cy="712080"/>
           </a:xfrm>
           <a:prstGeom prst="roundRect">
             <a:avLst>
@@ -17777,6 +18238,11 @@
             <a:noAutofit/>
           </a:bodyPr>
           <a:p>
+            <a:pPr>
+              <a:lnSpc>
+                <a:spcPct val="100000"/>
+              </a:lnSpc>
+            </a:pPr>
             <a:endParaRPr b="0" lang="en-US" sz="1800" spc="-1" strike="noStrike">
               <a:solidFill>
                 <a:srgbClr val="ffffff"/>
@@ -17795,7 +18261,7 @@
         <p:spPr>
           <a:xfrm>
             <a:off x="5120640" y="3630240"/>
-            <a:ext cx="2559960" cy="712800"/>
+            <a:ext cx="2559240" cy="712080"/>
           </a:xfrm>
           <a:prstGeom prst="rect">
             <a:avLst/>
@@ -17878,7 +18344,7 @@
         <p:spPr>
           <a:xfrm>
             <a:off x="731520" y="4526280"/>
-            <a:ext cx="7772040" cy="456840"/>
+            <a:ext cx="7771320" cy="456120"/>
           </a:xfrm>
           <a:prstGeom prst="rect">
             <a:avLst/>
@@ -17925,7 +18391,7 @@
         <p:spPr>
           <a:xfrm>
             <a:off x="457200" y="4855320"/>
-            <a:ext cx="5486040" cy="228240"/>
+            <a:ext cx="5485320" cy="227520"/>
           </a:xfrm>
           <a:prstGeom prst="rect">
             <a:avLst/>
@@ -17982,7 +18448,7 @@
         <p:spPr>
           <a:xfrm>
             <a:off x="8229600" y="4855320"/>
-            <a:ext cx="456840" cy="228240"/>
+            <a:ext cx="456120" cy="227520"/>
           </a:xfrm>
           <a:prstGeom prst="rect">
             <a:avLst/>
@@ -18076,7 +18542,7 @@
         <p:spPr>
           <a:xfrm>
             <a:off x="457200" y="384120"/>
-            <a:ext cx="566640" cy="566640"/>
+            <a:ext cx="565920" cy="565920"/>
           </a:xfrm>
           <a:prstGeom prst="ellipse">
             <a:avLst/>
@@ -18099,6 +18565,11 @@
             <a:noAutofit/>
           </a:bodyPr>
           <a:p>
+            <a:pPr>
+              <a:lnSpc>
+                <a:spcPct val="100000"/>
+              </a:lnSpc>
+            </a:pPr>
             <a:endParaRPr b="0" lang="en-US" sz="1800" spc="-1" strike="noStrike">
               <a:solidFill>
                 <a:srgbClr val="ffffff"/>
@@ -18121,7 +18592,7 @@
         <p:spPr>
           <a:xfrm>
             <a:off x="589680" y="516600"/>
-            <a:ext cx="301320" cy="301320"/>
+            <a:ext cx="300600" cy="300600"/>
           </a:xfrm>
           <a:prstGeom prst="rect">
             <a:avLst/>
@@ -18140,7 +18611,7 @@
         <p:spPr>
           <a:xfrm>
             <a:off x="1188720" y="402480"/>
-            <a:ext cx="7314840" cy="219240"/>
+            <a:ext cx="7314120" cy="218520"/>
           </a:xfrm>
           <a:prstGeom prst="rect">
             <a:avLst/>
@@ -18170,7 +18641,7 @@
               </a:tabLst>
             </a:pPr>
             <a:r>
-              <a:rPr b="1" lang="en-US" sz="1100" spc="199" strike="noStrike">
+              <a:rPr b="1" lang="en-US" sz="1100" spc="194" strike="noStrike">
                 <a:solidFill>
                   <a:srgbClr val="0f9c92"/>
                 </a:solidFill>
@@ -18197,7 +18668,7 @@
         <p:spPr>
           <a:xfrm>
             <a:off x="1170360" y="603360"/>
-            <a:ext cx="7497720" cy="456840"/>
+            <a:ext cx="7497000" cy="456120"/>
           </a:xfrm>
           <a:prstGeom prst="rect">
             <a:avLst/>
@@ -18254,7 +18725,7 @@
         <p:spPr>
           <a:xfrm>
             <a:off x="640080" y="1417320"/>
-            <a:ext cx="2468520" cy="776880"/>
+            <a:ext cx="2467800" cy="776160"/>
           </a:xfrm>
           <a:prstGeom prst="roundRect">
             <a:avLst>
@@ -18286,6 +18757,11 @@
             <a:noAutofit/>
           </a:bodyPr>
           <a:p>
+            <a:pPr>
+              <a:lnSpc>
+                <a:spcPct val="100000"/>
+              </a:lnSpc>
+            </a:pPr>
             <a:endParaRPr b="0" lang="en-US" sz="1800" spc="-1" strike="noStrike">
               <a:solidFill>
                 <a:srgbClr val="ffffff"/>
@@ -18304,7 +18780,7 @@
         <p:spPr>
           <a:xfrm>
             <a:off x="731520" y="1417320"/>
-            <a:ext cx="2285640" cy="776880"/>
+            <a:ext cx="2284920" cy="776160"/>
           </a:xfrm>
           <a:prstGeom prst="rect">
             <a:avLst/>
@@ -18419,7 +18895,7 @@
         <p:spPr>
           <a:xfrm>
             <a:off x="3520440" y="1417320"/>
-            <a:ext cx="2468520" cy="776880"/>
+            <a:ext cx="2467800" cy="776160"/>
           </a:xfrm>
           <a:prstGeom prst="roundRect">
             <a:avLst>
@@ -18451,6 +18927,11 @@
             <a:noAutofit/>
           </a:bodyPr>
           <a:p>
+            <a:pPr>
+              <a:lnSpc>
+                <a:spcPct val="100000"/>
+              </a:lnSpc>
+            </a:pPr>
             <a:endParaRPr b="0" lang="en-US" sz="1800" spc="-1" strike="noStrike">
               <a:solidFill>
                 <a:srgbClr val="ffffff"/>
@@ -18469,7 +18950,7 @@
         <p:spPr>
           <a:xfrm>
             <a:off x="3611880" y="1417320"/>
-            <a:ext cx="2285640" cy="776880"/>
+            <a:ext cx="2284920" cy="776160"/>
           </a:xfrm>
           <a:prstGeom prst="rect">
             <a:avLst/>
@@ -18584,7 +19065,7 @@
         <p:spPr>
           <a:xfrm>
             <a:off x="6400800" y="1417320"/>
-            <a:ext cx="2468520" cy="776880"/>
+            <a:ext cx="2467800" cy="776160"/>
           </a:xfrm>
           <a:prstGeom prst="roundRect">
             <a:avLst>
@@ -18616,6 +19097,11 @@
             <a:noAutofit/>
           </a:bodyPr>
           <a:p>
+            <a:pPr>
+              <a:lnSpc>
+                <a:spcPct val="100000"/>
+              </a:lnSpc>
+            </a:pPr>
             <a:endParaRPr b="0" lang="en-US" sz="1800" spc="-1" strike="noStrike">
               <a:solidFill>
                 <a:srgbClr val="ffffff"/>
@@ -18634,7 +19120,7 @@
         <p:spPr>
           <a:xfrm>
             <a:off x="6492240" y="1417320"/>
-            <a:ext cx="2285640" cy="776880"/>
+            <a:ext cx="2284920" cy="776160"/>
           </a:xfrm>
           <a:prstGeom prst="rect">
             <a:avLst/>
@@ -18707,7 +19193,7 @@
         <p:spPr>
           <a:xfrm>
             <a:off x="548640" y="2697480"/>
-            <a:ext cx="1947240" cy="1691280"/>
+            <a:ext cx="1946520" cy="1690560"/>
           </a:xfrm>
           <a:prstGeom prst="roundRect">
             <a:avLst>
@@ -18739,6 +19225,11 @@
             <a:noAutofit/>
           </a:bodyPr>
           <a:p>
+            <a:pPr>
+              <a:lnSpc>
+                <a:spcPct val="100000"/>
+              </a:lnSpc>
+            </a:pPr>
             <a:endParaRPr b="0" lang="en-US" sz="1800" spc="-1" strike="noStrike">
               <a:solidFill>
                 <a:srgbClr val="000000"/>
@@ -18757,7 +19248,7 @@
         <p:spPr>
           <a:xfrm>
             <a:off x="1239120" y="2926080"/>
-            <a:ext cx="566640" cy="566640"/>
+            <a:ext cx="565920" cy="565920"/>
           </a:xfrm>
           <a:prstGeom prst="ellipse">
             <a:avLst/>
@@ -18780,6 +19271,11 @@
             <a:noAutofit/>
           </a:bodyPr>
           <a:p>
+            <a:pPr>
+              <a:lnSpc>
+                <a:spcPct val="100000"/>
+              </a:lnSpc>
+            </a:pPr>
             <a:endParaRPr b="0" lang="en-US" sz="1800" spc="-1" strike="noStrike">
               <a:solidFill>
                 <a:srgbClr val="000000"/>
@@ -18802,7 +19298,7 @@
         <p:spPr>
           <a:xfrm>
             <a:off x="1386360" y="3073320"/>
-            <a:ext cx="271800" cy="271800"/>
+            <a:ext cx="271080" cy="271080"/>
           </a:xfrm>
           <a:prstGeom prst="rect">
             <a:avLst/>
@@ -18821,7 +19317,7 @@
         <p:spPr>
           <a:xfrm>
             <a:off x="594360" y="3657600"/>
-            <a:ext cx="1855800" cy="273960"/>
+            <a:ext cx="1855080" cy="273240"/>
           </a:xfrm>
           <a:prstGeom prst="rect">
             <a:avLst/>
@@ -18878,7 +19374,7 @@
         <p:spPr>
           <a:xfrm>
             <a:off x="594360" y="3959280"/>
-            <a:ext cx="1855800" cy="365400"/>
+            <a:ext cx="1855080" cy="364680"/>
           </a:xfrm>
           <a:prstGeom prst="rect">
             <a:avLst/>
@@ -18935,7 +19431,7 @@
         <p:spPr>
           <a:xfrm>
             <a:off x="2697480" y="2697480"/>
-            <a:ext cx="1947240" cy="1691280"/>
+            <a:ext cx="1946520" cy="1690560"/>
           </a:xfrm>
           <a:prstGeom prst="roundRect">
             <a:avLst>
@@ -18967,6 +19463,11 @@
             <a:noAutofit/>
           </a:bodyPr>
           <a:p>
+            <a:pPr>
+              <a:lnSpc>
+                <a:spcPct val="100000"/>
+              </a:lnSpc>
+            </a:pPr>
             <a:endParaRPr b="0" lang="en-US" sz="1800" spc="-1" strike="noStrike">
               <a:solidFill>
                 <a:srgbClr val="000000"/>
@@ -18985,7 +19486,7 @@
         <p:spPr>
           <a:xfrm>
             <a:off x="3387960" y="2926080"/>
-            <a:ext cx="566640" cy="566640"/>
+            <a:ext cx="565920" cy="565920"/>
           </a:xfrm>
           <a:prstGeom prst="ellipse">
             <a:avLst/>
@@ -19008,6 +19509,11 @@
             <a:noAutofit/>
           </a:bodyPr>
           <a:p>
+            <a:pPr>
+              <a:lnSpc>
+                <a:spcPct val="100000"/>
+              </a:lnSpc>
+            </a:pPr>
             <a:endParaRPr b="0" lang="en-US" sz="1800" spc="-1" strike="noStrike">
               <a:solidFill>
                 <a:srgbClr val="000000"/>
@@ -19030,7 +19536,7 @@
         <p:spPr>
           <a:xfrm>
             <a:off x="3535200" y="3073320"/>
-            <a:ext cx="271800" cy="271800"/>
+            <a:ext cx="271080" cy="271080"/>
           </a:xfrm>
           <a:prstGeom prst="rect">
             <a:avLst/>
@@ -19049,7 +19555,7 @@
         <p:spPr>
           <a:xfrm>
             <a:off x="2743200" y="3657600"/>
-            <a:ext cx="1855800" cy="273960"/>
+            <a:ext cx="1855080" cy="273240"/>
           </a:xfrm>
           <a:prstGeom prst="rect">
             <a:avLst/>
@@ -19106,7 +19612,7 @@
         <p:spPr>
           <a:xfrm>
             <a:off x="2743200" y="3959280"/>
-            <a:ext cx="1855800" cy="365400"/>
+            <a:ext cx="1855080" cy="364680"/>
           </a:xfrm>
           <a:prstGeom prst="rect">
             <a:avLst/>
@@ -19163,7 +19669,7 @@
         <p:spPr>
           <a:xfrm>
             <a:off x="4846320" y="2697480"/>
-            <a:ext cx="1947240" cy="1691280"/>
+            <a:ext cx="1946520" cy="1690560"/>
           </a:xfrm>
           <a:prstGeom prst="roundRect">
             <a:avLst>
@@ -19195,6 +19701,11 @@
             <a:noAutofit/>
           </a:bodyPr>
           <a:p>
+            <a:pPr>
+              <a:lnSpc>
+                <a:spcPct val="100000"/>
+              </a:lnSpc>
+            </a:pPr>
             <a:endParaRPr b="0" lang="en-US" sz="1800" spc="-1" strike="noStrike">
               <a:solidFill>
                 <a:srgbClr val="000000"/>
@@ -19213,7 +19724,7 @@
         <p:spPr>
           <a:xfrm>
             <a:off x="5536800" y="2926080"/>
-            <a:ext cx="566640" cy="566640"/>
+            <a:ext cx="565920" cy="565920"/>
           </a:xfrm>
           <a:prstGeom prst="ellipse">
             <a:avLst/>
@@ -19236,6 +19747,11 @@
             <a:noAutofit/>
           </a:bodyPr>
           <a:p>
+            <a:pPr>
+              <a:lnSpc>
+                <a:spcPct val="100000"/>
+              </a:lnSpc>
+            </a:pPr>
             <a:endParaRPr b="0" lang="en-US" sz="1800" spc="-1" strike="noStrike">
               <a:solidFill>
                 <a:srgbClr val="000000"/>
@@ -19258,7 +19774,7 @@
         <p:spPr>
           <a:xfrm>
             <a:off x="5684040" y="3073320"/>
-            <a:ext cx="271800" cy="271800"/>
+            <a:ext cx="271080" cy="271080"/>
           </a:xfrm>
           <a:prstGeom prst="rect">
             <a:avLst/>
@@ -19277,7 +19793,7 @@
         <p:spPr>
           <a:xfrm>
             <a:off x="4892040" y="3657600"/>
-            <a:ext cx="1855800" cy="273960"/>
+            <a:ext cx="1855080" cy="273240"/>
           </a:xfrm>
           <a:prstGeom prst="rect">
             <a:avLst/>
@@ -19334,7 +19850,7 @@
         <p:spPr>
           <a:xfrm>
             <a:off x="4892040" y="3959280"/>
-            <a:ext cx="1855800" cy="365400"/>
+            <a:ext cx="1855080" cy="364680"/>
           </a:xfrm>
           <a:prstGeom prst="rect">
             <a:avLst/>
@@ -19391,7 +19907,7 @@
         <p:spPr>
           <a:xfrm>
             <a:off x="6995160" y="2697480"/>
-            <a:ext cx="1947240" cy="1691280"/>
+            <a:ext cx="1946520" cy="1690560"/>
           </a:xfrm>
           <a:prstGeom prst="roundRect">
             <a:avLst>
@@ -19423,6 +19939,11 @@
             <a:noAutofit/>
           </a:bodyPr>
           <a:p>
+            <a:pPr>
+              <a:lnSpc>
+                <a:spcPct val="100000"/>
+              </a:lnSpc>
+            </a:pPr>
             <a:endParaRPr b="0" lang="en-US" sz="1800" spc="-1" strike="noStrike">
               <a:solidFill>
                 <a:srgbClr val="000000"/>
@@ -19441,7 +19962,7 @@
         <p:spPr>
           <a:xfrm>
             <a:off x="7685640" y="2926080"/>
-            <a:ext cx="566640" cy="566640"/>
+            <a:ext cx="565920" cy="565920"/>
           </a:xfrm>
           <a:prstGeom prst="ellipse">
             <a:avLst/>
@@ -19464,6 +19985,11 @@
             <a:noAutofit/>
           </a:bodyPr>
           <a:p>
+            <a:pPr>
+              <a:lnSpc>
+                <a:spcPct val="100000"/>
+              </a:lnSpc>
+            </a:pPr>
             <a:endParaRPr b="0" lang="en-US" sz="1800" spc="-1" strike="noStrike">
               <a:solidFill>
                 <a:srgbClr val="000000"/>
@@ -19486,7 +20012,7 @@
         <p:spPr>
           <a:xfrm>
             <a:off x="7832880" y="3073320"/>
-            <a:ext cx="271800" cy="271800"/>
+            <a:ext cx="271080" cy="271080"/>
           </a:xfrm>
           <a:prstGeom prst="rect">
             <a:avLst/>
@@ -19505,7 +20031,7 @@
         <p:spPr>
           <a:xfrm>
             <a:off x="7040880" y="3657600"/>
-            <a:ext cx="1855800" cy="273960"/>
+            <a:ext cx="1855080" cy="273240"/>
           </a:xfrm>
           <a:prstGeom prst="rect">
             <a:avLst/>
@@ -19562,7 +20088,7 @@
         <p:spPr>
           <a:xfrm>
             <a:off x="7040880" y="3959280"/>
-            <a:ext cx="1855800" cy="365400"/>
+            <a:ext cx="1855080" cy="364680"/>
           </a:xfrm>
           <a:prstGeom prst="rect">
             <a:avLst/>
@@ -19619,7 +20145,7 @@
         <p:spPr>
           <a:xfrm>
             <a:off x="457200" y="4855320"/>
-            <a:ext cx="5486040" cy="228240"/>
+            <a:ext cx="5485320" cy="227520"/>
           </a:xfrm>
           <a:prstGeom prst="rect">
             <a:avLst/>
@@ -19676,7 +20202,7 @@
         <p:spPr>
           <a:xfrm>
             <a:off x="8229600" y="4855320"/>
-            <a:ext cx="456840" cy="228240"/>
+            <a:ext cx="456120" cy="227520"/>
           </a:xfrm>
           <a:prstGeom prst="rect">
             <a:avLst/>
@@ -19770,7 +20296,7 @@
         <p:spPr>
           <a:xfrm>
             <a:off x="457200" y="384120"/>
-            <a:ext cx="566640" cy="566640"/>
+            <a:ext cx="565920" cy="565920"/>
           </a:xfrm>
           <a:prstGeom prst="ellipse">
             <a:avLst/>
@@ -19793,6 +20319,11 @@
             <a:noAutofit/>
           </a:bodyPr>
           <a:p>
+            <a:pPr>
+              <a:lnSpc>
+                <a:spcPct val="100000"/>
+              </a:lnSpc>
+            </a:pPr>
             <a:endParaRPr b="0" lang="en-US" sz="1800" spc="-1" strike="noStrike">
               <a:solidFill>
                 <a:srgbClr val="ffffff"/>
@@ -19815,7 +20346,7 @@
         <p:spPr>
           <a:xfrm>
             <a:off x="589680" y="516600"/>
-            <a:ext cx="301320" cy="301320"/>
+            <a:ext cx="300600" cy="300600"/>
           </a:xfrm>
           <a:prstGeom prst="rect">
             <a:avLst/>
@@ -19834,7 +20365,7 @@
         <p:spPr>
           <a:xfrm>
             <a:off x="1188720" y="402480"/>
-            <a:ext cx="7314840" cy="219240"/>
+            <a:ext cx="7314120" cy="218520"/>
           </a:xfrm>
           <a:prstGeom prst="rect">
             <a:avLst/>
@@ -19864,7 +20395,7 @@
               </a:tabLst>
             </a:pPr>
             <a:r>
-              <a:rPr b="1" lang="en-US" sz="1100" spc="199" strike="noStrike">
+              <a:rPr b="1" lang="en-US" sz="1100" spc="194" strike="noStrike">
                 <a:solidFill>
                   <a:srgbClr val="0f9c92"/>
                 </a:solidFill>
@@ -19891,7 +20422,7 @@
         <p:spPr>
           <a:xfrm>
             <a:off x="1170360" y="603360"/>
-            <a:ext cx="7497720" cy="456840"/>
+            <a:ext cx="7497000" cy="456120"/>
           </a:xfrm>
           <a:prstGeom prst="rect">
             <a:avLst/>
@@ -19948,7 +20479,7 @@
         <p:spPr>
           <a:xfrm>
             <a:off x="548640" y="1463040"/>
-            <a:ext cx="2587320" cy="3017160"/>
+            <a:ext cx="2586600" cy="3016440"/>
           </a:xfrm>
           <a:prstGeom prst="roundRect">
             <a:avLst>
@@ -19980,6 +20511,11 @@
             <a:noAutofit/>
           </a:bodyPr>
           <a:p>
+            <a:pPr>
+              <a:lnSpc>
+                <a:spcPct val="100000"/>
+              </a:lnSpc>
+            </a:pPr>
             <a:endParaRPr b="0" lang="en-US" sz="1800" spc="-1" strike="noStrike">
               <a:solidFill>
                 <a:srgbClr val="000000"/>
@@ -19998,7 +20534,7 @@
         <p:spPr>
           <a:xfrm>
             <a:off x="777240" y="1691640"/>
-            <a:ext cx="502560" cy="502560"/>
+            <a:ext cx="501840" cy="501840"/>
           </a:xfrm>
           <a:prstGeom prst="ellipse">
             <a:avLst/>
@@ -20021,6 +20557,11 @@
             <a:noAutofit/>
           </a:bodyPr>
           <a:p>
+            <a:pPr>
+              <a:lnSpc>
+                <a:spcPct val="100000"/>
+              </a:lnSpc>
+            </a:pPr>
             <a:endParaRPr b="0" lang="en-US" sz="1800" spc="-1" strike="noStrike">
               <a:solidFill>
                 <a:srgbClr val="ffffff"/>
@@ -20039,7 +20580,7 @@
         <p:spPr>
           <a:xfrm>
             <a:off x="777240" y="1691640"/>
-            <a:ext cx="502560" cy="502560"/>
+            <a:ext cx="501840" cy="501840"/>
           </a:xfrm>
           <a:prstGeom prst="rect">
             <a:avLst/>
@@ -20096,7 +20637,7 @@
         <p:spPr>
           <a:xfrm>
             <a:off x="777240" y="2331720"/>
-            <a:ext cx="2130120" cy="365400"/>
+            <a:ext cx="2129400" cy="364680"/>
           </a:xfrm>
           <a:prstGeom prst="rect">
             <a:avLst/>
@@ -20153,7 +20694,7 @@
         <p:spPr>
           <a:xfrm>
             <a:off x="777240" y="2743200"/>
-            <a:ext cx="2130120" cy="1554120"/>
+            <a:ext cx="2129400" cy="1553400"/>
           </a:xfrm>
           <a:prstGeom prst="rect">
             <a:avLst/>
@@ -20210,7 +20751,7 @@
         <p:spPr>
           <a:xfrm>
             <a:off x="3364920" y="1463040"/>
-            <a:ext cx="2587320" cy="3017160"/>
+            <a:ext cx="2586600" cy="3016440"/>
           </a:xfrm>
           <a:prstGeom prst="roundRect">
             <a:avLst>
@@ -20242,6 +20783,11 @@
             <a:noAutofit/>
           </a:bodyPr>
           <a:p>
+            <a:pPr>
+              <a:lnSpc>
+                <a:spcPct val="100000"/>
+              </a:lnSpc>
+            </a:pPr>
             <a:endParaRPr b="0" lang="en-US" sz="1800" spc="-1" strike="noStrike">
               <a:solidFill>
                 <a:srgbClr val="000000"/>
@@ -20260,7 +20806,7 @@
         <p:spPr>
           <a:xfrm>
             <a:off x="3593520" y="1691640"/>
-            <a:ext cx="502560" cy="502560"/>
+            <a:ext cx="501840" cy="501840"/>
           </a:xfrm>
           <a:prstGeom prst="ellipse">
             <a:avLst/>
@@ -20283,6 +20829,11 @@
             <a:noAutofit/>
           </a:bodyPr>
           <a:p>
+            <a:pPr>
+              <a:lnSpc>
+                <a:spcPct val="100000"/>
+              </a:lnSpc>
+            </a:pPr>
             <a:endParaRPr b="0" lang="en-US" sz="1800" spc="-1" strike="noStrike">
               <a:solidFill>
                 <a:srgbClr val="ffffff"/>
@@ -20301,7 +20852,7 @@
         <p:spPr>
           <a:xfrm>
             <a:off x="3593520" y="1691640"/>
-            <a:ext cx="502560" cy="502560"/>
+            <a:ext cx="501840" cy="501840"/>
           </a:xfrm>
           <a:prstGeom prst="rect">
             <a:avLst/>
@@ -20358,7 +20909,7 @@
         <p:spPr>
           <a:xfrm>
             <a:off x="3593520" y="2331720"/>
-            <a:ext cx="2130120" cy="365400"/>
+            <a:ext cx="2129400" cy="364680"/>
           </a:xfrm>
           <a:prstGeom prst="rect">
             <a:avLst/>
@@ -20415,7 +20966,7 @@
         <p:spPr>
           <a:xfrm>
             <a:off x="3593520" y="2743200"/>
-            <a:ext cx="2130120" cy="1554120"/>
+            <a:ext cx="2129400" cy="1553400"/>
           </a:xfrm>
           <a:prstGeom prst="rect">
             <a:avLst/>
@@ -20472,7 +21023,7 @@
         <p:spPr>
           <a:xfrm>
             <a:off x="6181200" y="1463040"/>
-            <a:ext cx="2587320" cy="3017160"/>
+            <a:ext cx="2586600" cy="3016440"/>
           </a:xfrm>
           <a:prstGeom prst="roundRect">
             <a:avLst>
@@ -20504,6 +21055,11 @@
             <a:noAutofit/>
           </a:bodyPr>
           <a:p>
+            <a:pPr>
+              <a:lnSpc>
+                <a:spcPct val="100000"/>
+              </a:lnSpc>
+            </a:pPr>
             <a:endParaRPr b="0" lang="en-US" sz="1800" spc="-1" strike="noStrike">
               <a:solidFill>
                 <a:srgbClr val="000000"/>
@@ -20522,7 +21078,7 @@
         <p:spPr>
           <a:xfrm>
             <a:off x="6409800" y="1691640"/>
-            <a:ext cx="502560" cy="502560"/>
+            <a:ext cx="501840" cy="501840"/>
           </a:xfrm>
           <a:prstGeom prst="ellipse">
             <a:avLst/>
@@ -20545,6 +21101,11 @@
             <a:noAutofit/>
           </a:bodyPr>
           <a:p>
+            <a:pPr>
+              <a:lnSpc>
+                <a:spcPct val="100000"/>
+              </a:lnSpc>
+            </a:pPr>
             <a:endParaRPr b="0" lang="en-US" sz="1800" spc="-1" strike="noStrike">
               <a:solidFill>
                 <a:srgbClr val="ffffff"/>
@@ -20563,7 +21124,7 @@
         <p:spPr>
           <a:xfrm>
             <a:off x="6409800" y="1691640"/>
-            <a:ext cx="502560" cy="502560"/>
+            <a:ext cx="501840" cy="501840"/>
           </a:xfrm>
           <a:prstGeom prst="rect">
             <a:avLst/>
@@ -20620,7 +21181,7 @@
         <p:spPr>
           <a:xfrm>
             <a:off x="6409800" y="2331720"/>
-            <a:ext cx="2130120" cy="365400"/>
+            <a:ext cx="2129400" cy="364680"/>
           </a:xfrm>
           <a:prstGeom prst="rect">
             <a:avLst/>
@@ -20677,7 +21238,7 @@
         <p:spPr>
           <a:xfrm>
             <a:off x="6409800" y="2743200"/>
-            <a:ext cx="2130120" cy="1554120"/>
+            <a:ext cx="2129400" cy="1553400"/>
           </a:xfrm>
           <a:prstGeom prst="rect">
             <a:avLst/>
@@ -20734,7 +21295,7 @@
         <p:spPr>
           <a:xfrm>
             <a:off x="457200" y="4855320"/>
-            <a:ext cx="5486040" cy="228240"/>
+            <a:ext cx="5485320" cy="227520"/>
           </a:xfrm>
           <a:prstGeom prst="rect">
             <a:avLst/>
@@ -20791,7 +21352,7 @@
         <p:spPr>
           <a:xfrm>
             <a:off x="8229600" y="4855320"/>
-            <a:ext cx="456840" cy="228240"/>
+            <a:ext cx="456120" cy="227520"/>
           </a:xfrm>
           <a:prstGeom prst="rect">
             <a:avLst/>
@@ -20885,7 +21446,7 @@
         <p:spPr>
           <a:xfrm>
             <a:off x="457200" y="384120"/>
-            <a:ext cx="566640" cy="566640"/>
+            <a:ext cx="565920" cy="565920"/>
           </a:xfrm>
           <a:prstGeom prst="ellipse">
             <a:avLst/>
@@ -20908,6 +21469,11 @@
             <a:noAutofit/>
           </a:bodyPr>
           <a:p>
+            <a:pPr>
+              <a:lnSpc>
+                <a:spcPct val="100000"/>
+              </a:lnSpc>
+            </a:pPr>
             <a:endParaRPr b="0" lang="en-US" sz="1800" spc="-1" strike="noStrike">
               <a:solidFill>
                 <a:srgbClr val="ffffff"/>
@@ -20930,7 +21496,7 @@
         <p:spPr>
           <a:xfrm>
             <a:off x="589680" y="516600"/>
-            <a:ext cx="301320" cy="301320"/>
+            <a:ext cx="300600" cy="300600"/>
           </a:xfrm>
           <a:prstGeom prst="rect">
             <a:avLst/>
@@ -20949,7 +21515,7 @@
         <p:spPr>
           <a:xfrm>
             <a:off x="1188720" y="402480"/>
-            <a:ext cx="7314840" cy="219240"/>
+            <a:ext cx="7314120" cy="218520"/>
           </a:xfrm>
           <a:prstGeom prst="rect">
             <a:avLst/>
@@ -20979,7 +21545,7 @@
               </a:tabLst>
             </a:pPr>
             <a:r>
-              <a:rPr b="1" lang="en-US" sz="1100" spc="199" strike="noStrike">
+              <a:rPr b="1" lang="en-US" sz="1100" spc="194" strike="noStrike">
                 <a:solidFill>
                   <a:srgbClr val="0f9c92"/>
                 </a:solidFill>
@@ -21006,7 +21572,7 @@
         <p:spPr>
           <a:xfrm>
             <a:off x="1170360" y="603360"/>
-            <a:ext cx="7497720" cy="456840"/>
+            <a:ext cx="7497000" cy="456120"/>
           </a:xfrm>
           <a:prstGeom prst="rect">
             <a:avLst/>
@@ -21063,7 +21629,7 @@
         <p:spPr>
           <a:xfrm>
             <a:off x="548640" y="1417320"/>
-            <a:ext cx="3977280" cy="1919880"/>
+            <a:ext cx="3976560" cy="1919160"/>
           </a:xfrm>
           <a:prstGeom prst="roundRect">
             <a:avLst>
@@ -21095,6 +21661,11 @@
             <a:noAutofit/>
           </a:bodyPr>
           <a:p>
+            <a:pPr>
+              <a:lnSpc>
+                <a:spcPct val="100000"/>
+              </a:lnSpc>
+            </a:pPr>
             <a:endParaRPr b="0" lang="en-US" sz="1800" spc="-1" strike="noStrike">
               <a:solidFill>
                 <a:srgbClr val="000000"/>
@@ -21113,7 +21684,7 @@
         <p:spPr>
           <a:xfrm>
             <a:off x="777240" y="1645920"/>
-            <a:ext cx="456840" cy="456840"/>
+            <a:ext cx="456120" cy="456120"/>
           </a:xfrm>
           <a:prstGeom prst="ellipse">
             <a:avLst/>
@@ -21136,6 +21707,11 @@
             <a:noAutofit/>
           </a:bodyPr>
           <a:p>
+            <a:pPr>
+              <a:lnSpc>
+                <a:spcPct val="100000"/>
+              </a:lnSpc>
+            </a:pPr>
             <a:endParaRPr b="0" lang="en-US" sz="1800" spc="-1" strike="noStrike">
               <a:solidFill>
                 <a:srgbClr val="000000"/>
@@ -21158,7 +21734,7 @@
         <p:spPr>
           <a:xfrm>
             <a:off x="896040" y="1764720"/>
-            <a:ext cx="219240" cy="219240"/>
+            <a:ext cx="218520" cy="218520"/>
           </a:xfrm>
           <a:prstGeom prst="rect">
             <a:avLst/>
@@ -21177,7 +21753,7 @@
         <p:spPr>
           <a:xfrm>
             <a:off x="1371600" y="1673280"/>
-            <a:ext cx="3017160" cy="365400"/>
+            <a:ext cx="3016440" cy="364680"/>
           </a:xfrm>
           <a:prstGeom prst="rect">
             <a:avLst/>
@@ -21234,7 +21810,7 @@
         <p:spPr>
           <a:xfrm>
             <a:off x="822960" y="2240280"/>
-            <a:ext cx="3565800" cy="1005480"/>
+            <a:ext cx="3565080" cy="1004760"/>
           </a:xfrm>
           <a:prstGeom prst="rect">
             <a:avLst/>
@@ -21358,7 +21934,7 @@
         <p:spPr>
           <a:xfrm>
             <a:off x="4617720" y="1417320"/>
-            <a:ext cx="3977280" cy="1919880"/>
+            <a:ext cx="3976560" cy="1919160"/>
           </a:xfrm>
           <a:prstGeom prst="roundRect">
             <a:avLst>
@@ -21390,6 +21966,11 @@
             <a:noAutofit/>
           </a:bodyPr>
           <a:p>
+            <a:pPr>
+              <a:lnSpc>
+                <a:spcPct val="100000"/>
+              </a:lnSpc>
+            </a:pPr>
             <a:endParaRPr b="0" lang="en-US" sz="1800" spc="-1" strike="noStrike">
               <a:solidFill>
                 <a:srgbClr val="000000"/>
@@ -21408,7 +21989,7 @@
         <p:spPr>
           <a:xfrm>
             <a:off x="4846320" y="1645920"/>
-            <a:ext cx="456840" cy="456840"/>
+            <a:ext cx="456120" cy="456120"/>
           </a:xfrm>
           <a:prstGeom prst="ellipse">
             <a:avLst/>
@@ -21431,6 +22012,11 @@
             <a:noAutofit/>
           </a:bodyPr>
           <a:p>
+            <a:pPr>
+              <a:lnSpc>
+                <a:spcPct val="100000"/>
+              </a:lnSpc>
+            </a:pPr>
             <a:endParaRPr b="0" lang="en-US" sz="1800" spc="-1" strike="noStrike">
               <a:solidFill>
                 <a:srgbClr val="000000"/>
@@ -21453,7 +22039,7 @@
         <p:spPr>
           <a:xfrm>
             <a:off x="4965120" y="1764720"/>
-            <a:ext cx="219240" cy="219240"/>
+            <a:ext cx="218520" cy="218520"/>
           </a:xfrm>
           <a:prstGeom prst="rect">
             <a:avLst/>
@@ -21472,7 +22058,7 @@
         <p:spPr>
           <a:xfrm>
             <a:off x="5440680" y="1673280"/>
-            <a:ext cx="3017160" cy="365400"/>
+            <a:ext cx="3016440" cy="364680"/>
           </a:xfrm>
           <a:prstGeom prst="rect">
             <a:avLst/>
@@ -21529,7 +22115,7 @@
         <p:spPr>
           <a:xfrm>
             <a:off x="4892040" y="2240280"/>
-            <a:ext cx="3565800" cy="1005480"/>
+            <a:ext cx="3565080" cy="1004760"/>
           </a:xfrm>
           <a:prstGeom prst="rect">
             <a:avLst/>
@@ -21653,7 +22239,7 @@
         <p:spPr>
           <a:xfrm>
             <a:off x="548640" y="3520440"/>
-            <a:ext cx="8046360" cy="1005480"/>
+            <a:ext cx="8045640" cy="1004760"/>
           </a:xfrm>
           <a:prstGeom prst="roundRect">
             <a:avLst>
@@ -21685,6 +22271,11 @@
             <a:noAutofit/>
           </a:bodyPr>
           <a:p>
+            <a:pPr>
+              <a:lnSpc>
+                <a:spcPct val="100000"/>
+              </a:lnSpc>
+            </a:pPr>
             <a:endParaRPr b="0" lang="en-US" sz="1800" spc="-1" strike="noStrike">
               <a:solidFill>
                 <a:srgbClr val="000000"/>
@@ -21703,7 +22294,7 @@
         <p:spPr>
           <a:xfrm>
             <a:off x="822960" y="3767400"/>
-            <a:ext cx="511560" cy="511560"/>
+            <a:ext cx="510840" cy="510840"/>
           </a:xfrm>
           <a:prstGeom prst="ellipse">
             <a:avLst/>
@@ -21726,6 +22317,11 @@
             <a:noAutofit/>
           </a:bodyPr>
           <a:p>
+            <a:pPr>
+              <a:lnSpc>
+                <a:spcPct val="100000"/>
+              </a:lnSpc>
+            </a:pPr>
             <a:endParaRPr b="0" lang="en-US" sz="1800" spc="-1" strike="noStrike">
               <a:solidFill>
                 <a:srgbClr val="ffffff"/>
@@ -21748,7 +22344,7 @@
         <p:spPr>
           <a:xfrm>
             <a:off x="956160" y="3900600"/>
-            <a:ext cx="245520" cy="245520"/>
+            <a:ext cx="244800" cy="244800"/>
           </a:xfrm>
           <a:prstGeom prst="rect">
             <a:avLst/>
@@ -21767,7 +22363,7 @@
         <p:spPr>
           <a:xfrm>
             <a:off x="1508760" y="3566160"/>
-            <a:ext cx="6857640" cy="914040"/>
+            <a:ext cx="6856920" cy="913320"/>
           </a:xfrm>
           <a:prstGeom prst="rect">
             <a:avLst/>
@@ -21834,7 +22430,7 @@
         <p:spPr>
           <a:xfrm>
             <a:off x="457200" y="4855320"/>
-            <a:ext cx="5486040" cy="228240"/>
+            <a:ext cx="5485320" cy="227520"/>
           </a:xfrm>
           <a:prstGeom prst="rect">
             <a:avLst/>
@@ -21891,7 +22487,7 @@
         <p:spPr>
           <a:xfrm>
             <a:off x="8229600" y="4855320"/>
-            <a:ext cx="456840" cy="228240"/>
+            <a:ext cx="456120" cy="227520"/>
           </a:xfrm>
           <a:prstGeom prst="rect">
             <a:avLst/>
@@ -21985,7 +22581,7 @@
         <p:spPr>
           <a:xfrm>
             <a:off x="457200" y="384120"/>
-            <a:ext cx="566640" cy="566640"/>
+            <a:ext cx="565920" cy="565920"/>
           </a:xfrm>
           <a:prstGeom prst="ellipse">
             <a:avLst/>
@@ -22008,6 +22604,11 @@
             <a:noAutofit/>
           </a:bodyPr>
           <a:p>
+            <a:pPr>
+              <a:lnSpc>
+                <a:spcPct val="100000"/>
+              </a:lnSpc>
+            </a:pPr>
             <a:endParaRPr b="0" lang="en-US" sz="1800" spc="-1" strike="noStrike">
               <a:solidFill>
                 <a:srgbClr val="ffffff"/>
@@ -22030,7 +22631,7 @@
         <p:spPr>
           <a:xfrm>
             <a:off x="589680" y="516600"/>
-            <a:ext cx="301320" cy="301320"/>
+            <a:ext cx="300600" cy="300600"/>
           </a:xfrm>
           <a:prstGeom prst="rect">
             <a:avLst/>
@@ -22049,7 +22650,7 @@
         <p:spPr>
           <a:xfrm>
             <a:off x="1188720" y="402480"/>
-            <a:ext cx="7314840" cy="219240"/>
+            <a:ext cx="7314120" cy="218520"/>
           </a:xfrm>
           <a:prstGeom prst="rect">
             <a:avLst/>
@@ -22079,7 +22680,7 @@
               </a:tabLst>
             </a:pPr>
             <a:r>
-              <a:rPr b="1" lang="en-US" sz="1100" spc="199" strike="noStrike">
+              <a:rPr b="1" lang="en-US" sz="1100" spc="194" strike="noStrike">
                 <a:solidFill>
                   <a:srgbClr val="0f9c92"/>
                 </a:solidFill>
@@ -22106,7 +22707,7 @@
         <p:spPr>
           <a:xfrm>
             <a:off x="1170360" y="603360"/>
-            <a:ext cx="7497720" cy="456840"/>
+            <a:ext cx="7497000" cy="456120"/>
           </a:xfrm>
           <a:prstGeom prst="rect">
             <a:avLst/>
@@ -22163,7 +22764,7 @@
         <p:spPr>
           <a:xfrm>
             <a:off x="548640" y="1417320"/>
-            <a:ext cx="4571640" cy="2377080"/>
+            <a:ext cx="4570920" cy="2376360"/>
           </a:xfrm>
           <a:prstGeom prst="rect">
             <a:avLst/>
@@ -22298,7 +22899,7 @@
         <p:spPr>
           <a:xfrm>
             <a:off x="5349240" y="1417320"/>
-            <a:ext cx="3245760" cy="1462680"/>
+            <a:ext cx="3245040" cy="1461960"/>
           </a:xfrm>
           <a:prstGeom prst="roundRect">
             <a:avLst>
@@ -22330,6 +22931,11 @@
             <a:noAutofit/>
           </a:bodyPr>
           <a:p>
+            <a:pPr>
+              <a:lnSpc>
+                <a:spcPct val="100000"/>
+              </a:lnSpc>
+            </a:pPr>
             <a:endParaRPr b="0" lang="en-US" sz="1800" spc="-1" strike="noStrike">
               <a:solidFill>
                 <a:srgbClr val="000000"/>
@@ -22348,7 +22954,7 @@
         <p:spPr>
           <a:xfrm>
             <a:off x="5577840" y="1645920"/>
-            <a:ext cx="456840" cy="456840"/>
+            <a:ext cx="456120" cy="456120"/>
           </a:xfrm>
           <a:prstGeom prst="ellipse">
             <a:avLst/>
@@ -22371,6 +22977,11 @@
             <a:noAutofit/>
           </a:bodyPr>
           <a:p>
+            <a:pPr>
+              <a:lnSpc>
+                <a:spcPct val="100000"/>
+              </a:lnSpc>
+            </a:pPr>
             <a:endParaRPr b="0" lang="en-US" sz="1800" spc="-1" strike="noStrike">
               <a:solidFill>
                 <a:srgbClr val="ffffff"/>
@@ -22393,7 +23004,7 @@
         <p:spPr>
           <a:xfrm>
             <a:off x="5696640" y="1764720"/>
-            <a:ext cx="219240" cy="219240"/>
+            <a:ext cx="218520" cy="218520"/>
           </a:xfrm>
           <a:prstGeom prst="rect">
             <a:avLst/>
@@ -22412,7 +23023,7 @@
         <p:spPr>
           <a:xfrm>
             <a:off x="6172200" y="1673280"/>
-            <a:ext cx="2285640" cy="365400"/>
+            <a:ext cx="2284920" cy="364680"/>
           </a:xfrm>
           <a:prstGeom prst="rect">
             <a:avLst/>
@@ -22469,7 +23080,7 @@
         <p:spPr>
           <a:xfrm>
             <a:off x="5577840" y="2194560"/>
-            <a:ext cx="2834280" cy="548280"/>
+            <a:ext cx="2833560" cy="547560"/>
           </a:xfrm>
           <a:prstGeom prst="rect">
             <a:avLst/>
@@ -22555,7 +23166,7 @@
         <p:spPr>
           <a:xfrm>
             <a:off x="5349240" y="3063240"/>
-            <a:ext cx="3245760" cy="1416960"/>
+            <a:ext cx="3245040" cy="1416240"/>
           </a:xfrm>
           <a:prstGeom prst="roundRect">
             <a:avLst>
@@ -22587,6 +23198,11 @@
             <a:noAutofit/>
           </a:bodyPr>
           <a:p>
+            <a:pPr>
+              <a:lnSpc>
+                <a:spcPct val="100000"/>
+              </a:lnSpc>
+            </a:pPr>
             <a:endParaRPr b="0" lang="en-US" sz="1800" spc="-1" strike="noStrike">
               <a:solidFill>
                 <a:srgbClr val="000000"/>
@@ -22605,7 +23221,7 @@
         <p:spPr>
           <a:xfrm>
             <a:off x="5577840" y="3200400"/>
-            <a:ext cx="2788560" cy="1142640"/>
+            <a:ext cx="2787840" cy="1141920"/>
           </a:xfrm>
           <a:prstGeom prst="rect">
             <a:avLst/>
@@ -22672,7 +23288,7 @@
         <p:spPr>
           <a:xfrm>
             <a:off x="457200" y="4855320"/>
-            <a:ext cx="5486040" cy="228240"/>
+            <a:ext cx="5485320" cy="227520"/>
           </a:xfrm>
           <a:prstGeom prst="rect">
             <a:avLst/>
@@ -22729,7 +23345,7 @@
         <p:spPr>
           <a:xfrm>
             <a:off x="8229600" y="4855320"/>
-            <a:ext cx="456840" cy="228240"/>
+            <a:ext cx="456120" cy="227520"/>
           </a:xfrm>
           <a:prstGeom prst="rect">
             <a:avLst/>
